--- a/Slides/Mod07/MOD007-Perception.pptx
+++ b/Slides/Mod07/MOD007-Perception.pptx
@@ -4993,6 +4993,907 @@
           </a:p>
         </p:txBody>
       </p:sp>
+      <p:grpSp>
+        <p:nvGrpSpPr>
+          <p:cNvPr id="16" name="Group 15">
+            <a:extLst>
+              <a:ext uri="{FF2B5EF4-FFF2-40B4-BE49-F238E27FC236}">
+                <a16:creationId xmlns:a16="http://schemas.microsoft.com/office/drawing/2014/main" id="{E64E80F0-BA7C-40BB-A687-7B451EC9AB0E}"/>
+              </a:ext>
+            </a:extLst>
+          </p:cNvPr>
+          <p:cNvGrpSpPr/>
+          <p:nvPr/>
+        </p:nvGrpSpPr>
+        <p:grpSpPr>
+          <a:xfrm>
+            <a:off x="3200399" y="4608745"/>
+            <a:ext cx="5371253" cy="457200"/>
+            <a:chOff x="228600" y="822960"/>
+            <a:chExt cx="8732520" cy="1463040"/>
+          </a:xfrm>
+        </p:grpSpPr>
+        <p:sp>
+          <p:nvSpPr>
+            <p:cNvPr id="17" name="Shape 3">
+              <a:extLst>
+                <a:ext uri="{FF2B5EF4-FFF2-40B4-BE49-F238E27FC236}">
+                  <a16:creationId xmlns:a16="http://schemas.microsoft.com/office/drawing/2014/main" id="{89C0CA9B-2CB5-4326-8C11-E6AF90F9A9BA}"/>
+                </a:ext>
+              </a:extLst>
+            </p:cNvPr>
+            <p:cNvSpPr/>
+            <p:nvPr/>
+          </p:nvSpPr>
+          <p:spPr>
+            <a:xfrm>
+              <a:off x="228600" y="822960"/>
+              <a:ext cx="1600200" cy="1463040"/>
+            </a:xfrm>
+            <a:prstGeom prst="rect">
+              <a:avLst/>
+            </a:prstGeom>
+            <a:solidFill>
+              <a:srgbClr val="3B82F6"/>
+            </a:solidFill>
+            <a:ln/>
+            <a:effectLst>
+              <a:outerShdw blurRad="50800" dist="25400" dir="8100000" algn="bl" rotWithShape="0">
+                <a:srgbClr val="000000">
+                  <a:alpha val="12000"/>
+                </a:srgbClr>
+              </a:outerShdw>
+            </a:effectLst>
+          </p:spPr>
+        </p:sp>
+        <p:sp>
+          <p:nvSpPr>
+            <p:cNvPr id="18" name="Text 4">
+              <a:extLst>
+                <a:ext uri="{FF2B5EF4-FFF2-40B4-BE49-F238E27FC236}">
+                  <a16:creationId xmlns:a16="http://schemas.microsoft.com/office/drawing/2014/main" id="{69914F95-1205-469F-A712-EDED6815E1AE}"/>
+                </a:ext>
+              </a:extLst>
+            </p:cNvPr>
+            <p:cNvSpPr/>
+            <p:nvPr/>
+          </p:nvSpPr>
+          <p:spPr>
+            <a:xfrm>
+              <a:off x="228600" y="868680"/>
+              <a:ext cx="1600200" cy="457200"/>
+            </a:xfrm>
+            <a:prstGeom prst="rect">
+              <a:avLst/>
+            </a:prstGeom>
+            <a:noFill/>
+            <a:ln/>
+          </p:spPr>
+          <p:txBody>
+            <a:bodyPr wrap="square" rtlCol="0" anchor="ctr"/>
+            <a:lstStyle/>
+            <a:p>
+              <a:pPr marL="0" indent="0" algn="ctr">
+                <a:buNone/>
+              </a:pPr>
+              <a:r>
+                <a:rPr lang="en-US" sz="800" b="1" dirty="0">
+                  <a:solidFill>
+                    <a:srgbClr val="FFFFFF"/>
+                  </a:solidFill>
+                  <a:latin typeface="Arial" pitchFamily="34" charset="0"/>
+                  <a:ea typeface="Arial" pitchFamily="34" charset="-122"/>
+                  <a:cs typeface="Arial" pitchFamily="34" charset="-120"/>
+                </a:rPr>
+                <a:t>SENSE</a:t>
+              </a:r>
+              <a:endParaRPr lang="en-US" sz="800" dirty="0"/>
+            </a:p>
+          </p:txBody>
+        </p:sp>
+        <p:sp>
+          <p:nvSpPr>
+            <p:cNvPr id="19" name="Text 5">
+              <a:extLst>
+                <a:ext uri="{FF2B5EF4-FFF2-40B4-BE49-F238E27FC236}">
+                  <a16:creationId xmlns:a16="http://schemas.microsoft.com/office/drawing/2014/main" id="{2E4A9A8B-3F0B-4A30-A576-A3CD8174088F}"/>
+                </a:ext>
+              </a:extLst>
+            </p:cNvPr>
+            <p:cNvSpPr/>
+            <p:nvPr/>
+          </p:nvSpPr>
+          <p:spPr>
+            <a:xfrm>
+              <a:off x="228600" y="1371600"/>
+              <a:ext cx="1600200" cy="822960"/>
+            </a:xfrm>
+            <a:prstGeom prst="rect">
+              <a:avLst/>
+            </a:prstGeom>
+            <a:noFill/>
+            <a:ln/>
+          </p:spPr>
+          <p:txBody>
+            <a:bodyPr wrap="square" rtlCol="0" anchor="ctr"/>
+            <a:lstStyle/>
+            <a:p>
+              <a:pPr marL="0" indent="0" algn="ctr">
+                <a:buNone/>
+              </a:pPr>
+              <a:r>
+                <a:rPr lang="en-US" sz="700" dirty="0">
+                  <a:solidFill>
+                    <a:srgbClr val="FFFFFF"/>
+                  </a:solidFill>
+                  <a:latin typeface="Arial" pitchFamily="34" charset="0"/>
+                  <a:ea typeface="Arial" pitchFamily="34" charset="-122"/>
+                  <a:cs typeface="Arial" pitchFamily="34" charset="-120"/>
+                </a:rPr>
+                <a:t>Raw data from</a:t>
+              </a:r>
+              <a:endParaRPr lang="en-US" sz="700" dirty="0"/>
+            </a:p>
+            <a:p>
+              <a:pPr marL="0" indent="0" algn="ctr">
+                <a:buNone/>
+              </a:pPr>
+              <a:r>
+                <a:rPr lang="en-US" sz="700" dirty="0">
+                  <a:solidFill>
+                    <a:srgbClr val="FFFFFF"/>
+                  </a:solidFill>
+                  <a:latin typeface="Arial" pitchFamily="34" charset="0"/>
+                  <a:ea typeface="Arial" pitchFamily="34" charset="-122"/>
+                  <a:cs typeface="Arial" pitchFamily="34" charset="-120"/>
+                </a:rPr>
+                <a:t>camera, LiDAR</a:t>
+              </a:r>
+              <a:endParaRPr lang="en-US" sz="700" dirty="0"/>
+            </a:p>
+          </p:txBody>
+        </p:sp>
+        <p:sp>
+          <p:nvSpPr>
+            <p:cNvPr id="20" name="Text 6">
+              <a:extLst>
+                <a:ext uri="{FF2B5EF4-FFF2-40B4-BE49-F238E27FC236}">
+                  <a16:creationId xmlns:a16="http://schemas.microsoft.com/office/drawing/2014/main" id="{B61849D8-5921-4A3C-A734-69F739B31E76}"/>
+                </a:ext>
+              </a:extLst>
+            </p:cNvPr>
+            <p:cNvSpPr/>
+            <p:nvPr/>
+          </p:nvSpPr>
+          <p:spPr>
+            <a:xfrm>
+              <a:off x="1828800" y="1188720"/>
+              <a:ext cx="182880" cy="457200"/>
+            </a:xfrm>
+            <a:prstGeom prst="rect">
+              <a:avLst/>
+            </a:prstGeom>
+            <a:noFill/>
+            <a:ln/>
+          </p:spPr>
+          <p:txBody>
+            <a:bodyPr wrap="square" rtlCol="0" anchor="ctr"/>
+            <a:lstStyle/>
+            <a:p>
+              <a:pPr marL="0" indent="0">
+                <a:buNone/>
+              </a:pPr>
+              <a:r>
+                <a:rPr lang="en-US" sz="900" dirty="0">
+                  <a:solidFill>
+                    <a:srgbClr val="6B7280"/>
+                  </a:solidFill>
+                  <a:latin typeface="Arial" pitchFamily="34" charset="0"/>
+                  <a:ea typeface="Arial" pitchFamily="34" charset="-122"/>
+                  <a:cs typeface="Arial" pitchFamily="34" charset="-120"/>
+                </a:rPr>
+                <a:t>→</a:t>
+              </a:r>
+              <a:endParaRPr lang="en-US" sz="900" dirty="0"/>
+            </a:p>
+          </p:txBody>
+        </p:sp>
+        <p:sp>
+          <p:nvSpPr>
+            <p:cNvPr id="21" name="Shape 7">
+              <a:extLst>
+                <a:ext uri="{FF2B5EF4-FFF2-40B4-BE49-F238E27FC236}">
+                  <a16:creationId xmlns:a16="http://schemas.microsoft.com/office/drawing/2014/main" id="{ADF1C4DF-B00C-413D-BBA7-02D5753E5D78}"/>
+                </a:ext>
+              </a:extLst>
+            </p:cNvPr>
+            <p:cNvSpPr/>
+            <p:nvPr/>
+          </p:nvSpPr>
+          <p:spPr>
+            <a:xfrm>
+              <a:off x="2011680" y="822960"/>
+              <a:ext cx="1600200" cy="1463040"/>
+            </a:xfrm>
+            <a:prstGeom prst="rect">
+              <a:avLst/>
+            </a:prstGeom>
+            <a:solidFill>
+              <a:srgbClr val="0D9488"/>
+            </a:solidFill>
+            <a:ln/>
+            <a:effectLst>
+              <a:outerShdw blurRad="50800" dist="25400" dir="8100000" algn="bl" rotWithShape="0">
+                <a:srgbClr val="000000">
+                  <a:alpha val="12000"/>
+                </a:srgbClr>
+              </a:outerShdw>
+            </a:effectLst>
+          </p:spPr>
+        </p:sp>
+        <p:sp>
+          <p:nvSpPr>
+            <p:cNvPr id="22" name="Text 8">
+              <a:extLst>
+                <a:ext uri="{FF2B5EF4-FFF2-40B4-BE49-F238E27FC236}">
+                  <a16:creationId xmlns:a16="http://schemas.microsoft.com/office/drawing/2014/main" id="{83653E59-4398-4230-BBBD-966FEA85C8FC}"/>
+                </a:ext>
+              </a:extLst>
+            </p:cNvPr>
+            <p:cNvSpPr/>
+            <p:nvPr/>
+          </p:nvSpPr>
+          <p:spPr>
+            <a:xfrm>
+              <a:off x="2011680" y="868680"/>
+              <a:ext cx="1600200" cy="457200"/>
+            </a:xfrm>
+            <a:prstGeom prst="rect">
+              <a:avLst/>
+            </a:prstGeom>
+            <a:noFill/>
+            <a:ln/>
+          </p:spPr>
+          <p:txBody>
+            <a:bodyPr wrap="square" rtlCol="0" anchor="ctr"/>
+            <a:lstStyle/>
+            <a:p>
+              <a:pPr marL="0" indent="0" algn="ctr">
+                <a:buNone/>
+              </a:pPr>
+              <a:r>
+                <a:rPr lang="en-US" sz="800" b="1" dirty="0">
+                  <a:solidFill>
+                    <a:srgbClr val="FFFFFF"/>
+                  </a:solidFill>
+                  <a:latin typeface="Arial" pitchFamily="34" charset="0"/>
+                  <a:ea typeface="Arial" pitchFamily="34" charset="-122"/>
+                  <a:cs typeface="Arial" pitchFamily="34" charset="-120"/>
+                </a:rPr>
+                <a:t>PREPROCESS</a:t>
+              </a:r>
+              <a:endParaRPr lang="en-US" sz="800" dirty="0"/>
+            </a:p>
+          </p:txBody>
+        </p:sp>
+        <p:sp>
+          <p:nvSpPr>
+            <p:cNvPr id="23" name="Text 9">
+              <a:extLst>
+                <a:ext uri="{FF2B5EF4-FFF2-40B4-BE49-F238E27FC236}">
+                  <a16:creationId xmlns:a16="http://schemas.microsoft.com/office/drawing/2014/main" id="{E1944ECE-80F0-4CA2-ADA2-FB82AA7380DD}"/>
+                </a:ext>
+              </a:extLst>
+            </p:cNvPr>
+            <p:cNvSpPr/>
+            <p:nvPr/>
+          </p:nvSpPr>
+          <p:spPr>
+            <a:xfrm>
+              <a:off x="2011680" y="1371600"/>
+              <a:ext cx="1600200" cy="822960"/>
+            </a:xfrm>
+            <a:prstGeom prst="rect">
+              <a:avLst/>
+            </a:prstGeom>
+            <a:noFill/>
+            <a:ln/>
+          </p:spPr>
+          <p:txBody>
+            <a:bodyPr wrap="square" rtlCol="0" anchor="ctr"/>
+            <a:lstStyle/>
+            <a:p>
+              <a:pPr marL="0" indent="0" algn="ctr">
+                <a:buNone/>
+              </a:pPr>
+              <a:r>
+                <a:rPr lang="en-US" sz="700" dirty="0">
+                  <a:solidFill>
+                    <a:srgbClr val="FFFFFF"/>
+                  </a:solidFill>
+                  <a:latin typeface="Arial" pitchFamily="34" charset="0"/>
+                  <a:ea typeface="Arial" pitchFamily="34" charset="-122"/>
+                  <a:cs typeface="Arial" pitchFamily="34" charset="-120"/>
+                </a:rPr>
+                <a:t>Filter noise,</a:t>
+              </a:r>
+              <a:endParaRPr lang="en-US" sz="700" dirty="0"/>
+            </a:p>
+            <a:p>
+              <a:pPr marL="0" indent="0" algn="ctr">
+                <a:buNone/>
+              </a:pPr>
+              <a:r>
+                <a:rPr lang="en-US" sz="700" dirty="0">
+                  <a:solidFill>
+                    <a:srgbClr val="FFFFFF"/>
+                  </a:solidFill>
+                  <a:latin typeface="Arial" pitchFamily="34" charset="0"/>
+                  <a:ea typeface="Arial" pitchFamily="34" charset="-122"/>
+                  <a:cs typeface="Arial" pitchFamily="34" charset="-120"/>
+                </a:rPr>
+                <a:t>enhance features</a:t>
+              </a:r>
+              <a:endParaRPr lang="en-US" sz="700" dirty="0"/>
+            </a:p>
+          </p:txBody>
+        </p:sp>
+        <p:sp>
+          <p:nvSpPr>
+            <p:cNvPr id="24" name="Text 10">
+              <a:extLst>
+                <a:ext uri="{FF2B5EF4-FFF2-40B4-BE49-F238E27FC236}">
+                  <a16:creationId xmlns:a16="http://schemas.microsoft.com/office/drawing/2014/main" id="{AEF3EE82-759A-434C-A3B1-83321E65D782}"/>
+                </a:ext>
+              </a:extLst>
+            </p:cNvPr>
+            <p:cNvSpPr/>
+            <p:nvPr/>
+          </p:nvSpPr>
+          <p:spPr>
+            <a:xfrm>
+              <a:off x="3611880" y="1188720"/>
+              <a:ext cx="182880" cy="457200"/>
+            </a:xfrm>
+            <a:prstGeom prst="rect">
+              <a:avLst/>
+            </a:prstGeom>
+            <a:noFill/>
+            <a:ln/>
+          </p:spPr>
+          <p:txBody>
+            <a:bodyPr wrap="square" rtlCol="0" anchor="ctr"/>
+            <a:lstStyle/>
+            <a:p>
+              <a:pPr marL="0" indent="0">
+                <a:buNone/>
+              </a:pPr>
+              <a:r>
+                <a:rPr lang="en-US" sz="900" dirty="0">
+                  <a:solidFill>
+                    <a:srgbClr val="6B7280"/>
+                  </a:solidFill>
+                  <a:latin typeface="Arial" pitchFamily="34" charset="0"/>
+                  <a:ea typeface="Arial" pitchFamily="34" charset="-122"/>
+                  <a:cs typeface="Arial" pitchFamily="34" charset="-120"/>
+                </a:rPr>
+                <a:t>→</a:t>
+              </a:r>
+              <a:endParaRPr lang="en-US" sz="900" dirty="0"/>
+            </a:p>
+          </p:txBody>
+        </p:sp>
+        <p:sp>
+          <p:nvSpPr>
+            <p:cNvPr id="25" name="Shape 11">
+              <a:extLst>
+                <a:ext uri="{FF2B5EF4-FFF2-40B4-BE49-F238E27FC236}">
+                  <a16:creationId xmlns:a16="http://schemas.microsoft.com/office/drawing/2014/main" id="{202C84D2-E3E4-4BB1-9672-2CB310E22E43}"/>
+                </a:ext>
+              </a:extLst>
+            </p:cNvPr>
+            <p:cNvSpPr/>
+            <p:nvPr/>
+          </p:nvSpPr>
+          <p:spPr>
+            <a:xfrm>
+              <a:off x="3794760" y="822960"/>
+              <a:ext cx="1600200" cy="1463040"/>
+            </a:xfrm>
+            <a:prstGeom prst="rect">
+              <a:avLst/>
+            </a:prstGeom>
+            <a:solidFill>
+              <a:srgbClr val="F59E0B"/>
+            </a:solidFill>
+            <a:ln/>
+            <a:effectLst>
+              <a:outerShdw blurRad="50800" dist="25400" dir="8100000" algn="bl" rotWithShape="0">
+                <a:srgbClr val="000000">
+                  <a:alpha val="12000"/>
+                </a:srgbClr>
+              </a:outerShdw>
+            </a:effectLst>
+          </p:spPr>
+        </p:sp>
+        <p:sp>
+          <p:nvSpPr>
+            <p:cNvPr id="26" name="Text 12">
+              <a:extLst>
+                <a:ext uri="{FF2B5EF4-FFF2-40B4-BE49-F238E27FC236}">
+                  <a16:creationId xmlns:a16="http://schemas.microsoft.com/office/drawing/2014/main" id="{5468D72E-703E-4AFF-AFE8-56411BB87A28}"/>
+                </a:ext>
+              </a:extLst>
+            </p:cNvPr>
+            <p:cNvSpPr/>
+            <p:nvPr/>
+          </p:nvSpPr>
+          <p:spPr>
+            <a:xfrm>
+              <a:off x="3794760" y="868680"/>
+              <a:ext cx="1600200" cy="457200"/>
+            </a:xfrm>
+            <a:prstGeom prst="rect">
+              <a:avLst/>
+            </a:prstGeom>
+            <a:noFill/>
+            <a:ln/>
+          </p:spPr>
+          <p:txBody>
+            <a:bodyPr wrap="square" rtlCol="0" anchor="ctr"/>
+            <a:lstStyle/>
+            <a:p>
+              <a:pPr marL="0" indent="0" algn="ctr">
+                <a:buNone/>
+              </a:pPr>
+              <a:r>
+                <a:rPr lang="en-US" sz="800" b="1" dirty="0">
+                  <a:solidFill>
+                    <a:srgbClr val="FFFFFF"/>
+                  </a:solidFill>
+                  <a:latin typeface="Arial" pitchFamily="34" charset="0"/>
+                  <a:ea typeface="Arial" pitchFamily="34" charset="-122"/>
+                  <a:cs typeface="Arial" pitchFamily="34" charset="-120"/>
+                </a:rPr>
+                <a:t>DETECT</a:t>
+              </a:r>
+              <a:endParaRPr lang="en-US" sz="800" dirty="0"/>
+            </a:p>
+          </p:txBody>
+        </p:sp>
+        <p:sp>
+          <p:nvSpPr>
+            <p:cNvPr id="27" name="Text 13">
+              <a:extLst>
+                <a:ext uri="{FF2B5EF4-FFF2-40B4-BE49-F238E27FC236}">
+                  <a16:creationId xmlns:a16="http://schemas.microsoft.com/office/drawing/2014/main" id="{50C9A720-DB06-4738-8D88-0297FE89C3C6}"/>
+                </a:ext>
+              </a:extLst>
+            </p:cNvPr>
+            <p:cNvSpPr/>
+            <p:nvPr/>
+          </p:nvSpPr>
+          <p:spPr>
+            <a:xfrm>
+              <a:off x="3794760" y="1371600"/>
+              <a:ext cx="1600200" cy="822960"/>
+            </a:xfrm>
+            <a:prstGeom prst="rect">
+              <a:avLst/>
+            </a:prstGeom>
+            <a:noFill/>
+            <a:ln/>
+          </p:spPr>
+          <p:txBody>
+            <a:bodyPr wrap="square" rtlCol="0" anchor="ctr"/>
+            <a:lstStyle/>
+            <a:p>
+              <a:pPr marL="0" indent="0" algn="ctr">
+                <a:buNone/>
+              </a:pPr>
+              <a:r>
+                <a:rPr lang="en-US" sz="700" dirty="0">
+                  <a:solidFill>
+                    <a:srgbClr val="FFFFFF"/>
+                  </a:solidFill>
+                  <a:latin typeface="Arial" pitchFamily="34" charset="0"/>
+                  <a:ea typeface="Arial" pitchFamily="34" charset="-122"/>
+                  <a:cs typeface="Arial" pitchFamily="34" charset="-120"/>
+                </a:rPr>
+                <a:t>Find objects,</a:t>
+              </a:r>
+              <a:endParaRPr lang="en-US" sz="700" dirty="0"/>
+            </a:p>
+            <a:p>
+              <a:pPr marL="0" indent="0" algn="ctr">
+                <a:buNone/>
+              </a:pPr>
+              <a:r>
+                <a:rPr lang="en-US" sz="700" dirty="0">
+                  <a:solidFill>
+                    <a:srgbClr val="FFFFFF"/>
+                  </a:solidFill>
+                  <a:latin typeface="Arial" pitchFamily="34" charset="0"/>
+                  <a:ea typeface="Arial" pitchFamily="34" charset="-122"/>
+                  <a:cs typeface="Arial" pitchFamily="34" charset="-120"/>
+                </a:rPr>
+                <a:t>edges, features</a:t>
+              </a:r>
+              <a:endParaRPr lang="en-US" sz="700" dirty="0"/>
+            </a:p>
+          </p:txBody>
+        </p:sp>
+        <p:sp>
+          <p:nvSpPr>
+            <p:cNvPr id="28" name="Text 14">
+              <a:extLst>
+                <a:ext uri="{FF2B5EF4-FFF2-40B4-BE49-F238E27FC236}">
+                  <a16:creationId xmlns:a16="http://schemas.microsoft.com/office/drawing/2014/main" id="{D5B44D2C-7F95-4F03-8A72-72564202BF95}"/>
+                </a:ext>
+              </a:extLst>
+            </p:cNvPr>
+            <p:cNvSpPr/>
+            <p:nvPr/>
+          </p:nvSpPr>
+          <p:spPr>
+            <a:xfrm>
+              <a:off x="5394960" y="1188720"/>
+              <a:ext cx="182880" cy="457200"/>
+            </a:xfrm>
+            <a:prstGeom prst="rect">
+              <a:avLst/>
+            </a:prstGeom>
+            <a:noFill/>
+            <a:ln/>
+          </p:spPr>
+          <p:txBody>
+            <a:bodyPr wrap="square" rtlCol="0" anchor="ctr"/>
+            <a:lstStyle/>
+            <a:p>
+              <a:pPr marL="0" indent="0">
+                <a:buNone/>
+              </a:pPr>
+              <a:r>
+                <a:rPr lang="en-US" sz="900" dirty="0">
+                  <a:solidFill>
+                    <a:srgbClr val="6B7280"/>
+                  </a:solidFill>
+                  <a:latin typeface="Arial" pitchFamily="34" charset="0"/>
+                  <a:ea typeface="Arial" pitchFamily="34" charset="-122"/>
+                  <a:cs typeface="Arial" pitchFamily="34" charset="-120"/>
+                </a:rPr>
+                <a:t>→</a:t>
+              </a:r>
+              <a:endParaRPr lang="en-US" sz="900" dirty="0"/>
+            </a:p>
+          </p:txBody>
+        </p:sp>
+        <p:sp>
+          <p:nvSpPr>
+            <p:cNvPr id="29" name="Shape 15">
+              <a:extLst>
+                <a:ext uri="{FF2B5EF4-FFF2-40B4-BE49-F238E27FC236}">
+                  <a16:creationId xmlns:a16="http://schemas.microsoft.com/office/drawing/2014/main" id="{2625F183-AE91-4149-8E0C-2819F51BFF2E}"/>
+                </a:ext>
+              </a:extLst>
+            </p:cNvPr>
+            <p:cNvSpPr/>
+            <p:nvPr/>
+          </p:nvSpPr>
+          <p:spPr>
+            <a:xfrm>
+              <a:off x="5577840" y="822960"/>
+              <a:ext cx="1600200" cy="1463040"/>
+            </a:xfrm>
+            <a:prstGeom prst="rect">
+              <a:avLst/>
+            </a:prstGeom>
+            <a:solidFill>
+              <a:srgbClr val="8B5CF6"/>
+            </a:solidFill>
+            <a:ln/>
+            <a:effectLst>
+              <a:outerShdw blurRad="50800" dist="25400" dir="8100000" algn="bl" rotWithShape="0">
+                <a:srgbClr val="000000">
+                  <a:alpha val="12000"/>
+                </a:srgbClr>
+              </a:outerShdw>
+            </a:effectLst>
+          </p:spPr>
+        </p:sp>
+        <p:sp>
+          <p:nvSpPr>
+            <p:cNvPr id="30" name="Text 16">
+              <a:extLst>
+                <a:ext uri="{FF2B5EF4-FFF2-40B4-BE49-F238E27FC236}">
+                  <a16:creationId xmlns:a16="http://schemas.microsoft.com/office/drawing/2014/main" id="{C5F0A632-C358-4CE8-B4A3-72355B2C0A63}"/>
+                </a:ext>
+              </a:extLst>
+            </p:cNvPr>
+            <p:cNvSpPr/>
+            <p:nvPr/>
+          </p:nvSpPr>
+          <p:spPr>
+            <a:xfrm>
+              <a:off x="5577840" y="868680"/>
+              <a:ext cx="1600200" cy="457200"/>
+            </a:xfrm>
+            <a:prstGeom prst="rect">
+              <a:avLst/>
+            </a:prstGeom>
+            <a:noFill/>
+            <a:ln/>
+          </p:spPr>
+          <p:txBody>
+            <a:bodyPr wrap="square" rtlCol="0" anchor="ctr"/>
+            <a:lstStyle/>
+            <a:p>
+              <a:pPr marL="0" indent="0" algn="ctr">
+                <a:buNone/>
+              </a:pPr>
+              <a:r>
+                <a:rPr lang="en-US" sz="800" b="1" dirty="0">
+                  <a:solidFill>
+                    <a:srgbClr val="FFFFFF"/>
+                  </a:solidFill>
+                  <a:latin typeface="Arial" pitchFamily="34" charset="0"/>
+                  <a:ea typeface="Arial" pitchFamily="34" charset="-122"/>
+                  <a:cs typeface="Arial" pitchFamily="34" charset="-120"/>
+                </a:rPr>
+                <a:t>CLASSIFY</a:t>
+              </a:r>
+              <a:endParaRPr lang="en-US" sz="800" dirty="0"/>
+            </a:p>
+          </p:txBody>
+        </p:sp>
+        <p:sp>
+          <p:nvSpPr>
+            <p:cNvPr id="31" name="Text 17">
+              <a:extLst>
+                <a:ext uri="{FF2B5EF4-FFF2-40B4-BE49-F238E27FC236}">
+                  <a16:creationId xmlns:a16="http://schemas.microsoft.com/office/drawing/2014/main" id="{98DA2394-3602-424F-98E1-12C00D46E283}"/>
+                </a:ext>
+              </a:extLst>
+            </p:cNvPr>
+            <p:cNvSpPr/>
+            <p:nvPr/>
+          </p:nvSpPr>
+          <p:spPr>
+            <a:xfrm>
+              <a:off x="5577840" y="1371600"/>
+              <a:ext cx="1600200" cy="822960"/>
+            </a:xfrm>
+            <a:prstGeom prst="rect">
+              <a:avLst/>
+            </a:prstGeom>
+            <a:noFill/>
+            <a:ln/>
+          </p:spPr>
+          <p:txBody>
+            <a:bodyPr wrap="square" rtlCol="0" anchor="ctr"/>
+            <a:lstStyle/>
+            <a:p>
+              <a:pPr marL="0" indent="0" algn="ctr">
+                <a:buNone/>
+              </a:pPr>
+              <a:r>
+                <a:rPr lang="en-US" sz="700" dirty="0">
+                  <a:solidFill>
+                    <a:srgbClr val="FFFFFF"/>
+                  </a:solidFill>
+                  <a:latin typeface="Arial" pitchFamily="34" charset="0"/>
+                  <a:ea typeface="Arial" pitchFamily="34" charset="-122"/>
+                  <a:cs typeface="Arial" pitchFamily="34" charset="-120"/>
+                </a:rPr>
+                <a:t>What IS it?</a:t>
+              </a:r>
+              <a:endParaRPr lang="en-US" sz="700" dirty="0"/>
+            </a:p>
+            <a:p>
+              <a:pPr marL="0" indent="0" algn="ctr">
+                <a:buNone/>
+              </a:pPr>
+              <a:r>
+                <a:rPr lang="en-US" sz="700" dirty="0">
+                  <a:solidFill>
+                    <a:srgbClr val="FFFFFF"/>
+                  </a:solidFill>
+                  <a:latin typeface="Arial" pitchFamily="34" charset="0"/>
+                  <a:ea typeface="Arial" pitchFamily="34" charset="-122"/>
+                  <a:cs typeface="Arial" pitchFamily="34" charset="-120"/>
+                </a:rPr>
+                <a:t>chair, door, wall</a:t>
+              </a:r>
+              <a:endParaRPr lang="en-US" sz="700" dirty="0"/>
+            </a:p>
+          </p:txBody>
+        </p:sp>
+        <p:sp>
+          <p:nvSpPr>
+            <p:cNvPr id="32" name="Text 18">
+              <a:extLst>
+                <a:ext uri="{FF2B5EF4-FFF2-40B4-BE49-F238E27FC236}">
+                  <a16:creationId xmlns:a16="http://schemas.microsoft.com/office/drawing/2014/main" id="{4965A3DD-0096-4A43-AEE6-D8D9B21CF90F}"/>
+                </a:ext>
+              </a:extLst>
+            </p:cNvPr>
+            <p:cNvSpPr/>
+            <p:nvPr/>
+          </p:nvSpPr>
+          <p:spPr>
+            <a:xfrm>
+              <a:off x="7178040" y="1188720"/>
+              <a:ext cx="182880" cy="457200"/>
+            </a:xfrm>
+            <a:prstGeom prst="rect">
+              <a:avLst/>
+            </a:prstGeom>
+            <a:noFill/>
+            <a:ln/>
+          </p:spPr>
+          <p:txBody>
+            <a:bodyPr wrap="square" rtlCol="0" anchor="ctr"/>
+            <a:lstStyle/>
+            <a:p>
+              <a:pPr marL="0" indent="0">
+                <a:buNone/>
+              </a:pPr>
+              <a:r>
+                <a:rPr lang="en-US" sz="900" dirty="0">
+                  <a:solidFill>
+                    <a:srgbClr val="6B7280"/>
+                  </a:solidFill>
+                  <a:latin typeface="Arial" pitchFamily="34" charset="0"/>
+                  <a:ea typeface="Arial" pitchFamily="34" charset="-122"/>
+                  <a:cs typeface="Arial" pitchFamily="34" charset="-120"/>
+                </a:rPr>
+                <a:t>→</a:t>
+              </a:r>
+              <a:endParaRPr lang="en-US" sz="900" dirty="0"/>
+            </a:p>
+          </p:txBody>
+        </p:sp>
+        <p:sp>
+          <p:nvSpPr>
+            <p:cNvPr id="33" name="Shape 19">
+              <a:extLst>
+                <a:ext uri="{FF2B5EF4-FFF2-40B4-BE49-F238E27FC236}">
+                  <a16:creationId xmlns:a16="http://schemas.microsoft.com/office/drawing/2014/main" id="{81B9FABD-5850-4AD1-9A99-9B916DA9F648}"/>
+                </a:ext>
+              </a:extLst>
+            </p:cNvPr>
+            <p:cNvSpPr/>
+            <p:nvPr/>
+          </p:nvSpPr>
+          <p:spPr>
+            <a:xfrm>
+              <a:off x="7360920" y="822960"/>
+              <a:ext cx="1600200" cy="1463040"/>
+            </a:xfrm>
+            <a:prstGeom prst="rect">
+              <a:avLst/>
+            </a:prstGeom>
+            <a:solidFill>
+              <a:srgbClr val="10B981"/>
+            </a:solidFill>
+            <a:ln/>
+            <a:effectLst>
+              <a:outerShdw blurRad="50800" dist="25400" dir="8100000" algn="bl" rotWithShape="0">
+                <a:srgbClr val="000000">
+                  <a:alpha val="12000"/>
+                </a:srgbClr>
+              </a:outerShdw>
+            </a:effectLst>
+          </p:spPr>
+        </p:sp>
+        <p:sp>
+          <p:nvSpPr>
+            <p:cNvPr id="34" name="Text 20">
+              <a:extLst>
+                <a:ext uri="{FF2B5EF4-FFF2-40B4-BE49-F238E27FC236}">
+                  <a16:creationId xmlns:a16="http://schemas.microsoft.com/office/drawing/2014/main" id="{0A51AD2F-DF17-4493-964B-E39DBBC23C24}"/>
+                </a:ext>
+              </a:extLst>
+            </p:cNvPr>
+            <p:cNvSpPr/>
+            <p:nvPr/>
+          </p:nvSpPr>
+          <p:spPr>
+            <a:xfrm>
+              <a:off x="7360920" y="868680"/>
+              <a:ext cx="1600200" cy="457200"/>
+            </a:xfrm>
+            <a:prstGeom prst="rect">
+              <a:avLst/>
+            </a:prstGeom>
+            <a:noFill/>
+            <a:ln/>
+          </p:spPr>
+          <p:txBody>
+            <a:bodyPr wrap="square" rtlCol="0" anchor="ctr"/>
+            <a:lstStyle/>
+            <a:p>
+              <a:pPr marL="0" indent="0" algn="ctr">
+                <a:buNone/>
+              </a:pPr>
+              <a:r>
+                <a:rPr lang="en-US" sz="800" b="1" dirty="0">
+                  <a:solidFill>
+                    <a:srgbClr val="FFFFFF"/>
+                  </a:solidFill>
+                  <a:latin typeface="Arial" pitchFamily="34" charset="0"/>
+                  <a:ea typeface="Arial" pitchFamily="34" charset="-122"/>
+                  <a:cs typeface="Arial" pitchFamily="34" charset="-120"/>
+                </a:rPr>
+                <a:t>INTERPRET</a:t>
+              </a:r>
+              <a:endParaRPr lang="en-US" sz="800" dirty="0"/>
+            </a:p>
+          </p:txBody>
+        </p:sp>
+        <p:sp>
+          <p:nvSpPr>
+            <p:cNvPr id="35" name="Text 21">
+              <a:extLst>
+                <a:ext uri="{FF2B5EF4-FFF2-40B4-BE49-F238E27FC236}">
+                  <a16:creationId xmlns:a16="http://schemas.microsoft.com/office/drawing/2014/main" id="{F450C885-0C21-45F4-9DD1-A21E75CF63BB}"/>
+                </a:ext>
+              </a:extLst>
+            </p:cNvPr>
+            <p:cNvSpPr/>
+            <p:nvPr/>
+          </p:nvSpPr>
+          <p:spPr>
+            <a:xfrm>
+              <a:off x="7360920" y="1371600"/>
+              <a:ext cx="1600200" cy="822960"/>
+            </a:xfrm>
+            <a:prstGeom prst="rect">
+              <a:avLst/>
+            </a:prstGeom>
+            <a:noFill/>
+            <a:ln/>
+          </p:spPr>
+          <p:txBody>
+            <a:bodyPr wrap="square" rtlCol="0" anchor="ctr"/>
+            <a:lstStyle/>
+            <a:p>
+              <a:pPr marL="0" indent="0" algn="ctr">
+                <a:buNone/>
+              </a:pPr>
+              <a:r>
+                <a:rPr lang="en-US" sz="700" dirty="0">
+                  <a:solidFill>
+                    <a:srgbClr val="FFFFFF"/>
+                  </a:solidFill>
+                  <a:latin typeface="Arial" pitchFamily="34" charset="0"/>
+                  <a:ea typeface="Arial" pitchFamily="34" charset="-122"/>
+                  <a:cs typeface="Arial" pitchFamily="34" charset="-120"/>
+                </a:rPr>
+                <a:t>What does it</a:t>
+              </a:r>
+              <a:endParaRPr lang="en-US" sz="700" dirty="0"/>
+            </a:p>
+            <a:p>
+              <a:pPr marL="0" indent="0" algn="ctr">
+                <a:buNone/>
+              </a:pPr>
+              <a:r>
+                <a:rPr lang="en-US" sz="700" dirty="0">
+                  <a:solidFill>
+                    <a:srgbClr val="FFFFFF"/>
+                  </a:solidFill>
+                  <a:latin typeface="Arial" pitchFamily="34" charset="0"/>
+                  <a:ea typeface="Arial" pitchFamily="34" charset="-122"/>
+                  <a:cs typeface="Arial" pitchFamily="34" charset="-120"/>
+                </a:rPr>
+                <a:t>MEAN for the robot?</a:t>
+              </a:r>
+              <a:endParaRPr lang="en-US" sz="700" dirty="0"/>
+            </a:p>
+          </p:txBody>
+        </p:sp>
+      </p:grpSp>
     </p:spTree>
   </p:cSld>
   <p:clrMapOvr>
@@ -5172,7 +6073,7 @@
         <p:spPr>
           <a:xfrm>
             <a:off x="274320" y="1051560"/>
-            <a:ext cx="4114800" cy="1600200"/>
+            <a:ext cx="4114800" cy="2448350"/>
           </a:xfrm>
           <a:prstGeom prst="rect">
             <a:avLst/>
@@ -5249,118 +6150,647 @@
           </a:p>
         </p:txBody>
       </p:sp>
-      <p:sp>
-        <p:nvSpPr>
-          <p:cNvPr id="9" name="Text 7"/>
-          <p:cNvSpPr/>
-          <p:nvPr/>
-        </p:nvSpPr>
-        <p:spPr>
-          <a:xfrm>
-            <a:off x="438912" y="1399032"/>
-            <a:ext cx="3840480" cy="1051560"/>
-          </a:xfrm>
-          <a:prstGeom prst="rect">
-            <a:avLst/>
-          </a:prstGeom>
-          <a:noFill/>
-          <a:ln/>
-        </p:spPr>
-        <p:txBody>
-          <a:bodyPr wrap="square" rtlCol="0" anchor="t"/>
-          <a:lstStyle/>
-          <a:p>
-            <a:pPr marL="342900" indent="-342900">
-              <a:buSzPct val="100000"/>
-              <a:buChar char="•"/>
-            </a:pPr>
-            <a:r>
-              <a:rPr lang="en-US" sz="1200" dirty="0">
-                <a:solidFill>
-                  <a:srgbClr val="6B7280"/>
-                </a:solidFill>
-                <a:latin typeface="Arial" pitchFamily="34" charset="0"/>
-                <a:ea typeface="Arial" pitchFamily="34" charset="-122"/>
-                <a:cs typeface="Arial" pitchFamily="34" charset="-120"/>
-              </a:rPr>
-              <a:t>Computes image gradient in x and y</a:t>
-            </a:r>
-            <a:endParaRPr lang="en-US" sz="1200" dirty="0"/>
-          </a:p>
-          <a:p>
-            <a:pPr marL="342900" indent="-342900">
-              <a:buSzPct val="100000"/>
-              <a:buChar char="•"/>
-            </a:pPr>
-            <a:r>
-              <a:rPr lang="en-US" sz="1200" dirty="0">
-                <a:solidFill>
-                  <a:srgbClr val="6B7280"/>
-                </a:solidFill>
-                <a:latin typeface="Arial" pitchFamily="34" charset="0"/>
-                <a:ea typeface="Arial" pitchFamily="34" charset="-122"/>
-                <a:cs typeface="Arial" pitchFamily="34" charset="-120"/>
-              </a:rPr>
-              <a:t>G_x = [-1 0 1; -2 0 2; -1 0 1] * Image</a:t>
-            </a:r>
-            <a:endParaRPr lang="en-US" sz="1200" dirty="0"/>
-          </a:p>
-          <a:p>
-            <a:pPr marL="342900" indent="-342900">
-              <a:buSzPct val="100000"/>
-              <a:buChar char="•"/>
-            </a:pPr>
-            <a:r>
-              <a:rPr lang="en-US" sz="1200" dirty="0">
-                <a:solidFill>
-                  <a:srgbClr val="6B7280"/>
-                </a:solidFill>
-                <a:latin typeface="Arial" pitchFamily="34" charset="0"/>
-                <a:ea typeface="Arial" pitchFamily="34" charset="-122"/>
-                <a:cs typeface="Arial" pitchFamily="34" charset="-120"/>
-              </a:rPr>
-              <a:t>Edge strength = √(G_x² + G_y²)</a:t>
-            </a:r>
-            <a:endParaRPr lang="en-US" sz="1200" dirty="0"/>
-          </a:p>
-          <a:p>
-            <a:pPr marL="342900" indent="-342900">
-              <a:buSzPct val="100000"/>
-              <a:buChar char="•"/>
-            </a:pPr>
-            <a:r>
-              <a:rPr lang="en-US" sz="1200" dirty="0">
-                <a:solidFill>
-                  <a:srgbClr val="6B7280"/>
-                </a:solidFill>
-                <a:latin typeface="Arial" pitchFamily="34" charset="0"/>
-                <a:ea typeface="Arial" pitchFamily="34" charset="-122"/>
-                <a:cs typeface="Arial" pitchFamily="34" charset="-120"/>
-              </a:rPr>
-              <a:t>Edge direction = atan2(G_y, G_x)</a:t>
-            </a:r>
-            <a:endParaRPr lang="en-US" sz="1200" dirty="0"/>
-          </a:p>
-          <a:p>
-            <a:pPr marL="342900" indent="-342900">
-              <a:buSzPct val="100000"/>
-              <a:buChar char="•"/>
-            </a:pPr>
-            <a:r>
-              <a:rPr lang="en-US" sz="1200" dirty="0">
-                <a:solidFill>
-                  <a:srgbClr val="6B7280"/>
-                </a:solidFill>
-                <a:latin typeface="Arial" pitchFamily="34" charset="0"/>
-                <a:ea typeface="Arial" pitchFamily="34" charset="-122"/>
-                <a:cs typeface="Arial" pitchFamily="34" charset="-120"/>
-              </a:rPr>
-              <a:t>Simple, fast, but detects too many edges</a:t>
-            </a:r>
-            <a:endParaRPr lang="en-US" sz="1200" dirty="0"/>
-          </a:p>
-        </p:txBody>
-      </p:sp>
+      <mc:AlternateContent xmlns:mc="http://schemas.openxmlformats.org/markup-compatibility/2006">
+        <mc:Choice xmlns:a14="http://schemas.microsoft.com/office/drawing/2010/main" Requires="a14">
+          <p:sp>
+            <p:nvSpPr>
+              <p:cNvPr id="9" name="Text 7"/>
+              <p:cNvSpPr/>
+              <p:nvPr/>
+            </p:nvSpPr>
+            <p:spPr>
+              <a:xfrm>
+                <a:off x="438912" y="1399032"/>
+                <a:ext cx="3840480" cy="1051560"/>
+              </a:xfrm>
+              <a:prstGeom prst="rect">
+                <a:avLst/>
+              </a:prstGeom>
+              <a:noFill/>
+              <a:ln/>
+            </p:spPr>
+            <p:txBody>
+              <a:bodyPr wrap="square" rtlCol="0" anchor="t"/>
+              <a:lstStyle/>
+              <a:p>
+                <a:pPr marL="342900" indent="-342900">
+                  <a:buSzPct val="100000"/>
+                  <a:buChar char="•"/>
+                </a:pPr>
+                <a:r>
+                  <a:rPr lang="en-US" sz="1200" dirty="0">
+                    <a:solidFill>
+                      <a:srgbClr val="6B7280"/>
+                    </a:solidFill>
+                    <a:latin typeface="Arial" pitchFamily="34" charset="0"/>
+                    <a:ea typeface="Arial" pitchFamily="34" charset="-122"/>
+                    <a:cs typeface="Arial" pitchFamily="34" charset="-120"/>
+                  </a:rPr>
+                  <a:t>Computes image gradient in x and y</a:t>
+                </a:r>
+                <a:endParaRPr lang="en-US" sz="1200" dirty="0"/>
+              </a:p>
+              <a:p>
+                <a:pPr marL="342900" indent="-342900">
+                  <a:buSzPct val="100000"/>
+                  <a:buChar char="•"/>
+                </a:pPr>
+                <a14:m>
+                  <m:oMath xmlns:m="http://schemas.openxmlformats.org/officeDocument/2006/math">
+                    <m:sSub>
+                      <m:sSubPr>
+                        <m:ctrlPr>
+                          <a:rPr lang="en-US" sz="1200" i="1" dirty="0" smtClean="0">
+                            <a:solidFill>
+                              <a:srgbClr val="6B7280"/>
+                            </a:solidFill>
+                            <a:latin typeface="Cambria Math" panose="02040503050406030204" pitchFamily="18" charset="0"/>
+                            <a:ea typeface="Arial" pitchFamily="34" charset="-122"/>
+                            <a:cs typeface="Arial" pitchFamily="34" charset="-120"/>
+                          </a:rPr>
+                        </m:ctrlPr>
+                      </m:sSubPr>
+                      <m:e>
+                        <m:r>
+                          <a:rPr lang="en-US" sz="1200" i="1" dirty="0" smtClean="0">
+                            <a:solidFill>
+                              <a:srgbClr val="6B7280"/>
+                            </a:solidFill>
+                            <a:latin typeface="Cambria Math" panose="02040503050406030204" pitchFamily="18" charset="0"/>
+                            <a:ea typeface="Arial" pitchFamily="34" charset="-122"/>
+                            <a:cs typeface="Arial" pitchFamily="34" charset="-120"/>
+                          </a:rPr>
+                          <m:t>𝐺</m:t>
+                        </m:r>
+                      </m:e>
+                      <m:sub>
+                        <m:r>
+                          <a:rPr lang="en-US" sz="1200" i="1" dirty="0" smtClean="0">
+                            <a:solidFill>
+                              <a:srgbClr val="6B7280"/>
+                            </a:solidFill>
+                            <a:latin typeface="Cambria Math" panose="02040503050406030204" pitchFamily="18" charset="0"/>
+                            <a:ea typeface="Arial" pitchFamily="34" charset="-122"/>
+                            <a:cs typeface="Arial" pitchFamily="34" charset="-120"/>
+                          </a:rPr>
+                          <m:t>𝑥</m:t>
+                        </m:r>
+                      </m:sub>
+                    </m:sSub>
+                    <m:r>
+                      <a:rPr lang="en-US" sz="1200" i="1" dirty="0" smtClean="0">
+                        <a:solidFill>
+                          <a:srgbClr val="6B7280"/>
+                        </a:solidFill>
+                        <a:latin typeface="Cambria Math" panose="02040503050406030204" pitchFamily="18" charset="0"/>
+                        <a:ea typeface="Arial" pitchFamily="34" charset="-122"/>
+                        <a:cs typeface="Arial" pitchFamily="34" charset="-120"/>
+                      </a:rPr>
+                      <m:t>= </m:t>
+                    </m:r>
+                    <m:d>
+                      <m:dPr>
+                        <m:begChr m:val="["/>
+                        <m:endChr m:val="]"/>
+                        <m:ctrlPr>
+                          <a:rPr lang="en-US" sz="1200" i="1" dirty="0" smtClean="0">
+                            <a:solidFill>
+                              <a:srgbClr val="6B7280"/>
+                            </a:solidFill>
+                            <a:latin typeface="Cambria Math" panose="02040503050406030204" pitchFamily="18" charset="0"/>
+                            <a:ea typeface="Arial" pitchFamily="34" charset="-122"/>
+                            <a:cs typeface="Arial" pitchFamily="34" charset="-120"/>
+                          </a:rPr>
+                        </m:ctrlPr>
+                      </m:dPr>
+                      <m:e>
+                        <m:m>
+                          <m:mPr>
+                            <m:mcs>
+                              <m:mc>
+                                <m:mcPr>
+                                  <m:count m:val="3"/>
+                                  <m:mcJc m:val="center"/>
+                                </m:mcPr>
+                              </m:mc>
+                            </m:mcs>
+                            <m:ctrlPr>
+                              <a:rPr lang="en-US" sz="1200" i="1" dirty="0" smtClean="0">
+                                <a:solidFill>
+                                  <a:srgbClr val="6B7280"/>
+                                </a:solidFill>
+                                <a:latin typeface="Cambria Math" panose="02040503050406030204" pitchFamily="18" charset="0"/>
+                                <a:cs typeface="Arial" pitchFamily="34" charset="-120"/>
+                              </a:rPr>
+                            </m:ctrlPr>
+                          </m:mPr>
+                          <m:mr>
+                            <m:e>
+                              <m:r>
+                                <m:rPr>
+                                  <m:brk m:alnAt="7"/>
+                                </m:rPr>
+                                <a:rPr lang="de-DE" sz="1200" b="0" i="1" dirty="0" smtClean="0">
+                                  <a:solidFill>
+                                    <a:srgbClr val="6B7280"/>
+                                  </a:solidFill>
+                                  <a:latin typeface="Cambria Math" panose="02040503050406030204" pitchFamily="18" charset="0"/>
+                                  <a:cs typeface="Arial" pitchFamily="34" charset="-120"/>
+                                </a:rPr>
+                                <m:t>−1</m:t>
+                              </m:r>
+                            </m:e>
+                            <m:e>
+                              <m:r>
+                                <a:rPr lang="de-DE" sz="1200" b="0" i="1" dirty="0" smtClean="0">
+                                  <a:solidFill>
+                                    <a:srgbClr val="6B7280"/>
+                                  </a:solidFill>
+                                  <a:latin typeface="Cambria Math" panose="02040503050406030204" pitchFamily="18" charset="0"/>
+                                  <a:cs typeface="Arial" pitchFamily="34" charset="-120"/>
+                                </a:rPr>
+                                <m:t>0</m:t>
+                              </m:r>
+                            </m:e>
+                            <m:e>
+                              <m:r>
+                                <a:rPr lang="de-DE" sz="1200" b="0" i="1" dirty="0" smtClean="0">
+                                  <a:solidFill>
+                                    <a:srgbClr val="6B7280"/>
+                                  </a:solidFill>
+                                  <a:latin typeface="Cambria Math" panose="02040503050406030204" pitchFamily="18" charset="0"/>
+                                  <a:cs typeface="Arial" pitchFamily="34" charset="-120"/>
+                                </a:rPr>
+                                <m:t>1</m:t>
+                              </m:r>
+                            </m:e>
+                          </m:mr>
+                          <m:mr>
+                            <m:e>
+                              <m:r>
+                                <a:rPr lang="de-DE" sz="1200" b="0" i="1" dirty="0" smtClean="0">
+                                  <a:solidFill>
+                                    <a:srgbClr val="6B7280"/>
+                                  </a:solidFill>
+                                  <a:latin typeface="Cambria Math" panose="02040503050406030204" pitchFamily="18" charset="0"/>
+                                  <a:cs typeface="Arial" pitchFamily="34" charset="-120"/>
+                                </a:rPr>
+                                <m:t>−2</m:t>
+                              </m:r>
+                            </m:e>
+                            <m:e>
+                              <m:r>
+                                <a:rPr lang="de-DE" sz="1200" b="0" i="1" dirty="0" smtClean="0">
+                                  <a:solidFill>
+                                    <a:srgbClr val="6B7280"/>
+                                  </a:solidFill>
+                                  <a:latin typeface="Cambria Math" panose="02040503050406030204" pitchFamily="18" charset="0"/>
+                                  <a:cs typeface="Arial" pitchFamily="34" charset="-120"/>
+                                </a:rPr>
+                                <m:t>0</m:t>
+                              </m:r>
+                            </m:e>
+                            <m:e>
+                              <m:r>
+                                <a:rPr lang="de-DE" sz="1200" b="0" i="1" dirty="0" smtClean="0">
+                                  <a:solidFill>
+                                    <a:srgbClr val="6B7280"/>
+                                  </a:solidFill>
+                                  <a:latin typeface="Cambria Math" panose="02040503050406030204" pitchFamily="18" charset="0"/>
+                                  <a:cs typeface="Arial" pitchFamily="34" charset="-120"/>
+                                </a:rPr>
+                                <m:t>2</m:t>
+                              </m:r>
+                            </m:e>
+                          </m:mr>
+                          <m:mr>
+                            <m:e>
+                              <m:r>
+                                <a:rPr lang="de-DE" sz="1200" b="0" i="1" dirty="0" smtClean="0">
+                                  <a:solidFill>
+                                    <a:srgbClr val="6B7280"/>
+                                  </a:solidFill>
+                                  <a:latin typeface="Cambria Math" panose="02040503050406030204" pitchFamily="18" charset="0"/>
+                                  <a:cs typeface="Arial" pitchFamily="34" charset="-120"/>
+                                </a:rPr>
+                                <m:t>−1</m:t>
+                              </m:r>
+                            </m:e>
+                            <m:e>
+                              <m:r>
+                                <a:rPr lang="de-DE" sz="1200" b="0" i="1" dirty="0" smtClean="0">
+                                  <a:solidFill>
+                                    <a:srgbClr val="6B7280"/>
+                                  </a:solidFill>
+                                  <a:latin typeface="Cambria Math" panose="02040503050406030204" pitchFamily="18" charset="0"/>
+                                  <a:cs typeface="Arial" pitchFamily="34" charset="-120"/>
+                                </a:rPr>
+                                <m:t>0</m:t>
+                              </m:r>
+                            </m:e>
+                            <m:e>
+                              <m:r>
+                                <a:rPr lang="de-DE" sz="1200" b="0" i="1" dirty="0" smtClean="0">
+                                  <a:solidFill>
+                                    <a:srgbClr val="6B7280"/>
+                                  </a:solidFill>
+                                  <a:latin typeface="Cambria Math" panose="02040503050406030204" pitchFamily="18" charset="0"/>
+                                  <a:cs typeface="Arial" pitchFamily="34" charset="-120"/>
+                                </a:rPr>
+                                <m:t>1</m:t>
+                              </m:r>
+                            </m:e>
+                          </m:mr>
+                        </m:m>
+                      </m:e>
+                    </m:d>
+                  </m:oMath>
+                </a14:m>
+                <a:r>
+                  <a:rPr lang="en-US" sz="1200" dirty="0">
+                    <a:solidFill>
+                      <a:srgbClr val="6B7280"/>
+                    </a:solidFill>
+                    <a:latin typeface="Arial" pitchFamily="34" charset="0"/>
+                    <a:ea typeface="Arial" pitchFamily="34" charset="-122"/>
+                    <a:cs typeface="Arial" pitchFamily="34" charset="-120"/>
+                  </a:rPr>
+                  <a:t>* Image</a:t>
+                </a:r>
+                <a:endParaRPr lang="en-US" sz="1200" dirty="0"/>
+              </a:p>
+              <a:p>
+                <a:pPr marL="342900" indent="-342900">
+                  <a:buSzPct val="100000"/>
+                  <a:buChar char="•"/>
+                </a:pPr>
+                <a:r>
+                  <a:rPr lang="en-US" sz="1200" dirty="0">
+                    <a:solidFill>
+                      <a:srgbClr val="6B7280"/>
+                    </a:solidFill>
+                    <a:latin typeface="Arial" pitchFamily="34" charset="0"/>
+                    <a:ea typeface="Arial" pitchFamily="34" charset="-122"/>
+                    <a:cs typeface="Arial" pitchFamily="34" charset="-120"/>
+                  </a:rPr>
+                  <a:t>Edge strength = </a:t>
+                </a:r>
+                <a14:m>
+                  <m:oMath xmlns:m="http://schemas.openxmlformats.org/officeDocument/2006/math">
+                    <m:rad>
+                      <m:radPr>
+                        <m:degHide m:val="on"/>
+                        <m:ctrlPr>
+                          <a:rPr lang="en-US" sz="1200" i="1" dirty="0" smtClean="0">
+                            <a:solidFill>
+                              <a:srgbClr val="6B7280"/>
+                            </a:solidFill>
+                            <a:latin typeface="Cambria Math" panose="02040503050406030204" pitchFamily="18" charset="0"/>
+                            <a:ea typeface="Arial" pitchFamily="34" charset="-122"/>
+                            <a:cs typeface="Arial" pitchFamily="34" charset="-120"/>
+                          </a:rPr>
+                        </m:ctrlPr>
+                      </m:radPr>
+                      <m:deg/>
+                      <m:e>
+                        <m:sSubSup>
+                          <m:sSubSupPr>
+                            <m:ctrlPr>
+                              <a:rPr lang="en-US" sz="1200" i="1" dirty="0" smtClean="0">
+                                <a:solidFill>
+                                  <a:srgbClr val="6B7280"/>
+                                </a:solidFill>
+                                <a:latin typeface="Cambria Math" panose="02040503050406030204" pitchFamily="18" charset="0"/>
+                                <a:ea typeface="Arial" pitchFamily="34" charset="-122"/>
+                                <a:cs typeface="Arial" pitchFamily="34" charset="-120"/>
+                              </a:rPr>
+                            </m:ctrlPr>
+                          </m:sSubSupPr>
+                          <m:e>
+                            <m:r>
+                              <a:rPr lang="en-US" sz="1200" i="1" dirty="0" smtClean="0">
+                                <a:solidFill>
+                                  <a:srgbClr val="6B7280"/>
+                                </a:solidFill>
+                                <a:latin typeface="Cambria Math" panose="02040503050406030204" pitchFamily="18" charset="0"/>
+                                <a:ea typeface="Arial" pitchFamily="34" charset="-122"/>
+                                <a:cs typeface="Arial" pitchFamily="34" charset="-120"/>
+                              </a:rPr>
+                              <m:t>𝐺</m:t>
+                            </m:r>
+                          </m:e>
+                          <m:sub>
+                            <m:r>
+                              <a:rPr lang="en-US" sz="1200" i="1" dirty="0" smtClean="0">
+                                <a:solidFill>
+                                  <a:srgbClr val="6B7280"/>
+                                </a:solidFill>
+                                <a:latin typeface="Cambria Math" panose="02040503050406030204" pitchFamily="18" charset="0"/>
+                                <a:ea typeface="Arial" pitchFamily="34" charset="-122"/>
+                                <a:cs typeface="Arial" pitchFamily="34" charset="-120"/>
+                              </a:rPr>
+                              <m:t>𝑥</m:t>
+                            </m:r>
+                          </m:sub>
+                          <m:sup>
+                            <m:r>
+                              <a:rPr lang="en-US" sz="1200" i="1" dirty="0" smtClean="0">
+                                <a:solidFill>
+                                  <a:srgbClr val="6B7280"/>
+                                </a:solidFill>
+                                <a:latin typeface="Cambria Math" panose="02040503050406030204" pitchFamily="18" charset="0"/>
+                                <a:ea typeface="Arial" pitchFamily="34" charset="-122"/>
+                                <a:cs typeface="Arial" pitchFamily="34" charset="-120"/>
+                              </a:rPr>
+                              <m:t>2</m:t>
+                            </m:r>
+                          </m:sup>
+                        </m:sSubSup>
+                        <m:r>
+                          <a:rPr lang="en-US" sz="1200" i="1" dirty="0" smtClean="0">
+                            <a:solidFill>
+                              <a:srgbClr val="6B7280"/>
+                            </a:solidFill>
+                            <a:latin typeface="Cambria Math" panose="02040503050406030204" pitchFamily="18" charset="0"/>
+                            <a:ea typeface="Arial" pitchFamily="34" charset="-122"/>
+                            <a:cs typeface="Arial" pitchFamily="34" charset="-120"/>
+                          </a:rPr>
+                          <m:t>+ </m:t>
+                        </m:r>
+                        <m:sSubSup>
+                          <m:sSubSupPr>
+                            <m:ctrlPr>
+                              <a:rPr lang="en-US" sz="1200" i="1" dirty="0" smtClean="0">
+                                <a:solidFill>
+                                  <a:srgbClr val="6B7280"/>
+                                </a:solidFill>
+                                <a:latin typeface="Cambria Math" panose="02040503050406030204" pitchFamily="18" charset="0"/>
+                                <a:ea typeface="Arial" pitchFamily="34" charset="-122"/>
+                                <a:cs typeface="Arial" pitchFamily="34" charset="-120"/>
+                              </a:rPr>
+                            </m:ctrlPr>
+                          </m:sSubSupPr>
+                          <m:e>
+                            <m:r>
+                              <a:rPr lang="en-US" sz="1200" i="1" dirty="0" smtClean="0">
+                                <a:solidFill>
+                                  <a:srgbClr val="6B7280"/>
+                                </a:solidFill>
+                                <a:latin typeface="Cambria Math" panose="02040503050406030204" pitchFamily="18" charset="0"/>
+                                <a:ea typeface="Arial" pitchFamily="34" charset="-122"/>
+                                <a:cs typeface="Arial" pitchFamily="34" charset="-120"/>
+                              </a:rPr>
+                              <m:t>𝐺</m:t>
+                            </m:r>
+                          </m:e>
+                          <m:sub>
+                            <m:r>
+                              <a:rPr lang="en-US" sz="1200" i="1" dirty="0" smtClean="0">
+                                <a:solidFill>
+                                  <a:srgbClr val="6B7280"/>
+                                </a:solidFill>
+                                <a:latin typeface="Cambria Math" panose="02040503050406030204" pitchFamily="18" charset="0"/>
+                                <a:ea typeface="Arial" pitchFamily="34" charset="-122"/>
+                                <a:cs typeface="Arial" pitchFamily="34" charset="-120"/>
+                              </a:rPr>
+                              <m:t>𝑦</m:t>
+                            </m:r>
+                          </m:sub>
+                          <m:sup>
+                            <m:r>
+                              <a:rPr lang="en-US" sz="1200" i="1" dirty="0" smtClean="0">
+                                <a:solidFill>
+                                  <a:srgbClr val="6B7280"/>
+                                </a:solidFill>
+                                <a:latin typeface="Cambria Math" panose="02040503050406030204" pitchFamily="18" charset="0"/>
+                                <a:ea typeface="Arial" pitchFamily="34" charset="-122"/>
+                                <a:cs typeface="Arial" pitchFamily="34" charset="-120"/>
+                              </a:rPr>
+                              <m:t>2</m:t>
+                            </m:r>
+                          </m:sup>
+                        </m:sSubSup>
+                      </m:e>
+                    </m:rad>
+                  </m:oMath>
+                </a14:m>
+                <a:endParaRPr lang="en-US" sz="1200" dirty="0"/>
+              </a:p>
+              <a:p>
+                <a:pPr marL="342900" indent="-342900">
+                  <a:buSzPct val="100000"/>
+                  <a:buChar char="•"/>
+                </a:pPr>
+                <a:r>
+                  <a:rPr lang="en-US" sz="1200" dirty="0">
+                    <a:solidFill>
+                      <a:srgbClr val="6B7280"/>
+                    </a:solidFill>
+                    <a:latin typeface="Arial" pitchFamily="34" charset="0"/>
+                    <a:ea typeface="Arial" pitchFamily="34" charset="-122"/>
+                    <a:cs typeface="Arial" pitchFamily="34" charset="-120"/>
+                  </a:rPr>
+                  <a:t>Edge direction = </a:t>
+                </a:r>
+                <a14:m>
+                  <m:oMath xmlns:m="http://schemas.openxmlformats.org/officeDocument/2006/math">
+                    <m:r>
+                      <m:rPr>
+                        <m:sty m:val="p"/>
+                      </m:rPr>
+                      <a:rPr lang="en-US" sz="1200" i="1" dirty="0" smtClean="0">
+                        <a:solidFill>
+                          <a:srgbClr val="6B7280"/>
+                        </a:solidFill>
+                        <a:latin typeface="Cambria Math" panose="02040503050406030204" pitchFamily="18" charset="0"/>
+                        <a:ea typeface="Arial" pitchFamily="34" charset="-122"/>
+                        <a:cs typeface="Arial" pitchFamily="34" charset="-120"/>
+                      </a:rPr>
+                      <m:t>atan</m:t>
+                    </m:r>
+                    <m:r>
+                      <a:rPr lang="en-US" sz="1200" i="1" dirty="0" smtClean="0">
+                        <a:solidFill>
+                          <a:srgbClr val="6B7280"/>
+                        </a:solidFill>
+                        <a:latin typeface="Cambria Math" panose="02040503050406030204" pitchFamily="18" charset="0"/>
+                        <a:ea typeface="Arial" pitchFamily="34" charset="-122"/>
+                        <a:cs typeface="Arial" pitchFamily="34" charset="-120"/>
+                      </a:rPr>
+                      <m:t>2</m:t>
+                    </m:r>
+                    <m:d>
+                      <m:dPr>
+                        <m:ctrlPr>
+                          <a:rPr lang="en-US" sz="1200" i="1" dirty="0" smtClean="0">
+                            <a:solidFill>
+                              <a:srgbClr val="6B7280"/>
+                            </a:solidFill>
+                            <a:latin typeface="Cambria Math" panose="02040503050406030204" pitchFamily="18" charset="0"/>
+                            <a:ea typeface="Arial" pitchFamily="34" charset="-122"/>
+                            <a:cs typeface="Arial" pitchFamily="34" charset="-120"/>
+                          </a:rPr>
+                        </m:ctrlPr>
+                      </m:dPr>
+                      <m:e>
+                        <m:sSub>
+                          <m:sSubPr>
+                            <m:ctrlPr>
+                              <a:rPr lang="en-US" sz="1200" i="1" dirty="0" smtClean="0">
+                                <a:solidFill>
+                                  <a:srgbClr val="6B7280"/>
+                                </a:solidFill>
+                                <a:latin typeface="Cambria Math" panose="02040503050406030204" pitchFamily="18" charset="0"/>
+                                <a:ea typeface="Arial" pitchFamily="34" charset="-122"/>
+                                <a:cs typeface="Arial" pitchFamily="34" charset="-120"/>
+                              </a:rPr>
+                            </m:ctrlPr>
+                          </m:sSubPr>
+                          <m:e>
+                            <m:r>
+                              <a:rPr lang="en-US" sz="1200" i="1" dirty="0" smtClean="0">
+                                <a:solidFill>
+                                  <a:srgbClr val="6B7280"/>
+                                </a:solidFill>
+                                <a:latin typeface="Cambria Math" panose="02040503050406030204" pitchFamily="18" charset="0"/>
+                                <a:ea typeface="Arial" pitchFamily="34" charset="-122"/>
+                                <a:cs typeface="Arial" pitchFamily="34" charset="-120"/>
+                              </a:rPr>
+                              <m:t>𝐺</m:t>
+                            </m:r>
+                          </m:e>
+                          <m:sub>
+                            <m:r>
+                              <a:rPr lang="en-US" sz="1200" i="1" dirty="0" smtClean="0">
+                                <a:solidFill>
+                                  <a:srgbClr val="6B7280"/>
+                                </a:solidFill>
+                                <a:latin typeface="Cambria Math" panose="02040503050406030204" pitchFamily="18" charset="0"/>
+                                <a:ea typeface="Arial" pitchFamily="34" charset="-122"/>
+                                <a:cs typeface="Arial" pitchFamily="34" charset="-120"/>
+                              </a:rPr>
+                              <m:t>𝑦</m:t>
+                            </m:r>
+                          </m:sub>
+                        </m:sSub>
+                        <m:r>
+                          <a:rPr lang="en-US" sz="1200" i="1" dirty="0" smtClean="0">
+                            <a:solidFill>
+                              <a:srgbClr val="6B7280"/>
+                            </a:solidFill>
+                            <a:latin typeface="Cambria Math" panose="02040503050406030204" pitchFamily="18" charset="0"/>
+                            <a:ea typeface="Arial" pitchFamily="34" charset="-122"/>
+                            <a:cs typeface="Arial" pitchFamily="34" charset="-120"/>
+                          </a:rPr>
+                          <m:t>, </m:t>
+                        </m:r>
+                        <m:sSub>
+                          <m:sSubPr>
+                            <m:ctrlPr>
+                              <a:rPr lang="en-US" sz="1200" i="1" dirty="0" smtClean="0">
+                                <a:solidFill>
+                                  <a:srgbClr val="6B7280"/>
+                                </a:solidFill>
+                                <a:latin typeface="Cambria Math" panose="02040503050406030204" pitchFamily="18" charset="0"/>
+                                <a:ea typeface="Arial" pitchFamily="34" charset="-122"/>
+                                <a:cs typeface="Arial" pitchFamily="34" charset="-120"/>
+                              </a:rPr>
+                            </m:ctrlPr>
+                          </m:sSubPr>
+                          <m:e>
+                            <m:r>
+                              <a:rPr lang="en-US" sz="1200" i="1" dirty="0" smtClean="0">
+                                <a:solidFill>
+                                  <a:srgbClr val="6B7280"/>
+                                </a:solidFill>
+                                <a:latin typeface="Cambria Math" panose="02040503050406030204" pitchFamily="18" charset="0"/>
+                                <a:ea typeface="Arial" pitchFamily="34" charset="-122"/>
+                                <a:cs typeface="Arial" pitchFamily="34" charset="-120"/>
+                              </a:rPr>
+                              <m:t>𝐺</m:t>
+                            </m:r>
+                          </m:e>
+                          <m:sub>
+                            <m:r>
+                              <a:rPr lang="en-US" sz="1200" i="1" dirty="0" smtClean="0">
+                                <a:solidFill>
+                                  <a:srgbClr val="6B7280"/>
+                                </a:solidFill>
+                                <a:latin typeface="Cambria Math" panose="02040503050406030204" pitchFamily="18" charset="0"/>
+                                <a:ea typeface="Arial" pitchFamily="34" charset="-122"/>
+                                <a:cs typeface="Arial" pitchFamily="34" charset="-120"/>
+                              </a:rPr>
+                              <m:t>𝑥</m:t>
+                            </m:r>
+                          </m:sub>
+                        </m:sSub>
+                      </m:e>
+                    </m:d>
+                  </m:oMath>
+                </a14:m>
+                <a:endParaRPr lang="en-US" sz="1200" dirty="0"/>
+              </a:p>
+              <a:p>
+                <a:pPr marL="342900" indent="-342900">
+                  <a:buSzPct val="100000"/>
+                  <a:buChar char="•"/>
+                </a:pPr>
+                <a:r>
+                  <a:rPr lang="en-US" sz="1200" dirty="0">
+                    <a:solidFill>
+                      <a:srgbClr val="6B7280"/>
+                    </a:solidFill>
+                    <a:latin typeface="Arial" pitchFamily="34" charset="0"/>
+                    <a:ea typeface="Arial" pitchFamily="34" charset="-122"/>
+                    <a:cs typeface="Arial" pitchFamily="34" charset="-120"/>
+                  </a:rPr>
+                  <a:t>Simple, fast, but detects too many edges</a:t>
+                </a:r>
+                <a:endParaRPr lang="en-US" sz="1200" dirty="0"/>
+              </a:p>
+            </p:txBody>
+          </p:sp>
+        </mc:Choice>
+        <mc:Fallback>
+          <p:sp>
+            <p:nvSpPr>
+              <p:cNvPr id="9" name="Text 7"/>
+              <p:cNvSpPr>
+                <a:spLocks noRot="1" noChangeAspect="1" noMove="1" noResize="1" noEditPoints="1" noAdjustHandles="1" noChangeArrowheads="1" noChangeShapeType="1" noTextEdit="1"/>
+              </p:cNvSpPr>
+              <p:nvPr/>
+            </p:nvSpPr>
+            <p:spPr>
+              <a:xfrm>
+                <a:off x="438912" y="1399032"/>
+                <a:ext cx="3840480" cy="1051560"/>
+              </a:xfrm>
+              <a:prstGeom prst="rect">
+                <a:avLst/>
+              </a:prstGeom>
+              <a:blipFill>
+                <a:blip r:embed="rId3"/>
+                <a:stretch>
+                  <a:fillRect t="-1163" b="-48837"/>
+                </a:stretch>
+              </a:blipFill>
+              <a:ln/>
+            </p:spPr>
+            <p:txBody>
+              <a:bodyPr/>
+              <a:lstStyle/>
+              <a:p>
+                <a:r>
+                  <a:rPr lang="en-US">
+                    <a:noFill/>
+                  </a:rPr>
+                  <a:t> </a:t>
+                </a:r>
+              </a:p>
+            </p:txBody>
+          </p:sp>
+        </mc:Fallback>
+      </mc:AlternateContent>
       <p:sp>
         <p:nvSpPr>
           <p:cNvPr id="10" name="Shape 8"/>
@@ -5370,7 +6800,7 @@
         <p:spPr>
           <a:xfrm>
             <a:off x="4663440" y="1051560"/>
-            <a:ext cx="4206240" cy="1600200"/>
+            <a:ext cx="4206240" cy="2448350"/>
           </a:xfrm>
           <a:prstGeom prst="rect">
             <a:avLst/>
@@ -5585,7 +7015,7 @@
         </p:nvSpPr>
         <p:spPr>
           <a:xfrm>
-            <a:off x="365760" y="2743200"/>
+            <a:off x="365760" y="3699935"/>
             <a:ext cx="8412480" cy="274320"/>
           </a:xfrm>
           <a:prstGeom prst="rect">
@@ -5624,7 +7054,7 @@
         </p:nvSpPr>
         <p:spPr>
           <a:xfrm>
-            <a:off x="365760" y="3108960"/>
+            <a:off x="365760" y="4065695"/>
             <a:ext cx="8412480" cy="274320"/>
           </a:xfrm>
           <a:prstGeom prst="rect">
@@ -5655,6 +7085,907 @@
           </a:p>
         </p:txBody>
       </p:sp>
+      <p:grpSp>
+        <p:nvGrpSpPr>
+          <p:cNvPr id="16" name="Group 15">
+            <a:extLst>
+              <a:ext uri="{FF2B5EF4-FFF2-40B4-BE49-F238E27FC236}">
+                <a16:creationId xmlns:a16="http://schemas.microsoft.com/office/drawing/2014/main" id="{AC16A6C3-3DA9-4120-A6AD-CFBA97B4FDD4}"/>
+              </a:ext>
+            </a:extLst>
+          </p:cNvPr>
+          <p:cNvGrpSpPr/>
+          <p:nvPr/>
+        </p:nvGrpSpPr>
+        <p:grpSpPr>
+          <a:xfrm>
+            <a:off x="3200399" y="4608745"/>
+            <a:ext cx="5371253" cy="457200"/>
+            <a:chOff x="228600" y="822960"/>
+            <a:chExt cx="8732520" cy="1463040"/>
+          </a:xfrm>
+        </p:grpSpPr>
+        <p:sp>
+          <p:nvSpPr>
+            <p:cNvPr id="17" name="Shape 3">
+              <a:extLst>
+                <a:ext uri="{FF2B5EF4-FFF2-40B4-BE49-F238E27FC236}">
+                  <a16:creationId xmlns:a16="http://schemas.microsoft.com/office/drawing/2014/main" id="{7282FF08-D7FF-4762-8BEE-D614BA6E1304}"/>
+                </a:ext>
+              </a:extLst>
+            </p:cNvPr>
+            <p:cNvSpPr/>
+            <p:nvPr/>
+          </p:nvSpPr>
+          <p:spPr>
+            <a:xfrm>
+              <a:off x="228600" y="822960"/>
+              <a:ext cx="1600200" cy="1463040"/>
+            </a:xfrm>
+            <a:prstGeom prst="rect">
+              <a:avLst/>
+            </a:prstGeom>
+            <a:solidFill>
+              <a:srgbClr val="3B82F6"/>
+            </a:solidFill>
+            <a:ln/>
+            <a:effectLst>
+              <a:outerShdw blurRad="50800" dist="25400" dir="8100000" algn="bl" rotWithShape="0">
+                <a:srgbClr val="000000">
+                  <a:alpha val="12000"/>
+                </a:srgbClr>
+              </a:outerShdw>
+            </a:effectLst>
+          </p:spPr>
+        </p:sp>
+        <p:sp>
+          <p:nvSpPr>
+            <p:cNvPr id="18" name="Text 4">
+              <a:extLst>
+                <a:ext uri="{FF2B5EF4-FFF2-40B4-BE49-F238E27FC236}">
+                  <a16:creationId xmlns:a16="http://schemas.microsoft.com/office/drawing/2014/main" id="{190266F7-8E60-4F73-800B-333E781245DE}"/>
+                </a:ext>
+              </a:extLst>
+            </p:cNvPr>
+            <p:cNvSpPr/>
+            <p:nvPr/>
+          </p:nvSpPr>
+          <p:spPr>
+            <a:xfrm>
+              <a:off x="228600" y="868680"/>
+              <a:ext cx="1600200" cy="457200"/>
+            </a:xfrm>
+            <a:prstGeom prst="rect">
+              <a:avLst/>
+            </a:prstGeom>
+            <a:noFill/>
+            <a:ln/>
+          </p:spPr>
+          <p:txBody>
+            <a:bodyPr wrap="square" rtlCol="0" anchor="ctr"/>
+            <a:lstStyle/>
+            <a:p>
+              <a:pPr marL="0" indent="0" algn="ctr">
+                <a:buNone/>
+              </a:pPr>
+              <a:r>
+                <a:rPr lang="en-US" sz="800" b="1" dirty="0">
+                  <a:solidFill>
+                    <a:srgbClr val="FFFFFF"/>
+                  </a:solidFill>
+                  <a:latin typeface="Arial" pitchFamily="34" charset="0"/>
+                  <a:ea typeface="Arial" pitchFamily="34" charset="-122"/>
+                  <a:cs typeface="Arial" pitchFamily="34" charset="-120"/>
+                </a:rPr>
+                <a:t>SENSE</a:t>
+              </a:r>
+              <a:endParaRPr lang="en-US" sz="800" dirty="0"/>
+            </a:p>
+          </p:txBody>
+        </p:sp>
+        <p:sp>
+          <p:nvSpPr>
+            <p:cNvPr id="19" name="Text 5">
+              <a:extLst>
+                <a:ext uri="{FF2B5EF4-FFF2-40B4-BE49-F238E27FC236}">
+                  <a16:creationId xmlns:a16="http://schemas.microsoft.com/office/drawing/2014/main" id="{C8F4BCD3-FFE8-426A-AD93-2DFA065399D0}"/>
+                </a:ext>
+              </a:extLst>
+            </p:cNvPr>
+            <p:cNvSpPr/>
+            <p:nvPr/>
+          </p:nvSpPr>
+          <p:spPr>
+            <a:xfrm>
+              <a:off x="228600" y="1371600"/>
+              <a:ext cx="1600200" cy="822960"/>
+            </a:xfrm>
+            <a:prstGeom prst="rect">
+              <a:avLst/>
+            </a:prstGeom>
+            <a:noFill/>
+            <a:ln/>
+          </p:spPr>
+          <p:txBody>
+            <a:bodyPr wrap="square" rtlCol="0" anchor="ctr"/>
+            <a:lstStyle/>
+            <a:p>
+              <a:pPr marL="0" indent="0" algn="ctr">
+                <a:buNone/>
+              </a:pPr>
+              <a:r>
+                <a:rPr lang="en-US" sz="700" dirty="0">
+                  <a:solidFill>
+                    <a:srgbClr val="FFFFFF"/>
+                  </a:solidFill>
+                  <a:latin typeface="Arial" pitchFamily="34" charset="0"/>
+                  <a:ea typeface="Arial" pitchFamily="34" charset="-122"/>
+                  <a:cs typeface="Arial" pitchFamily="34" charset="-120"/>
+                </a:rPr>
+                <a:t>Raw data from</a:t>
+              </a:r>
+              <a:endParaRPr lang="en-US" sz="700" dirty="0"/>
+            </a:p>
+            <a:p>
+              <a:pPr marL="0" indent="0" algn="ctr">
+                <a:buNone/>
+              </a:pPr>
+              <a:r>
+                <a:rPr lang="en-US" sz="700" dirty="0">
+                  <a:solidFill>
+                    <a:srgbClr val="FFFFFF"/>
+                  </a:solidFill>
+                  <a:latin typeface="Arial" pitchFamily="34" charset="0"/>
+                  <a:ea typeface="Arial" pitchFamily="34" charset="-122"/>
+                  <a:cs typeface="Arial" pitchFamily="34" charset="-120"/>
+                </a:rPr>
+                <a:t>camera, LiDAR</a:t>
+              </a:r>
+              <a:endParaRPr lang="en-US" sz="700" dirty="0"/>
+            </a:p>
+          </p:txBody>
+        </p:sp>
+        <p:sp>
+          <p:nvSpPr>
+            <p:cNvPr id="20" name="Text 6">
+              <a:extLst>
+                <a:ext uri="{FF2B5EF4-FFF2-40B4-BE49-F238E27FC236}">
+                  <a16:creationId xmlns:a16="http://schemas.microsoft.com/office/drawing/2014/main" id="{BE484B97-A88C-44EB-A1C6-41A6CBB8B40C}"/>
+                </a:ext>
+              </a:extLst>
+            </p:cNvPr>
+            <p:cNvSpPr/>
+            <p:nvPr/>
+          </p:nvSpPr>
+          <p:spPr>
+            <a:xfrm>
+              <a:off x="1828800" y="1188720"/>
+              <a:ext cx="182880" cy="457200"/>
+            </a:xfrm>
+            <a:prstGeom prst="rect">
+              <a:avLst/>
+            </a:prstGeom>
+            <a:noFill/>
+            <a:ln/>
+          </p:spPr>
+          <p:txBody>
+            <a:bodyPr wrap="square" rtlCol="0" anchor="ctr"/>
+            <a:lstStyle/>
+            <a:p>
+              <a:pPr marL="0" indent="0">
+                <a:buNone/>
+              </a:pPr>
+              <a:r>
+                <a:rPr lang="en-US" sz="900" dirty="0">
+                  <a:solidFill>
+                    <a:srgbClr val="6B7280"/>
+                  </a:solidFill>
+                  <a:latin typeface="Arial" pitchFamily="34" charset="0"/>
+                  <a:ea typeface="Arial" pitchFamily="34" charset="-122"/>
+                  <a:cs typeface="Arial" pitchFamily="34" charset="-120"/>
+                </a:rPr>
+                <a:t>→</a:t>
+              </a:r>
+              <a:endParaRPr lang="en-US" sz="900" dirty="0"/>
+            </a:p>
+          </p:txBody>
+        </p:sp>
+        <p:sp>
+          <p:nvSpPr>
+            <p:cNvPr id="21" name="Shape 7">
+              <a:extLst>
+                <a:ext uri="{FF2B5EF4-FFF2-40B4-BE49-F238E27FC236}">
+                  <a16:creationId xmlns:a16="http://schemas.microsoft.com/office/drawing/2014/main" id="{26711296-B503-429B-B022-16B28F4664DE}"/>
+                </a:ext>
+              </a:extLst>
+            </p:cNvPr>
+            <p:cNvSpPr/>
+            <p:nvPr/>
+          </p:nvSpPr>
+          <p:spPr>
+            <a:xfrm>
+              <a:off x="2011680" y="822960"/>
+              <a:ext cx="1600200" cy="1463040"/>
+            </a:xfrm>
+            <a:prstGeom prst="rect">
+              <a:avLst/>
+            </a:prstGeom>
+            <a:solidFill>
+              <a:srgbClr val="0D9488"/>
+            </a:solidFill>
+            <a:ln/>
+            <a:effectLst>
+              <a:outerShdw blurRad="50800" dist="25400" dir="8100000" algn="bl" rotWithShape="0">
+                <a:srgbClr val="000000">
+                  <a:alpha val="12000"/>
+                </a:srgbClr>
+              </a:outerShdw>
+            </a:effectLst>
+          </p:spPr>
+        </p:sp>
+        <p:sp>
+          <p:nvSpPr>
+            <p:cNvPr id="22" name="Text 8">
+              <a:extLst>
+                <a:ext uri="{FF2B5EF4-FFF2-40B4-BE49-F238E27FC236}">
+                  <a16:creationId xmlns:a16="http://schemas.microsoft.com/office/drawing/2014/main" id="{F1B5FDBC-DB48-4B8A-A646-8E8E6F34D95B}"/>
+                </a:ext>
+              </a:extLst>
+            </p:cNvPr>
+            <p:cNvSpPr/>
+            <p:nvPr/>
+          </p:nvSpPr>
+          <p:spPr>
+            <a:xfrm>
+              <a:off x="2011680" y="868680"/>
+              <a:ext cx="1600200" cy="457200"/>
+            </a:xfrm>
+            <a:prstGeom prst="rect">
+              <a:avLst/>
+            </a:prstGeom>
+            <a:noFill/>
+            <a:ln/>
+          </p:spPr>
+          <p:txBody>
+            <a:bodyPr wrap="square" rtlCol="0" anchor="ctr"/>
+            <a:lstStyle/>
+            <a:p>
+              <a:pPr marL="0" indent="0" algn="ctr">
+                <a:buNone/>
+              </a:pPr>
+              <a:r>
+                <a:rPr lang="en-US" sz="800" b="1" dirty="0">
+                  <a:solidFill>
+                    <a:srgbClr val="FFFFFF"/>
+                  </a:solidFill>
+                  <a:latin typeface="Arial" pitchFamily="34" charset="0"/>
+                  <a:ea typeface="Arial" pitchFamily="34" charset="-122"/>
+                  <a:cs typeface="Arial" pitchFamily="34" charset="-120"/>
+                </a:rPr>
+                <a:t>PREPROCESS</a:t>
+              </a:r>
+              <a:endParaRPr lang="en-US" sz="800" dirty="0"/>
+            </a:p>
+          </p:txBody>
+        </p:sp>
+        <p:sp>
+          <p:nvSpPr>
+            <p:cNvPr id="23" name="Text 9">
+              <a:extLst>
+                <a:ext uri="{FF2B5EF4-FFF2-40B4-BE49-F238E27FC236}">
+                  <a16:creationId xmlns:a16="http://schemas.microsoft.com/office/drawing/2014/main" id="{BC5049CD-9FA9-4F3D-ACD0-5C2A8C64A54A}"/>
+                </a:ext>
+              </a:extLst>
+            </p:cNvPr>
+            <p:cNvSpPr/>
+            <p:nvPr/>
+          </p:nvSpPr>
+          <p:spPr>
+            <a:xfrm>
+              <a:off x="2011680" y="1371600"/>
+              <a:ext cx="1600200" cy="822960"/>
+            </a:xfrm>
+            <a:prstGeom prst="rect">
+              <a:avLst/>
+            </a:prstGeom>
+            <a:noFill/>
+            <a:ln/>
+          </p:spPr>
+          <p:txBody>
+            <a:bodyPr wrap="square" rtlCol="0" anchor="ctr"/>
+            <a:lstStyle/>
+            <a:p>
+              <a:pPr marL="0" indent="0" algn="ctr">
+                <a:buNone/>
+              </a:pPr>
+              <a:r>
+                <a:rPr lang="en-US" sz="700" dirty="0">
+                  <a:solidFill>
+                    <a:srgbClr val="FFFFFF"/>
+                  </a:solidFill>
+                  <a:latin typeface="Arial" pitchFamily="34" charset="0"/>
+                  <a:ea typeface="Arial" pitchFamily="34" charset="-122"/>
+                  <a:cs typeface="Arial" pitchFamily="34" charset="-120"/>
+                </a:rPr>
+                <a:t>Filter noise,</a:t>
+              </a:r>
+              <a:endParaRPr lang="en-US" sz="700" dirty="0"/>
+            </a:p>
+            <a:p>
+              <a:pPr marL="0" indent="0" algn="ctr">
+                <a:buNone/>
+              </a:pPr>
+              <a:r>
+                <a:rPr lang="en-US" sz="700" dirty="0">
+                  <a:solidFill>
+                    <a:srgbClr val="FFFFFF"/>
+                  </a:solidFill>
+                  <a:latin typeface="Arial" pitchFamily="34" charset="0"/>
+                  <a:ea typeface="Arial" pitchFamily="34" charset="-122"/>
+                  <a:cs typeface="Arial" pitchFamily="34" charset="-120"/>
+                </a:rPr>
+                <a:t>enhance features</a:t>
+              </a:r>
+              <a:endParaRPr lang="en-US" sz="700" dirty="0"/>
+            </a:p>
+          </p:txBody>
+        </p:sp>
+        <p:sp>
+          <p:nvSpPr>
+            <p:cNvPr id="24" name="Text 10">
+              <a:extLst>
+                <a:ext uri="{FF2B5EF4-FFF2-40B4-BE49-F238E27FC236}">
+                  <a16:creationId xmlns:a16="http://schemas.microsoft.com/office/drawing/2014/main" id="{C681FF69-7006-49C0-B9EE-685917C76412}"/>
+                </a:ext>
+              </a:extLst>
+            </p:cNvPr>
+            <p:cNvSpPr/>
+            <p:nvPr/>
+          </p:nvSpPr>
+          <p:spPr>
+            <a:xfrm>
+              <a:off x="3611880" y="1188720"/>
+              <a:ext cx="182880" cy="457200"/>
+            </a:xfrm>
+            <a:prstGeom prst="rect">
+              <a:avLst/>
+            </a:prstGeom>
+            <a:noFill/>
+            <a:ln/>
+          </p:spPr>
+          <p:txBody>
+            <a:bodyPr wrap="square" rtlCol="0" anchor="ctr"/>
+            <a:lstStyle/>
+            <a:p>
+              <a:pPr marL="0" indent="0">
+                <a:buNone/>
+              </a:pPr>
+              <a:r>
+                <a:rPr lang="en-US" sz="900" dirty="0">
+                  <a:solidFill>
+                    <a:srgbClr val="6B7280"/>
+                  </a:solidFill>
+                  <a:latin typeface="Arial" pitchFamily="34" charset="0"/>
+                  <a:ea typeface="Arial" pitchFamily="34" charset="-122"/>
+                  <a:cs typeface="Arial" pitchFamily="34" charset="-120"/>
+                </a:rPr>
+                <a:t>→</a:t>
+              </a:r>
+              <a:endParaRPr lang="en-US" sz="900" dirty="0"/>
+            </a:p>
+          </p:txBody>
+        </p:sp>
+        <p:sp>
+          <p:nvSpPr>
+            <p:cNvPr id="25" name="Shape 11">
+              <a:extLst>
+                <a:ext uri="{FF2B5EF4-FFF2-40B4-BE49-F238E27FC236}">
+                  <a16:creationId xmlns:a16="http://schemas.microsoft.com/office/drawing/2014/main" id="{F4CFB721-4F22-4EAD-938A-6BC7AB5DCC6E}"/>
+                </a:ext>
+              </a:extLst>
+            </p:cNvPr>
+            <p:cNvSpPr/>
+            <p:nvPr/>
+          </p:nvSpPr>
+          <p:spPr>
+            <a:xfrm>
+              <a:off x="3794760" y="822960"/>
+              <a:ext cx="1600200" cy="1463040"/>
+            </a:xfrm>
+            <a:prstGeom prst="rect">
+              <a:avLst/>
+            </a:prstGeom>
+            <a:solidFill>
+              <a:srgbClr val="F59E0B"/>
+            </a:solidFill>
+            <a:ln/>
+            <a:effectLst>
+              <a:outerShdw blurRad="50800" dist="25400" dir="8100000" algn="bl" rotWithShape="0">
+                <a:srgbClr val="000000">
+                  <a:alpha val="12000"/>
+                </a:srgbClr>
+              </a:outerShdw>
+            </a:effectLst>
+          </p:spPr>
+        </p:sp>
+        <p:sp>
+          <p:nvSpPr>
+            <p:cNvPr id="26" name="Text 12">
+              <a:extLst>
+                <a:ext uri="{FF2B5EF4-FFF2-40B4-BE49-F238E27FC236}">
+                  <a16:creationId xmlns:a16="http://schemas.microsoft.com/office/drawing/2014/main" id="{35332C2D-4478-4E1B-94A8-AF5C5745949B}"/>
+                </a:ext>
+              </a:extLst>
+            </p:cNvPr>
+            <p:cNvSpPr/>
+            <p:nvPr/>
+          </p:nvSpPr>
+          <p:spPr>
+            <a:xfrm>
+              <a:off x="3794760" y="868680"/>
+              <a:ext cx="1600200" cy="457200"/>
+            </a:xfrm>
+            <a:prstGeom prst="rect">
+              <a:avLst/>
+            </a:prstGeom>
+            <a:noFill/>
+            <a:ln/>
+          </p:spPr>
+          <p:txBody>
+            <a:bodyPr wrap="square" rtlCol="0" anchor="ctr"/>
+            <a:lstStyle/>
+            <a:p>
+              <a:pPr marL="0" indent="0" algn="ctr">
+                <a:buNone/>
+              </a:pPr>
+              <a:r>
+                <a:rPr lang="en-US" sz="800" b="1" dirty="0">
+                  <a:solidFill>
+                    <a:srgbClr val="FFFFFF"/>
+                  </a:solidFill>
+                  <a:latin typeface="Arial" pitchFamily="34" charset="0"/>
+                  <a:ea typeface="Arial" pitchFamily="34" charset="-122"/>
+                  <a:cs typeface="Arial" pitchFamily="34" charset="-120"/>
+                </a:rPr>
+                <a:t>DETECT</a:t>
+              </a:r>
+              <a:endParaRPr lang="en-US" sz="800" dirty="0"/>
+            </a:p>
+          </p:txBody>
+        </p:sp>
+        <p:sp>
+          <p:nvSpPr>
+            <p:cNvPr id="27" name="Text 13">
+              <a:extLst>
+                <a:ext uri="{FF2B5EF4-FFF2-40B4-BE49-F238E27FC236}">
+                  <a16:creationId xmlns:a16="http://schemas.microsoft.com/office/drawing/2014/main" id="{989650F1-A22E-4AD2-8DEE-E8208C1377BB}"/>
+                </a:ext>
+              </a:extLst>
+            </p:cNvPr>
+            <p:cNvSpPr/>
+            <p:nvPr/>
+          </p:nvSpPr>
+          <p:spPr>
+            <a:xfrm>
+              <a:off x="3794760" y="1371600"/>
+              <a:ext cx="1600200" cy="822960"/>
+            </a:xfrm>
+            <a:prstGeom prst="rect">
+              <a:avLst/>
+            </a:prstGeom>
+            <a:noFill/>
+            <a:ln/>
+          </p:spPr>
+          <p:txBody>
+            <a:bodyPr wrap="square" rtlCol="0" anchor="ctr"/>
+            <a:lstStyle/>
+            <a:p>
+              <a:pPr marL="0" indent="0" algn="ctr">
+                <a:buNone/>
+              </a:pPr>
+              <a:r>
+                <a:rPr lang="en-US" sz="700" dirty="0">
+                  <a:solidFill>
+                    <a:srgbClr val="FFFFFF"/>
+                  </a:solidFill>
+                  <a:latin typeface="Arial" pitchFamily="34" charset="0"/>
+                  <a:ea typeface="Arial" pitchFamily="34" charset="-122"/>
+                  <a:cs typeface="Arial" pitchFamily="34" charset="-120"/>
+                </a:rPr>
+                <a:t>Find objects,</a:t>
+              </a:r>
+              <a:endParaRPr lang="en-US" sz="700" dirty="0"/>
+            </a:p>
+            <a:p>
+              <a:pPr marL="0" indent="0" algn="ctr">
+                <a:buNone/>
+              </a:pPr>
+              <a:r>
+                <a:rPr lang="en-US" sz="700" dirty="0">
+                  <a:solidFill>
+                    <a:srgbClr val="FFFFFF"/>
+                  </a:solidFill>
+                  <a:latin typeface="Arial" pitchFamily="34" charset="0"/>
+                  <a:ea typeface="Arial" pitchFamily="34" charset="-122"/>
+                  <a:cs typeface="Arial" pitchFamily="34" charset="-120"/>
+                </a:rPr>
+                <a:t>edges, features</a:t>
+              </a:r>
+              <a:endParaRPr lang="en-US" sz="700" dirty="0"/>
+            </a:p>
+          </p:txBody>
+        </p:sp>
+        <p:sp>
+          <p:nvSpPr>
+            <p:cNvPr id="28" name="Text 14">
+              <a:extLst>
+                <a:ext uri="{FF2B5EF4-FFF2-40B4-BE49-F238E27FC236}">
+                  <a16:creationId xmlns:a16="http://schemas.microsoft.com/office/drawing/2014/main" id="{2EBFBBC3-C8C3-4511-8903-8184C55A6D15}"/>
+                </a:ext>
+              </a:extLst>
+            </p:cNvPr>
+            <p:cNvSpPr/>
+            <p:nvPr/>
+          </p:nvSpPr>
+          <p:spPr>
+            <a:xfrm>
+              <a:off x="5394960" y="1188720"/>
+              <a:ext cx="182880" cy="457200"/>
+            </a:xfrm>
+            <a:prstGeom prst="rect">
+              <a:avLst/>
+            </a:prstGeom>
+            <a:noFill/>
+            <a:ln/>
+          </p:spPr>
+          <p:txBody>
+            <a:bodyPr wrap="square" rtlCol="0" anchor="ctr"/>
+            <a:lstStyle/>
+            <a:p>
+              <a:pPr marL="0" indent="0">
+                <a:buNone/>
+              </a:pPr>
+              <a:r>
+                <a:rPr lang="en-US" sz="900" dirty="0">
+                  <a:solidFill>
+                    <a:srgbClr val="6B7280"/>
+                  </a:solidFill>
+                  <a:latin typeface="Arial" pitchFamily="34" charset="0"/>
+                  <a:ea typeface="Arial" pitchFamily="34" charset="-122"/>
+                  <a:cs typeface="Arial" pitchFamily="34" charset="-120"/>
+                </a:rPr>
+                <a:t>→</a:t>
+              </a:r>
+              <a:endParaRPr lang="en-US" sz="900" dirty="0"/>
+            </a:p>
+          </p:txBody>
+        </p:sp>
+        <p:sp>
+          <p:nvSpPr>
+            <p:cNvPr id="29" name="Shape 15">
+              <a:extLst>
+                <a:ext uri="{FF2B5EF4-FFF2-40B4-BE49-F238E27FC236}">
+                  <a16:creationId xmlns:a16="http://schemas.microsoft.com/office/drawing/2014/main" id="{BA0A6893-8558-4C3E-A474-AE5A778ED4FA}"/>
+                </a:ext>
+              </a:extLst>
+            </p:cNvPr>
+            <p:cNvSpPr/>
+            <p:nvPr/>
+          </p:nvSpPr>
+          <p:spPr>
+            <a:xfrm>
+              <a:off x="5577840" y="822960"/>
+              <a:ext cx="1600200" cy="1463040"/>
+            </a:xfrm>
+            <a:prstGeom prst="rect">
+              <a:avLst/>
+            </a:prstGeom>
+            <a:solidFill>
+              <a:srgbClr val="8B5CF6"/>
+            </a:solidFill>
+            <a:ln/>
+            <a:effectLst>
+              <a:outerShdw blurRad="50800" dist="25400" dir="8100000" algn="bl" rotWithShape="0">
+                <a:srgbClr val="000000">
+                  <a:alpha val="12000"/>
+                </a:srgbClr>
+              </a:outerShdw>
+            </a:effectLst>
+          </p:spPr>
+        </p:sp>
+        <p:sp>
+          <p:nvSpPr>
+            <p:cNvPr id="30" name="Text 16">
+              <a:extLst>
+                <a:ext uri="{FF2B5EF4-FFF2-40B4-BE49-F238E27FC236}">
+                  <a16:creationId xmlns:a16="http://schemas.microsoft.com/office/drawing/2014/main" id="{4C3EA4FE-DADA-47EA-9366-A8E96B68A13C}"/>
+                </a:ext>
+              </a:extLst>
+            </p:cNvPr>
+            <p:cNvSpPr/>
+            <p:nvPr/>
+          </p:nvSpPr>
+          <p:spPr>
+            <a:xfrm>
+              <a:off x="5577840" y="868680"/>
+              <a:ext cx="1600200" cy="457200"/>
+            </a:xfrm>
+            <a:prstGeom prst="rect">
+              <a:avLst/>
+            </a:prstGeom>
+            <a:noFill/>
+            <a:ln/>
+          </p:spPr>
+          <p:txBody>
+            <a:bodyPr wrap="square" rtlCol="0" anchor="ctr"/>
+            <a:lstStyle/>
+            <a:p>
+              <a:pPr marL="0" indent="0" algn="ctr">
+                <a:buNone/>
+              </a:pPr>
+              <a:r>
+                <a:rPr lang="en-US" sz="800" b="1" dirty="0">
+                  <a:solidFill>
+                    <a:srgbClr val="FFFFFF"/>
+                  </a:solidFill>
+                  <a:latin typeface="Arial" pitchFamily="34" charset="0"/>
+                  <a:ea typeface="Arial" pitchFamily="34" charset="-122"/>
+                  <a:cs typeface="Arial" pitchFamily="34" charset="-120"/>
+                </a:rPr>
+                <a:t>CLASSIFY</a:t>
+              </a:r>
+              <a:endParaRPr lang="en-US" sz="800" dirty="0"/>
+            </a:p>
+          </p:txBody>
+        </p:sp>
+        <p:sp>
+          <p:nvSpPr>
+            <p:cNvPr id="31" name="Text 17">
+              <a:extLst>
+                <a:ext uri="{FF2B5EF4-FFF2-40B4-BE49-F238E27FC236}">
+                  <a16:creationId xmlns:a16="http://schemas.microsoft.com/office/drawing/2014/main" id="{07B3DFCE-2B66-40D9-8A8B-7572430661BF}"/>
+                </a:ext>
+              </a:extLst>
+            </p:cNvPr>
+            <p:cNvSpPr/>
+            <p:nvPr/>
+          </p:nvSpPr>
+          <p:spPr>
+            <a:xfrm>
+              <a:off x="5577840" y="1371600"/>
+              <a:ext cx="1600200" cy="822960"/>
+            </a:xfrm>
+            <a:prstGeom prst="rect">
+              <a:avLst/>
+            </a:prstGeom>
+            <a:noFill/>
+            <a:ln/>
+          </p:spPr>
+          <p:txBody>
+            <a:bodyPr wrap="square" rtlCol="0" anchor="ctr"/>
+            <a:lstStyle/>
+            <a:p>
+              <a:pPr marL="0" indent="0" algn="ctr">
+                <a:buNone/>
+              </a:pPr>
+              <a:r>
+                <a:rPr lang="en-US" sz="700" dirty="0">
+                  <a:solidFill>
+                    <a:srgbClr val="FFFFFF"/>
+                  </a:solidFill>
+                  <a:latin typeface="Arial" pitchFamily="34" charset="0"/>
+                  <a:ea typeface="Arial" pitchFamily="34" charset="-122"/>
+                  <a:cs typeface="Arial" pitchFamily="34" charset="-120"/>
+                </a:rPr>
+                <a:t>What IS it?</a:t>
+              </a:r>
+              <a:endParaRPr lang="en-US" sz="700" dirty="0"/>
+            </a:p>
+            <a:p>
+              <a:pPr marL="0" indent="0" algn="ctr">
+                <a:buNone/>
+              </a:pPr>
+              <a:r>
+                <a:rPr lang="en-US" sz="700" dirty="0">
+                  <a:solidFill>
+                    <a:srgbClr val="FFFFFF"/>
+                  </a:solidFill>
+                  <a:latin typeface="Arial" pitchFamily="34" charset="0"/>
+                  <a:ea typeface="Arial" pitchFamily="34" charset="-122"/>
+                  <a:cs typeface="Arial" pitchFamily="34" charset="-120"/>
+                </a:rPr>
+                <a:t>chair, door, wall</a:t>
+              </a:r>
+              <a:endParaRPr lang="en-US" sz="700" dirty="0"/>
+            </a:p>
+          </p:txBody>
+        </p:sp>
+        <p:sp>
+          <p:nvSpPr>
+            <p:cNvPr id="32" name="Text 18">
+              <a:extLst>
+                <a:ext uri="{FF2B5EF4-FFF2-40B4-BE49-F238E27FC236}">
+                  <a16:creationId xmlns:a16="http://schemas.microsoft.com/office/drawing/2014/main" id="{47A23A9E-9EF3-4643-A569-113C10FAE802}"/>
+                </a:ext>
+              </a:extLst>
+            </p:cNvPr>
+            <p:cNvSpPr/>
+            <p:nvPr/>
+          </p:nvSpPr>
+          <p:spPr>
+            <a:xfrm>
+              <a:off x="7178040" y="1188720"/>
+              <a:ext cx="182880" cy="457200"/>
+            </a:xfrm>
+            <a:prstGeom prst="rect">
+              <a:avLst/>
+            </a:prstGeom>
+            <a:noFill/>
+            <a:ln/>
+          </p:spPr>
+          <p:txBody>
+            <a:bodyPr wrap="square" rtlCol="0" anchor="ctr"/>
+            <a:lstStyle/>
+            <a:p>
+              <a:pPr marL="0" indent="0">
+                <a:buNone/>
+              </a:pPr>
+              <a:r>
+                <a:rPr lang="en-US" sz="900" dirty="0">
+                  <a:solidFill>
+                    <a:srgbClr val="6B7280"/>
+                  </a:solidFill>
+                  <a:latin typeface="Arial" pitchFamily="34" charset="0"/>
+                  <a:ea typeface="Arial" pitchFamily="34" charset="-122"/>
+                  <a:cs typeface="Arial" pitchFamily="34" charset="-120"/>
+                </a:rPr>
+                <a:t>→</a:t>
+              </a:r>
+              <a:endParaRPr lang="en-US" sz="900" dirty="0"/>
+            </a:p>
+          </p:txBody>
+        </p:sp>
+        <p:sp>
+          <p:nvSpPr>
+            <p:cNvPr id="33" name="Shape 19">
+              <a:extLst>
+                <a:ext uri="{FF2B5EF4-FFF2-40B4-BE49-F238E27FC236}">
+                  <a16:creationId xmlns:a16="http://schemas.microsoft.com/office/drawing/2014/main" id="{90F315D6-D746-448B-BD29-B90D91DF4E31}"/>
+                </a:ext>
+              </a:extLst>
+            </p:cNvPr>
+            <p:cNvSpPr/>
+            <p:nvPr/>
+          </p:nvSpPr>
+          <p:spPr>
+            <a:xfrm>
+              <a:off x="7360920" y="822960"/>
+              <a:ext cx="1600200" cy="1463040"/>
+            </a:xfrm>
+            <a:prstGeom prst="rect">
+              <a:avLst/>
+            </a:prstGeom>
+            <a:solidFill>
+              <a:srgbClr val="10B981"/>
+            </a:solidFill>
+            <a:ln/>
+            <a:effectLst>
+              <a:outerShdw blurRad="50800" dist="25400" dir="8100000" algn="bl" rotWithShape="0">
+                <a:srgbClr val="000000">
+                  <a:alpha val="12000"/>
+                </a:srgbClr>
+              </a:outerShdw>
+            </a:effectLst>
+          </p:spPr>
+        </p:sp>
+        <p:sp>
+          <p:nvSpPr>
+            <p:cNvPr id="34" name="Text 20">
+              <a:extLst>
+                <a:ext uri="{FF2B5EF4-FFF2-40B4-BE49-F238E27FC236}">
+                  <a16:creationId xmlns:a16="http://schemas.microsoft.com/office/drawing/2014/main" id="{CF1D731D-4B7E-4372-9C74-59775222D8AF}"/>
+                </a:ext>
+              </a:extLst>
+            </p:cNvPr>
+            <p:cNvSpPr/>
+            <p:nvPr/>
+          </p:nvSpPr>
+          <p:spPr>
+            <a:xfrm>
+              <a:off x="7360920" y="868680"/>
+              <a:ext cx="1600200" cy="457200"/>
+            </a:xfrm>
+            <a:prstGeom prst="rect">
+              <a:avLst/>
+            </a:prstGeom>
+            <a:noFill/>
+            <a:ln/>
+          </p:spPr>
+          <p:txBody>
+            <a:bodyPr wrap="square" rtlCol="0" anchor="ctr"/>
+            <a:lstStyle/>
+            <a:p>
+              <a:pPr marL="0" indent="0" algn="ctr">
+                <a:buNone/>
+              </a:pPr>
+              <a:r>
+                <a:rPr lang="en-US" sz="800" b="1" dirty="0">
+                  <a:solidFill>
+                    <a:srgbClr val="FFFFFF"/>
+                  </a:solidFill>
+                  <a:latin typeface="Arial" pitchFamily="34" charset="0"/>
+                  <a:ea typeface="Arial" pitchFamily="34" charset="-122"/>
+                  <a:cs typeface="Arial" pitchFamily="34" charset="-120"/>
+                </a:rPr>
+                <a:t>INTERPRET</a:t>
+              </a:r>
+              <a:endParaRPr lang="en-US" sz="800" dirty="0"/>
+            </a:p>
+          </p:txBody>
+        </p:sp>
+        <p:sp>
+          <p:nvSpPr>
+            <p:cNvPr id="35" name="Text 21">
+              <a:extLst>
+                <a:ext uri="{FF2B5EF4-FFF2-40B4-BE49-F238E27FC236}">
+                  <a16:creationId xmlns:a16="http://schemas.microsoft.com/office/drawing/2014/main" id="{3F797791-7215-4021-8C0C-AFBE35FD97CB}"/>
+                </a:ext>
+              </a:extLst>
+            </p:cNvPr>
+            <p:cNvSpPr/>
+            <p:nvPr/>
+          </p:nvSpPr>
+          <p:spPr>
+            <a:xfrm>
+              <a:off x="7360920" y="1371600"/>
+              <a:ext cx="1600200" cy="822960"/>
+            </a:xfrm>
+            <a:prstGeom prst="rect">
+              <a:avLst/>
+            </a:prstGeom>
+            <a:noFill/>
+            <a:ln/>
+          </p:spPr>
+          <p:txBody>
+            <a:bodyPr wrap="square" rtlCol="0" anchor="ctr"/>
+            <a:lstStyle/>
+            <a:p>
+              <a:pPr marL="0" indent="0" algn="ctr">
+                <a:buNone/>
+              </a:pPr>
+              <a:r>
+                <a:rPr lang="en-US" sz="700" dirty="0">
+                  <a:solidFill>
+                    <a:srgbClr val="FFFFFF"/>
+                  </a:solidFill>
+                  <a:latin typeface="Arial" pitchFamily="34" charset="0"/>
+                  <a:ea typeface="Arial" pitchFamily="34" charset="-122"/>
+                  <a:cs typeface="Arial" pitchFamily="34" charset="-120"/>
+                </a:rPr>
+                <a:t>What does it</a:t>
+              </a:r>
+              <a:endParaRPr lang="en-US" sz="700" dirty="0"/>
+            </a:p>
+            <a:p>
+              <a:pPr marL="0" indent="0" algn="ctr">
+                <a:buNone/>
+              </a:pPr>
+              <a:r>
+                <a:rPr lang="en-US" sz="700" dirty="0">
+                  <a:solidFill>
+                    <a:srgbClr val="FFFFFF"/>
+                  </a:solidFill>
+                  <a:latin typeface="Arial" pitchFamily="34" charset="0"/>
+                  <a:ea typeface="Arial" pitchFamily="34" charset="-122"/>
+                  <a:cs typeface="Arial" pitchFamily="34" charset="-120"/>
+                </a:rPr>
+                <a:t>MEAN for the robot?</a:t>
+              </a:r>
+              <a:endParaRPr lang="en-US" sz="700" dirty="0"/>
+            </a:p>
+          </p:txBody>
+        </p:sp>
+      </p:grpSp>
     </p:spTree>
   </p:cSld>
   <p:clrMapOvr>
@@ -6542,6 +8873,907 @@
           </a:prstGeom>
         </p:spPr>
       </p:pic>
+      <p:grpSp>
+        <p:nvGrpSpPr>
+          <p:cNvPr id="19" name="Group 18">
+            <a:extLst>
+              <a:ext uri="{FF2B5EF4-FFF2-40B4-BE49-F238E27FC236}">
+                <a16:creationId xmlns:a16="http://schemas.microsoft.com/office/drawing/2014/main" id="{0671F4CC-660B-46A1-8408-51919E8539A4}"/>
+              </a:ext>
+            </a:extLst>
+          </p:cNvPr>
+          <p:cNvGrpSpPr/>
+          <p:nvPr/>
+        </p:nvGrpSpPr>
+        <p:grpSpPr>
+          <a:xfrm>
+            <a:off x="3200399" y="4608745"/>
+            <a:ext cx="5371253" cy="457200"/>
+            <a:chOff x="228600" y="822960"/>
+            <a:chExt cx="8732520" cy="1463040"/>
+          </a:xfrm>
+        </p:grpSpPr>
+        <p:sp>
+          <p:nvSpPr>
+            <p:cNvPr id="20" name="Shape 3">
+              <a:extLst>
+                <a:ext uri="{FF2B5EF4-FFF2-40B4-BE49-F238E27FC236}">
+                  <a16:creationId xmlns:a16="http://schemas.microsoft.com/office/drawing/2014/main" id="{FFAA5076-8007-426A-A5DC-EF11C65C6568}"/>
+                </a:ext>
+              </a:extLst>
+            </p:cNvPr>
+            <p:cNvSpPr/>
+            <p:nvPr/>
+          </p:nvSpPr>
+          <p:spPr>
+            <a:xfrm>
+              <a:off x="228600" y="822960"/>
+              <a:ext cx="1600200" cy="1463040"/>
+            </a:xfrm>
+            <a:prstGeom prst="rect">
+              <a:avLst/>
+            </a:prstGeom>
+            <a:solidFill>
+              <a:srgbClr val="3B82F6"/>
+            </a:solidFill>
+            <a:ln/>
+            <a:effectLst>
+              <a:outerShdw blurRad="50800" dist="25400" dir="8100000" algn="bl" rotWithShape="0">
+                <a:srgbClr val="000000">
+                  <a:alpha val="12000"/>
+                </a:srgbClr>
+              </a:outerShdw>
+            </a:effectLst>
+          </p:spPr>
+        </p:sp>
+        <p:sp>
+          <p:nvSpPr>
+            <p:cNvPr id="22" name="Text 4">
+              <a:extLst>
+                <a:ext uri="{FF2B5EF4-FFF2-40B4-BE49-F238E27FC236}">
+                  <a16:creationId xmlns:a16="http://schemas.microsoft.com/office/drawing/2014/main" id="{B2284B57-AB8E-42BC-BF7B-71732957A598}"/>
+                </a:ext>
+              </a:extLst>
+            </p:cNvPr>
+            <p:cNvSpPr/>
+            <p:nvPr/>
+          </p:nvSpPr>
+          <p:spPr>
+            <a:xfrm>
+              <a:off x="228600" y="868680"/>
+              <a:ext cx="1600200" cy="457200"/>
+            </a:xfrm>
+            <a:prstGeom prst="rect">
+              <a:avLst/>
+            </a:prstGeom>
+            <a:noFill/>
+            <a:ln/>
+          </p:spPr>
+          <p:txBody>
+            <a:bodyPr wrap="square" rtlCol="0" anchor="ctr"/>
+            <a:lstStyle/>
+            <a:p>
+              <a:pPr marL="0" indent="0" algn="ctr">
+                <a:buNone/>
+              </a:pPr>
+              <a:r>
+                <a:rPr lang="en-US" sz="800" b="1" dirty="0">
+                  <a:solidFill>
+                    <a:srgbClr val="FFFFFF"/>
+                  </a:solidFill>
+                  <a:latin typeface="Arial" pitchFamily="34" charset="0"/>
+                  <a:ea typeface="Arial" pitchFamily="34" charset="-122"/>
+                  <a:cs typeface="Arial" pitchFamily="34" charset="-120"/>
+                </a:rPr>
+                <a:t>SENSE</a:t>
+              </a:r>
+              <a:endParaRPr lang="en-US" sz="800" dirty="0"/>
+            </a:p>
+          </p:txBody>
+        </p:sp>
+        <p:sp>
+          <p:nvSpPr>
+            <p:cNvPr id="23" name="Text 5">
+              <a:extLst>
+                <a:ext uri="{FF2B5EF4-FFF2-40B4-BE49-F238E27FC236}">
+                  <a16:creationId xmlns:a16="http://schemas.microsoft.com/office/drawing/2014/main" id="{F8084D85-DB99-4E10-A952-66FE183C2C4D}"/>
+                </a:ext>
+              </a:extLst>
+            </p:cNvPr>
+            <p:cNvSpPr/>
+            <p:nvPr/>
+          </p:nvSpPr>
+          <p:spPr>
+            <a:xfrm>
+              <a:off x="228600" y="1371600"/>
+              <a:ext cx="1600200" cy="822960"/>
+            </a:xfrm>
+            <a:prstGeom prst="rect">
+              <a:avLst/>
+            </a:prstGeom>
+            <a:noFill/>
+            <a:ln/>
+          </p:spPr>
+          <p:txBody>
+            <a:bodyPr wrap="square" rtlCol="0" anchor="ctr"/>
+            <a:lstStyle/>
+            <a:p>
+              <a:pPr marL="0" indent="0" algn="ctr">
+                <a:buNone/>
+              </a:pPr>
+              <a:r>
+                <a:rPr lang="en-US" sz="700" dirty="0">
+                  <a:solidFill>
+                    <a:srgbClr val="FFFFFF"/>
+                  </a:solidFill>
+                  <a:latin typeface="Arial" pitchFamily="34" charset="0"/>
+                  <a:ea typeface="Arial" pitchFamily="34" charset="-122"/>
+                  <a:cs typeface="Arial" pitchFamily="34" charset="-120"/>
+                </a:rPr>
+                <a:t>Raw data from</a:t>
+              </a:r>
+              <a:endParaRPr lang="en-US" sz="700" dirty="0"/>
+            </a:p>
+            <a:p>
+              <a:pPr marL="0" indent="0" algn="ctr">
+                <a:buNone/>
+              </a:pPr>
+              <a:r>
+                <a:rPr lang="en-US" sz="700" dirty="0">
+                  <a:solidFill>
+                    <a:srgbClr val="FFFFFF"/>
+                  </a:solidFill>
+                  <a:latin typeface="Arial" pitchFamily="34" charset="0"/>
+                  <a:ea typeface="Arial" pitchFamily="34" charset="-122"/>
+                  <a:cs typeface="Arial" pitchFamily="34" charset="-120"/>
+                </a:rPr>
+                <a:t>camera, LiDAR</a:t>
+              </a:r>
+              <a:endParaRPr lang="en-US" sz="700" dirty="0"/>
+            </a:p>
+          </p:txBody>
+        </p:sp>
+        <p:sp>
+          <p:nvSpPr>
+            <p:cNvPr id="24" name="Text 6">
+              <a:extLst>
+                <a:ext uri="{FF2B5EF4-FFF2-40B4-BE49-F238E27FC236}">
+                  <a16:creationId xmlns:a16="http://schemas.microsoft.com/office/drawing/2014/main" id="{DA75666D-E5AB-49BD-B349-C0F53942FF6C}"/>
+                </a:ext>
+              </a:extLst>
+            </p:cNvPr>
+            <p:cNvSpPr/>
+            <p:nvPr/>
+          </p:nvSpPr>
+          <p:spPr>
+            <a:xfrm>
+              <a:off x="1828800" y="1188720"/>
+              <a:ext cx="182880" cy="457200"/>
+            </a:xfrm>
+            <a:prstGeom prst="rect">
+              <a:avLst/>
+            </a:prstGeom>
+            <a:noFill/>
+            <a:ln/>
+          </p:spPr>
+          <p:txBody>
+            <a:bodyPr wrap="square" rtlCol="0" anchor="ctr"/>
+            <a:lstStyle/>
+            <a:p>
+              <a:pPr marL="0" indent="0">
+                <a:buNone/>
+              </a:pPr>
+              <a:r>
+                <a:rPr lang="en-US" sz="900" dirty="0">
+                  <a:solidFill>
+                    <a:srgbClr val="6B7280"/>
+                  </a:solidFill>
+                  <a:latin typeface="Arial" pitchFamily="34" charset="0"/>
+                  <a:ea typeface="Arial" pitchFamily="34" charset="-122"/>
+                  <a:cs typeface="Arial" pitchFamily="34" charset="-120"/>
+                </a:rPr>
+                <a:t>→</a:t>
+              </a:r>
+              <a:endParaRPr lang="en-US" sz="900" dirty="0"/>
+            </a:p>
+          </p:txBody>
+        </p:sp>
+        <p:sp>
+          <p:nvSpPr>
+            <p:cNvPr id="25" name="Shape 7">
+              <a:extLst>
+                <a:ext uri="{FF2B5EF4-FFF2-40B4-BE49-F238E27FC236}">
+                  <a16:creationId xmlns:a16="http://schemas.microsoft.com/office/drawing/2014/main" id="{90B955F8-579E-49D9-9E8C-DF82CAD0BE76}"/>
+                </a:ext>
+              </a:extLst>
+            </p:cNvPr>
+            <p:cNvSpPr/>
+            <p:nvPr/>
+          </p:nvSpPr>
+          <p:spPr>
+            <a:xfrm>
+              <a:off x="2011680" y="822960"/>
+              <a:ext cx="1600200" cy="1463040"/>
+            </a:xfrm>
+            <a:prstGeom prst="rect">
+              <a:avLst/>
+            </a:prstGeom>
+            <a:solidFill>
+              <a:srgbClr val="0D9488"/>
+            </a:solidFill>
+            <a:ln/>
+            <a:effectLst>
+              <a:outerShdw blurRad="50800" dist="25400" dir="8100000" algn="bl" rotWithShape="0">
+                <a:srgbClr val="000000">
+                  <a:alpha val="12000"/>
+                </a:srgbClr>
+              </a:outerShdw>
+            </a:effectLst>
+          </p:spPr>
+        </p:sp>
+        <p:sp>
+          <p:nvSpPr>
+            <p:cNvPr id="26" name="Text 8">
+              <a:extLst>
+                <a:ext uri="{FF2B5EF4-FFF2-40B4-BE49-F238E27FC236}">
+                  <a16:creationId xmlns:a16="http://schemas.microsoft.com/office/drawing/2014/main" id="{4363E2F3-E660-4C5D-9DC6-21124439331E}"/>
+                </a:ext>
+              </a:extLst>
+            </p:cNvPr>
+            <p:cNvSpPr/>
+            <p:nvPr/>
+          </p:nvSpPr>
+          <p:spPr>
+            <a:xfrm>
+              <a:off x="2011680" y="868680"/>
+              <a:ext cx="1600200" cy="457200"/>
+            </a:xfrm>
+            <a:prstGeom prst="rect">
+              <a:avLst/>
+            </a:prstGeom>
+            <a:noFill/>
+            <a:ln/>
+          </p:spPr>
+          <p:txBody>
+            <a:bodyPr wrap="square" rtlCol="0" anchor="ctr"/>
+            <a:lstStyle/>
+            <a:p>
+              <a:pPr marL="0" indent="0" algn="ctr">
+                <a:buNone/>
+              </a:pPr>
+              <a:r>
+                <a:rPr lang="en-US" sz="800" b="1" dirty="0">
+                  <a:solidFill>
+                    <a:srgbClr val="FFFFFF"/>
+                  </a:solidFill>
+                  <a:latin typeface="Arial" pitchFamily="34" charset="0"/>
+                  <a:ea typeface="Arial" pitchFamily="34" charset="-122"/>
+                  <a:cs typeface="Arial" pitchFamily="34" charset="-120"/>
+                </a:rPr>
+                <a:t>PREPROCESS</a:t>
+              </a:r>
+              <a:endParaRPr lang="en-US" sz="800" dirty="0"/>
+            </a:p>
+          </p:txBody>
+        </p:sp>
+        <p:sp>
+          <p:nvSpPr>
+            <p:cNvPr id="27" name="Text 9">
+              <a:extLst>
+                <a:ext uri="{FF2B5EF4-FFF2-40B4-BE49-F238E27FC236}">
+                  <a16:creationId xmlns:a16="http://schemas.microsoft.com/office/drawing/2014/main" id="{ECE8C8F7-E261-415D-9E7B-19E2047882C2}"/>
+                </a:ext>
+              </a:extLst>
+            </p:cNvPr>
+            <p:cNvSpPr/>
+            <p:nvPr/>
+          </p:nvSpPr>
+          <p:spPr>
+            <a:xfrm>
+              <a:off x="2011680" y="1371600"/>
+              <a:ext cx="1600200" cy="822960"/>
+            </a:xfrm>
+            <a:prstGeom prst="rect">
+              <a:avLst/>
+            </a:prstGeom>
+            <a:noFill/>
+            <a:ln/>
+          </p:spPr>
+          <p:txBody>
+            <a:bodyPr wrap="square" rtlCol="0" anchor="ctr"/>
+            <a:lstStyle/>
+            <a:p>
+              <a:pPr marL="0" indent="0" algn="ctr">
+                <a:buNone/>
+              </a:pPr>
+              <a:r>
+                <a:rPr lang="en-US" sz="700" dirty="0">
+                  <a:solidFill>
+                    <a:srgbClr val="FFFFFF"/>
+                  </a:solidFill>
+                  <a:latin typeface="Arial" pitchFamily="34" charset="0"/>
+                  <a:ea typeface="Arial" pitchFamily="34" charset="-122"/>
+                  <a:cs typeface="Arial" pitchFamily="34" charset="-120"/>
+                </a:rPr>
+                <a:t>Filter noise,</a:t>
+              </a:r>
+              <a:endParaRPr lang="en-US" sz="700" dirty="0"/>
+            </a:p>
+            <a:p>
+              <a:pPr marL="0" indent="0" algn="ctr">
+                <a:buNone/>
+              </a:pPr>
+              <a:r>
+                <a:rPr lang="en-US" sz="700" dirty="0">
+                  <a:solidFill>
+                    <a:srgbClr val="FFFFFF"/>
+                  </a:solidFill>
+                  <a:latin typeface="Arial" pitchFamily="34" charset="0"/>
+                  <a:ea typeface="Arial" pitchFamily="34" charset="-122"/>
+                  <a:cs typeface="Arial" pitchFamily="34" charset="-120"/>
+                </a:rPr>
+                <a:t>enhance features</a:t>
+              </a:r>
+              <a:endParaRPr lang="en-US" sz="700" dirty="0"/>
+            </a:p>
+          </p:txBody>
+        </p:sp>
+        <p:sp>
+          <p:nvSpPr>
+            <p:cNvPr id="28" name="Text 10">
+              <a:extLst>
+                <a:ext uri="{FF2B5EF4-FFF2-40B4-BE49-F238E27FC236}">
+                  <a16:creationId xmlns:a16="http://schemas.microsoft.com/office/drawing/2014/main" id="{F3AE0A34-3AEC-4DFB-9B42-60DD4300FDE6}"/>
+                </a:ext>
+              </a:extLst>
+            </p:cNvPr>
+            <p:cNvSpPr/>
+            <p:nvPr/>
+          </p:nvSpPr>
+          <p:spPr>
+            <a:xfrm>
+              <a:off x="3611880" y="1188720"/>
+              <a:ext cx="182880" cy="457200"/>
+            </a:xfrm>
+            <a:prstGeom prst="rect">
+              <a:avLst/>
+            </a:prstGeom>
+            <a:noFill/>
+            <a:ln/>
+          </p:spPr>
+          <p:txBody>
+            <a:bodyPr wrap="square" rtlCol="0" anchor="ctr"/>
+            <a:lstStyle/>
+            <a:p>
+              <a:pPr marL="0" indent="0">
+                <a:buNone/>
+              </a:pPr>
+              <a:r>
+                <a:rPr lang="en-US" sz="900" dirty="0">
+                  <a:solidFill>
+                    <a:srgbClr val="6B7280"/>
+                  </a:solidFill>
+                  <a:latin typeface="Arial" pitchFamily="34" charset="0"/>
+                  <a:ea typeface="Arial" pitchFamily="34" charset="-122"/>
+                  <a:cs typeface="Arial" pitchFamily="34" charset="-120"/>
+                </a:rPr>
+                <a:t>→</a:t>
+              </a:r>
+              <a:endParaRPr lang="en-US" sz="900" dirty="0"/>
+            </a:p>
+          </p:txBody>
+        </p:sp>
+        <p:sp>
+          <p:nvSpPr>
+            <p:cNvPr id="29" name="Shape 11">
+              <a:extLst>
+                <a:ext uri="{FF2B5EF4-FFF2-40B4-BE49-F238E27FC236}">
+                  <a16:creationId xmlns:a16="http://schemas.microsoft.com/office/drawing/2014/main" id="{75161BB2-8733-447F-AD30-6C9F30034579}"/>
+                </a:ext>
+              </a:extLst>
+            </p:cNvPr>
+            <p:cNvSpPr/>
+            <p:nvPr/>
+          </p:nvSpPr>
+          <p:spPr>
+            <a:xfrm>
+              <a:off x="3794760" y="822960"/>
+              <a:ext cx="1600200" cy="1463040"/>
+            </a:xfrm>
+            <a:prstGeom prst="rect">
+              <a:avLst/>
+            </a:prstGeom>
+            <a:solidFill>
+              <a:srgbClr val="F59E0B"/>
+            </a:solidFill>
+            <a:ln/>
+            <a:effectLst>
+              <a:outerShdw blurRad="50800" dist="25400" dir="8100000" algn="bl" rotWithShape="0">
+                <a:srgbClr val="000000">
+                  <a:alpha val="12000"/>
+                </a:srgbClr>
+              </a:outerShdw>
+            </a:effectLst>
+          </p:spPr>
+        </p:sp>
+        <p:sp>
+          <p:nvSpPr>
+            <p:cNvPr id="30" name="Text 12">
+              <a:extLst>
+                <a:ext uri="{FF2B5EF4-FFF2-40B4-BE49-F238E27FC236}">
+                  <a16:creationId xmlns:a16="http://schemas.microsoft.com/office/drawing/2014/main" id="{98C0C036-BB41-48DF-8662-102B5E0A4C35}"/>
+                </a:ext>
+              </a:extLst>
+            </p:cNvPr>
+            <p:cNvSpPr/>
+            <p:nvPr/>
+          </p:nvSpPr>
+          <p:spPr>
+            <a:xfrm>
+              <a:off x="3794760" y="868680"/>
+              <a:ext cx="1600200" cy="457200"/>
+            </a:xfrm>
+            <a:prstGeom prst="rect">
+              <a:avLst/>
+            </a:prstGeom>
+            <a:noFill/>
+            <a:ln/>
+          </p:spPr>
+          <p:txBody>
+            <a:bodyPr wrap="square" rtlCol="0" anchor="ctr"/>
+            <a:lstStyle/>
+            <a:p>
+              <a:pPr marL="0" indent="0" algn="ctr">
+                <a:buNone/>
+              </a:pPr>
+              <a:r>
+                <a:rPr lang="en-US" sz="800" b="1" dirty="0">
+                  <a:solidFill>
+                    <a:srgbClr val="FFFFFF"/>
+                  </a:solidFill>
+                  <a:latin typeface="Arial" pitchFamily="34" charset="0"/>
+                  <a:ea typeface="Arial" pitchFamily="34" charset="-122"/>
+                  <a:cs typeface="Arial" pitchFamily="34" charset="-120"/>
+                </a:rPr>
+                <a:t>DETECT</a:t>
+              </a:r>
+              <a:endParaRPr lang="en-US" sz="800" dirty="0"/>
+            </a:p>
+          </p:txBody>
+        </p:sp>
+        <p:sp>
+          <p:nvSpPr>
+            <p:cNvPr id="31" name="Text 13">
+              <a:extLst>
+                <a:ext uri="{FF2B5EF4-FFF2-40B4-BE49-F238E27FC236}">
+                  <a16:creationId xmlns:a16="http://schemas.microsoft.com/office/drawing/2014/main" id="{1BC1C19A-123A-4374-96E3-87DEBD92E15C}"/>
+                </a:ext>
+              </a:extLst>
+            </p:cNvPr>
+            <p:cNvSpPr/>
+            <p:nvPr/>
+          </p:nvSpPr>
+          <p:spPr>
+            <a:xfrm>
+              <a:off x="3794760" y="1371600"/>
+              <a:ext cx="1600200" cy="822960"/>
+            </a:xfrm>
+            <a:prstGeom prst="rect">
+              <a:avLst/>
+            </a:prstGeom>
+            <a:noFill/>
+            <a:ln/>
+          </p:spPr>
+          <p:txBody>
+            <a:bodyPr wrap="square" rtlCol="0" anchor="ctr"/>
+            <a:lstStyle/>
+            <a:p>
+              <a:pPr marL="0" indent="0" algn="ctr">
+                <a:buNone/>
+              </a:pPr>
+              <a:r>
+                <a:rPr lang="en-US" sz="700" dirty="0">
+                  <a:solidFill>
+                    <a:srgbClr val="FFFFFF"/>
+                  </a:solidFill>
+                  <a:latin typeface="Arial" pitchFamily="34" charset="0"/>
+                  <a:ea typeface="Arial" pitchFamily="34" charset="-122"/>
+                  <a:cs typeface="Arial" pitchFamily="34" charset="-120"/>
+                </a:rPr>
+                <a:t>Find objects,</a:t>
+              </a:r>
+              <a:endParaRPr lang="en-US" sz="700" dirty="0"/>
+            </a:p>
+            <a:p>
+              <a:pPr marL="0" indent="0" algn="ctr">
+                <a:buNone/>
+              </a:pPr>
+              <a:r>
+                <a:rPr lang="en-US" sz="700" dirty="0">
+                  <a:solidFill>
+                    <a:srgbClr val="FFFFFF"/>
+                  </a:solidFill>
+                  <a:latin typeface="Arial" pitchFamily="34" charset="0"/>
+                  <a:ea typeface="Arial" pitchFamily="34" charset="-122"/>
+                  <a:cs typeface="Arial" pitchFamily="34" charset="-120"/>
+                </a:rPr>
+                <a:t>edges, features</a:t>
+              </a:r>
+              <a:endParaRPr lang="en-US" sz="700" dirty="0"/>
+            </a:p>
+          </p:txBody>
+        </p:sp>
+        <p:sp>
+          <p:nvSpPr>
+            <p:cNvPr id="32" name="Text 14">
+              <a:extLst>
+                <a:ext uri="{FF2B5EF4-FFF2-40B4-BE49-F238E27FC236}">
+                  <a16:creationId xmlns:a16="http://schemas.microsoft.com/office/drawing/2014/main" id="{CEAC73C1-C27E-4AC8-A3F5-2842FC3EC494}"/>
+                </a:ext>
+              </a:extLst>
+            </p:cNvPr>
+            <p:cNvSpPr/>
+            <p:nvPr/>
+          </p:nvSpPr>
+          <p:spPr>
+            <a:xfrm>
+              <a:off x="5394960" y="1188720"/>
+              <a:ext cx="182880" cy="457200"/>
+            </a:xfrm>
+            <a:prstGeom prst="rect">
+              <a:avLst/>
+            </a:prstGeom>
+            <a:noFill/>
+            <a:ln/>
+          </p:spPr>
+          <p:txBody>
+            <a:bodyPr wrap="square" rtlCol="0" anchor="ctr"/>
+            <a:lstStyle/>
+            <a:p>
+              <a:pPr marL="0" indent="0">
+                <a:buNone/>
+              </a:pPr>
+              <a:r>
+                <a:rPr lang="en-US" sz="900" dirty="0">
+                  <a:solidFill>
+                    <a:srgbClr val="6B7280"/>
+                  </a:solidFill>
+                  <a:latin typeface="Arial" pitchFamily="34" charset="0"/>
+                  <a:ea typeface="Arial" pitchFamily="34" charset="-122"/>
+                  <a:cs typeface="Arial" pitchFamily="34" charset="-120"/>
+                </a:rPr>
+                <a:t>→</a:t>
+              </a:r>
+              <a:endParaRPr lang="en-US" sz="900" dirty="0"/>
+            </a:p>
+          </p:txBody>
+        </p:sp>
+        <p:sp>
+          <p:nvSpPr>
+            <p:cNvPr id="33" name="Shape 15">
+              <a:extLst>
+                <a:ext uri="{FF2B5EF4-FFF2-40B4-BE49-F238E27FC236}">
+                  <a16:creationId xmlns:a16="http://schemas.microsoft.com/office/drawing/2014/main" id="{F8DF50C9-3219-48A8-B44C-B5A65CE45728}"/>
+                </a:ext>
+              </a:extLst>
+            </p:cNvPr>
+            <p:cNvSpPr/>
+            <p:nvPr/>
+          </p:nvSpPr>
+          <p:spPr>
+            <a:xfrm>
+              <a:off x="5577840" y="822960"/>
+              <a:ext cx="1600200" cy="1463040"/>
+            </a:xfrm>
+            <a:prstGeom prst="rect">
+              <a:avLst/>
+            </a:prstGeom>
+            <a:solidFill>
+              <a:srgbClr val="8B5CF6"/>
+            </a:solidFill>
+            <a:ln/>
+            <a:effectLst>
+              <a:outerShdw blurRad="50800" dist="25400" dir="8100000" algn="bl" rotWithShape="0">
+                <a:srgbClr val="000000">
+                  <a:alpha val="12000"/>
+                </a:srgbClr>
+              </a:outerShdw>
+            </a:effectLst>
+          </p:spPr>
+        </p:sp>
+        <p:sp>
+          <p:nvSpPr>
+            <p:cNvPr id="34" name="Text 16">
+              <a:extLst>
+                <a:ext uri="{FF2B5EF4-FFF2-40B4-BE49-F238E27FC236}">
+                  <a16:creationId xmlns:a16="http://schemas.microsoft.com/office/drawing/2014/main" id="{FD94C61C-A3A7-4F51-93EF-49B24DF90B96}"/>
+                </a:ext>
+              </a:extLst>
+            </p:cNvPr>
+            <p:cNvSpPr/>
+            <p:nvPr/>
+          </p:nvSpPr>
+          <p:spPr>
+            <a:xfrm>
+              <a:off x="5577840" y="868680"/>
+              <a:ext cx="1600200" cy="457200"/>
+            </a:xfrm>
+            <a:prstGeom prst="rect">
+              <a:avLst/>
+            </a:prstGeom>
+            <a:noFill/>
+            <a:ln/>
+          </p:spPr>
+          <p:txBody>
+            <a:bodyPr wrap="square" rtlCol="0" anchor="ctr"/>
+            <a:lstStyle/>
+            <a:p>
+              <a:pPr marL="0" indent="0" algn="ctr">
+                <a:buNone/>
+              </a:pPr>
+              <a:r>
+                <a:rPr lang="en-US" sz="800" b="1" dirty="0">
+                  <a:solidFill>
+                    <a:srgbClr val="FFFFFF"/>
+                  </a:solidFill>
+                  <a:latin typeface="Arial" pitchFamily="34" charset="0"/>
+                  <a:ea typeface="Arial" pitchFamily="34" charset="-122"/>
+                  <a:cs typeface="Arial" pitchFamily="34" charset="-120"/>
+                </a:rPr>
+                <a:t>CLASSIFY</a:t>
+              </a:r>
+              <a:endParaRPr lang="en-US" sz="800" dirty="0"/>
+            </a:p>
+          </p:txBody>
+        </p:sp>
+        <p:sp>
+          <p:nvSpPr>
+            <p:cNvPr id="35" name="Text 17">
+              <a:extLst>
+                <a:ext uri="{FF2B5EF4-FFF2-40B4-BE49-F238E27FC236}">
+                  <a16:creationId xmlns:a16="http://schemas.microsoft.com/office/drawing/2014/main" id="{F64BC339-6330-4261-B882-DB3C753F6BE0}"/>
+                </a:ext>
+              </a:extLst>
+            </p:cNvPr>
+            <p:cNvSpPr/>
+            <p:nvPr/>
+          </p:nvSpPr>
+          <p:spPr>
+            <a:xfrm>
+              <a:off x="5577840" y="1371600"/>
+              <a:ext cx="1600200" cy="822960"/>
+            </a:xfrm>
+            <a:prstGeom prst="rect">
+              <a:avLst/>
+            </a:prstGeom>
+            <a:noFill/>
+            <a:ln/>
+          </p:spPr>
+          <p:txBody>
+            <a:bodyPr wrap="square" rtlCol="0" anchor="ctr"/>
+            <a:lstStyle/>
+            <a:p>
+              <a:pPr marL="0" indent="0" algn="ctr">
+                <a:buNone/>
+              </a:pPr>
+              <a:r>
+                <a:rPr lang="en-US" sz="700" dirty="0">
+                  <a:solidFill>
+                    <a:srgbClr val="FFFFFF"/>
+                  </a:solidFill>
+                  <a:latin typeface="Arial" pitchFamily="34" charset="0"/>
+                  <a:ea typeface="Arial" pitchFamily="34" charset="-122"/>
+                  <a:cs typeface="Arial" pitchFamily="34" charset="-120"/>
+                </a:rPr>
+                <a:t>What IS it?</a:t>
+              </a:r>
+              <a:endParaRPr lang="en-US" sz="700" dirty="0"/>
+            </a:p>
+            <a:p>
+              <a:pPr marL="0" indent="0" algn="ctr">
+                <a:buNone/>
+              </a:pPr>
+              <a:r>
+                <a:rPr lang="en-US" sz="700" dirty="0">
+                  <a:solidFill>
+                    <a:srgbClr val="FFFFFF"/>
+                  </a:solidFill>
+                  <a:latin typeface="Arial" pitchFamily="34" charset="0"/>
+                  <a:ea typeface="Arial" pitchFamily="34" charset="-122"/>
+                  <a:cs typeface="Arial" pitchFamily="34" charset="-120"/>
+                </a:rPr>
+                <a:t>chair, door, wall</a:t>
+              </a:r>
+              <a:endParaRPr lang="en-US" sz="700" dirty="0"/>
+            </a:p>
+          </p:txBody>
+        </p:sp>
+        <p:sp>
+          <p:nvSpPr>
+            <p:cNvPr id="36" name="Text 18">
+              <a:extLst>
+                <a:ext uri="{FF2B5EF4-FFF2-40B4-BE49-F238E27FC236}">
+                  <a16:creationId xmlns:a16="http://schemas.microsoft.com/office/drawing/2014/main" id="{929E02CA-E8D8-434E-A9A7-BC825011510B}"/>
+                </a:ext>
+              </a:extLst>
+            </p:cNvPr>
+            <p:cNvSpPr/>
+            <p:nvPr/>
+          </p:nvSpPr>
+          <p:spPr>
+            <a:xfrm>
+              <a:off x="7178040" y="1188720"/>
+              <a:ext cx="182880" cy="457200"/>
+            </a:xfrm>
+            <a:prstGeom prst="rect">
+              <a:avLst/>
+            </a:prstGeom>
+            <a:noFill/>
+            <a:ln/>
+          </p:spPr>
+          <p:txBody>
+            <a:bodyPr wrap="square" rtlCol="0" anchor="ctr"/>
+            <a:lstStyle/>
+            <a:p>
+              <a:pPr marL="0" indent="0">
+                <a:buNone/>
+              </a:pPr>
+              <a:r>
+                <a:rPr lang="en-US" sz="900" dirty="0">
+                  <a:solidFill>
+                    <a:srgbClr val="6B7280"/>
+                  </a:solidFill>
+                  <a:latin typeface="Arial" pitchFamily="34" charset="0"/>
+                  <a:ea typeface="Arial" pitchFamily="34" charset="-122"/>
+                  <a:cs typeface="Arial" pitchFamily="34" charset="-120"/>
+                </a:rPr>
+                <a:t>→</a:t>
+              </a:r>
+              <a:endParaRPr lang="en-US" sz="900" dirty="0"/>
+            </a:p>
+          </p:txBody>
+        </p:sp>
+        <p:sp>
+          <p:nvSpPr>
+            <p:cNvPr id="37" name="Shape 19">
+              <a:extLst>
+                <a:ext uri="{FF2B5EF4-FFF2-40B4-BE49-F238E27FC236}">
+                  <a16:creationId xmlns:a16="http://schemas.microsoft.com/office/drawing/2014/main" id="{5F9073F4-AAE7-420E-AB23-6BD6CC195CC7}"/>
+                </a:ext>
+              </a:extLst>
+            </p:cNvPr>
+            <p:cNvSpPr/>
+            <p:nvPr/>
+          </p:nvSpPr>
+          <p:spPr>
+            <a:xfrm>
+              <a:off x="7360920" y="822960"/>
+              <a:ext cx="1600200" cy="1463040"/>
+            </a:xfrm>
+            <a:prstGeom prst="rect">
+              <a:avLst/>
+            </a:prstGeom>
+            <a:solidFill>
+              <a:srgbClr val="10B981"/>
+            </a:solidFill>
+            <a:ln/>
+            <a:effectLst>
+              <a:outerShdw blurRad="50800" dist="25400" dir="8100000" algn="bl" rotWithShape="0">
+                <a:srgbClr val="000000">
+                  <a:alpha val="12000"/>
+                </a:srgbClr>
+              </a:outerShdw>
+            </a:effectLst>
+          </p:spPr>
+        </p:sp>
+        <p:sp>
+          <p:nvSpPr>
+            <p:cNvPr id="38" name="Text 20">
+              <a:extLst>
+                <a:ext uri="{FF2B5EF4-FFF2-40B4-BE49-F238E27FC236}">
+                  <a16:creationId xmlns:a16="http://schemas.microsoft.com/office/drawing/2014/main" id="{D372AD2B-334F-4B88-A7B5-21677CD060B5}"/>
+                </a:ext>
+              </a:extLst>
+            </p:cNvPr>
+            <p:cNvSpPr/>
+            <p:nvPr/>
+          </p:nvSpPr>
+          <p:spPr>
+            <a:xfrm>
+              <a:off x="7360920" y="868680"/>
+              <a:ext cx="1600200" cy="457200"/>
+            </a:xfrm>
+            <a:prstGeom prst="rect">
+              <a:avLst/>
+            </a:prstGeom>
+            <a:noFill/>
+            <a:ln/>
+          </p:spPr>
+          <p:txBody>
+            <a:bodyPr wrap="square" rtlCol="0" anchor="ctr"/>
+            <a:lstStyle/>
+            <a:p>
+              <a:pPr marL="0" indent="0" algn="ctr">
+                <a:buNone/>
+              </a:pPr>
+              <a:r>
+                <a:rPr lang="en-US" sz="800" b="1" dirty="0">
+                  <a:solidFill>
+                    <a:srgbClr val="FFFFFF"/>
+                  </a:solidFill>
+                  <a:latin typeface="Arial" pitchFamily="34" charset="0"/>
+                  <a:ea typeface="Arial" pitchFamily="34" charset="-122"/>
+                  <a:cs typeface="Arial" pitchFamily="34" charset="-120"/>
+                </a:rPr>
+                <a:t>INTERPRET</a:t>
+              </a:r>
+              <a:endParaRPr lang="en-US" sz="800" dirty="0"/>
+            </a:p>
+          </p:txBody>
+        </p:sp>
+        <p:sp>
+          <p:nvSpPr>
+            <p:cNvPr id="39" name="Text 21">
+              <a:extLst>
+                <a:ext uri="{FF2B5EF4-FFF2-40B4-BE49-F238E27FC236}">
+                  <a16:creationId xmlns:a16="http://schemas.microsoft.com/office/drawing/2014/main" id="{3E76F005-A0D5-4281-B46A-74301DDDDADA}"/>
+                </a:ext>
+              </a:extLst>
+            </p:cNvPr>
+            <p:cNvSpPr/>
+            <p:nvPr/>
+          </p:nvSpPr>
+          <p:spPr>
+            <a:xfrm>
+              <a:off x="7360920" y="1371600"/>
+              <a:ext cx="1600200" cy="822960"/>
+            </a:xfrm>
+            <a:prstGeom prst="rect">
+              <a:avLst/>
+            </a:prstGeom>
+            <a:noFill/>
+            <a:ln/>
+          </p:spPr>
+          <p:txBody>
+            <a:bodyPr wrap="square" rtlCol="0" anchor="ctr"/>
+            <a:lstStyle/>
+            <a:p>
+              <a:pPr marL="0" indent="0" algn="ctr">
+                <a:buNone/>
+              </a:pPr>
+              <a:r>
+                <a:rPr lang="en-US" sz="700" dirty="0">
+                  <a:solidFill>
+                    <a:srgbClr val="FFFFFF"/>
+                  </a:solidFill>
+                  <a:latin typeface="Arial" pitchFamily="34" charset="0"/>
+                  <a:ea typeface="Arial" pitchFamily="34" charset="-122"/>
+                  <a:cs typeface="Arial" pitchFamily="34" charset="-120"/>
+                </a:rPr>
+                <a:t>What does it</a:t>
+              </a:r>
+              <a:endParaRPr lang="en-US" sz="700" dirty="0"/>
+            </a:p>
+            <a:p>
+              <a:pPr marL="0" indent="0" algn="ctr">
+                <a:buNone/>
+              </a:pPr>
+              <a:r>
+                <a:rPr lang="en-US" sz="700" dirty="0">
+                  <a:solidFill>
+                    <a:srgbClr val="FFFFFF"/>
+                  </a:solidFill>
+                  <a:latin typeface="Arial" pitchFamily="34" charset="0"/>
+                  <a:ea typeface="Arial" pitchFamily="34" charset="-122"/>
+                  <a:cs typeface="Arial" pitchFamily="34" charset="-120"/>
+                </a:rPr>
+                <a:t>MEAN for the robot?</a:t>
+              </a:r>
+              <a:endParaRPr lang="en-US" sz="700" dirty="0"/>
+            </a:p>
+          </p:txBody>
+        </p:sp>
+      </p:grpSp>
     </p:spTree>
   </p:cSld>
   <p:clrMapOvr>
@@ -10978,7 +14210,29 @@
                 <a:ea typeface="Arial" pitchFamily="34" charset="-122"/>
                 <a:cs typeface="Arial" pitchFamily="34" charset="-120"/>
               </a:rPr>
-              <a:t>RANSAC = RANdom SAmple Consensus — the workhorse of robust estimation in robotics.</a:t>
+              <a:t>RANSAC = RANdom </a:t>
+            </a:r>
+            <a:r>
+              <a:rPr lang="en-US" sz="1300" b="1" dirty="0" err="1">
+                <a:solidFill>
+                  <a:srgbClr val="10B981"/>
+                </a:solidFill>
+                <a:latin typeface="Arial" pitchFamily="34" charset="0"/>
+                <a:ea typeface="Arial" pitchFamily="34" charset="-122"/>
+                <a:cs typeface="Arial" pitchFamily="34" charset="-120"/>
+              </a:rPr>
+              <a:t>SAmple</a:t>
+            </a:r>
+            <a:r>
+              <a:rPr lang="en-US" sz="1300" b="1" dirty="0">
+                <a:solidFill>
+                  <a:srgbClr val="10B981"/>
+                </a:solidFill>
+                <a:latin typeface="Arial" pitchFamily="34" charset="0"/>
+                <a:ea typeface="Arial" pitchFamily="34" charset="-122"/>
+                <a:cs typeface="Arial" pitchFamily="34" charset="-120"/>
+              </a:rPr>
+              <a:t> Consensus</a:t>
             </a:r>
             <a:endParaRPr lang="en-US" sz="1300" dirty="0"/>
           </a:p>
@@ -11629,45 +14883,6 @@
                 <a:cs typeface="Arial" pitchFamily="34" charset="-120"/>
               </a:rPr>
               <a:t>After RANSAC: ~140 inlier matches, ~20 outliers identified and REMOVED. Robust result!</a:t>
-            </a:r>
-            <a:endParaRPr lang="en-US" sz="1200" dirty="0"/>
-          </a:p>
-        </p:txBody>
-      </p:sp>
-      <p:sp>
-        <p:nvSpPr>
-          <p:cNvPr id="23" name="Text 21"/>
-          <p:cNvSpPr/>
-          <p:nvPr/>
-        </p:nvSpPr>
-        <p:spPr>
-          <a:xfrm>
-            <a:off x="365760" y="3657600"/>
-            <a:ext cx="8412480" cy="274320"/>
-          </a:xfrm>
-          <a:prstGeom prst="rect">
-            <a:avLst/>
-          </a:prstGeom>
-          <a:noFill/>
-          <a:ln/>
-        </p:spPr>
-        <p:txBody>
-          <a:bodyPr wrap="square" rtlCol="0" anchor="ctr"/>
-          <a:lstStyle/>
-          <a:p>
-            <a:pPr marL="0" indent="0">
-              <a:buNone/>
-            </a:pPr>
-            <a:r>
-              <a:rPr lang="en-US" sz="1200" i="1" dirty="0">
-                <a:solidFill>
-                  <a:srgbClr val="6B7280"/>
-                </a:solidFill>
-                <a:latin typeface="Arial" pitchFamily="34" charset="0"/>
-                <a:ea typeface="Arial" pitchFamily="34" charset="-122"/>
-                <a:cs typeface="Arial" pitchFamily="34" charset="-120"/>
-              </a:rPr>
-              <a:t>You saw RANSAC in MOD-04 (plane fitting in point clouds). Same algorithm, different application.</a:t>
             </a:r>
             <a:endParaRPr lang="en-US" sz="1200" dirty="0"/>
           </a:p>
@@ -12045,7 +15260,23 @@
                 <a:ea typeface="Arial" pitchFamily="34" charset="-122"/>
                 <a:cs typeface="Arial" pitchFamily="34" charset="-120"/>
               </a:rPr>
-              <a:t>MediBot is in the elevator. LiDAR is blocked (enclosed box). Encoders are slipping on the smooth floor. But the camera can see the elevator walls and buttons. Can it estimate how MediBot is moving using ONLY image changes?</a:t>
+              <a:t>MediBot is in the elevator. LiDAR is blocked (enclosed box). Encoders are slipping on the smooth floor. But the camera can see the elevator walls and buttons. </a:t>
+            </a:r>
+          </a:p>
+          <a:p>
+            <a:pPr marL="0" indent="0">
+              <a:buNone/>
+            </a:pPr>
+            <a:r>
+              <a:rPr lang="en-US" sz="1200" dirty="0">
+                <a:solidFill>
+                  <a:srgbClr val="1F2937"/>
+                </a:solidFill>
+                <a:latin typeface="Arial" pitchFamily="34" charset="0"/>
+                <a:ea typeface="Arial" pitchFamily="34" charset="-122"/>
+                <a:cs typeface="Arial" pitchFamily="34" charset="-120"/>
+              </a:rPr>
+              <a:t>Can it estimate how MediBot is moving using ONLY image changes?</a:t>
             </a:r>
             <a:endParaRPr lang="en-US" sz="1200" dirty="0"/>
           </a:p>
@@ -12539,8 +15770,8 @@
           </a:p>
         </p:txBody>
       </p:sp>
-      <mc:AlternateContent xmlns:mc="http://schemas.openxmlformats.org/markup-compatibility/2006">
-        <mc:Choice xmlns:a14="http://schemas.microsoft.com/office/drawing/2010/main" Requires="a14">
+      <mc:AlternateContent xmlns:mc="http://schemas.openxmlformats.org/markup-compatibility/2006" xmlns:a14="http://schemas.microsoft.com/office/drawing/2010/main">
+        <mc:Choice Requires="a14">
           <p:sp>
             <p:nvSpPr>
               <p:cNvPr id="20" name="Text 18"/>
@@ -12843,7 +16074,7 @@
             </p:txBody>
           </p:sp>
         </mc:Choice>
-        <mc:Fallback>
+        <mc:Fallback xmlns="">
           <p:sp>
             <p:nvSpPr>
               <p:cNvPr id="20" name="Text 18"/>
@@ -13979,6 +17210,20 @@
               </a:rPr>
               <a:t>Dark environments, direct sunlight</a:t>
             </a:r>
+            <a:endParaRPr lang="ar-SA" sz="1200" dirty="0">
+              <a:solidFill>
+                <a:srgbClr val="6B7280"/>
+              </a:solidFill>
+              <a:latin typeface="Arial" pitchFamily="34" charset="0"/>
+              <a:ea typeface="Arial" pitchFamily="34" charset="-122"/>
+              <a:cs typeface="Arial" pitchFamily="34" charset="-120"/>
+            </a:endParaRPr>
+          </a:p>
+          <a:p>
+            <a:pPr marL="342900" indent="-342900">
+              <a:buSzPct val="100000"/>
+              <a:buChar char="•"/>
+            </a:pPr>
             <a:endParaRPr lang="en-US" sz="1200" dirty="0"/>
           </a:p>
           <a:p>
@@ -16568,6 +19813,28 @@
               <a:buChar char="•"/>
             </a:pPr>
             <a:r>
+              <a:rPr lang="en-US" sz="1200" dirty="0" err="1">
+                <a:solidFill>
+                  <a:srgbClr val="6B7280"/>
+                </a:solidFill>
+                <a:latin typeface="Arial" pitchFamily="34" charset="0"/>
+                <a:ea typeface="Arial" pitchFamily="34" charset="-122"/>
+                <a:cs typeface="Arial" pitchFamily="34" charset="-120"/>
+              </a:rPr>
+              <a:t>YOLOv</a:t>
+            </a:r>
+            <a:r>
+              <a:rPr lang="cs-CZ" sz="1200" dirty="0">
+                <a:solidFill>
+                  <a:srgbClr val="6B7280"/>
+                </a:solidFill>
+                <a:latin typeface="Arial" pitchFamily="34" charset="0"/>
+                <a:ea typeface="Arial" pitchFamily="34" charset="-122"/>
+                <a:cs typeface="Arial" pitchFamily="34" charset="-120"/>
+              </a:rPr>
+              <a:t>26</a:t>
+            </a:r>
+            <a:r>
               <a:rPr lang="en-US" sz="1200" dirty="0">
                 <a:solidFill>
                   <a:srgbClr val="6B7280"/>
@@ -16576,7 +19843,29 @@
                 <a:ea typeface="Arial" pitchFamily="34" charset="-122"/>
                 <a:cs typeface="Arial" pitchFamily="34" charset="-120"/>
               </a:rPr>
-              <a:t>YOLOv8: state of the art for robots (2024)</a:t>
+              <a:t>: state of the art for robots (202</a:t>
+            </a:r>
+            <a:r>
+              <a:rPr lang="cs-CZ" sz="1200" dirty="0">
+                <a:solidFill>
+                  <a:srgbClr val="6B7280"/>
+                </a:solidFill>
+                <a:latin typeface="Arial" pitchFamily="34" charset="0"/>
+                <a:ea typeface="Arial" pitchFamily="34" charset="-122"/>
+                <a:cs typeface="Arial" pitchFamily="34" charset="-120"/>
+              </a:rPr>
+              <a:t>6</a:t>
+            </a:r>
+            <a:r>
+              <a:rPr lang="en-US" sz="1200" dirty="0">
+                <a:solidFill>
+                  <a:srgbClr val="6B7280"/>
+                </a:solidFill>
+                <a:latin typeface="Arial" pitchFamily="34" charset="0"/>
+                <a:ea typeface="Arial" pitchFamily="34" charset="-122"/>
+                <a:cs typeface="Arial" pitchFamily="34" charset="-120"/>
+              </a:rPr>
+              <a:t>)</a:t>
             </a:r>
             <a:endParaRPr lang="en-US" sz="1200" dirty="0"/>
           </a:p>
@@ -17159,7 +20448,7 @@
                 <a:ea typeface="Arial" pitchFamily="34" charset="-122"/>
                 <a:cs typeface="Arial" pitchFamily="34" charset="-120"/>
               </a:rPr>
-              <a:t>PBL SCENARIO: </a:t>
+              <a:t>SCENARIO: </a:t>
             </a:r>
             <a:r>
               <a:rPr lang="en-US" sz="1200" dirty="0">
@@ -19885,17 +23174,6 @@
             <a:pPr marL="0" indent="0">
               <a:buNone/>
             </a:pPr>
-            <a:r>
-              <a:rPr lang="en-US" sz="1200" b="1" dirty="0">
-                <a:solidFill>
-                  <a:srgbClr val="1F2937"/>
-                </a:solidFill>
-                <a:latin typeface="Arial" pitchFamily="34" charset="0"/>
-                <a:ea typeface="Arial" pitchFamily="34" charset="-122"/>
-                <a:cs typeface="Arial" pitchFamily="34" charset="-120"/>
-              </a:rPr>
-              <a:t>Concept only (no implementation):</a:t>
-            </a:r>
             <a:endParaRPr lang="en-US" sz="1200" dirty="0"/>
           </a:p>
         </p:txBody>
@@ -21253,7 +24531,29 @@
                 <a:ea typeface="Arial" pitchFamily="34" charset="-122"/>
                 <a:cs typeface="Arial" pitchFamily="34" charset="-120"/>
               </a:rPr>
-              <a:t>"That's GLASS → LiDAR will fail" (sensor selection)</a:t>
+              <a:t>"That's GLASS → LiDAR </a:t>
+            </a:r>
+            <a:r>
+              <a:rPr lang="cs-CZ" sz="1200" dirty="0">
+                <a:solidFill>
+                  <a:srgbClr val="6B7280"/>
+                </a:solidFill>
+                <a:latin typeface="Arial" pitchFamily="34" charset="0"/>
+                <a:ea typeface="Arial" pitchFamily="34" charset="-122"/>
+                <a:cs typeface="Arial" pitchFamily="34" charset="-120"/>
+              </a:rPr>
+              <a:t>can</a:t>
+            </a:r>
+            <a:r>
+              <a:rPr lang="en-US" sz="1200" dirty="0">
+                <a:solidFill>
+                  <a:srgbClr val="6B7280"/>
+                </a:solidFill>
+                <a:latin typeface="Arial" pitchFamily="34" charset="0"/>
+                <a:ea typeface="Arial" pitchFamily="34" charset="-122"/>
+                <a:cs typeface="Arial" pitchFamily="34" charset="-120"/>
+              </a:rPr>
+              <a:t> fail" (sensor selection)</a:t>
             </a:r>
             <a:endParaRPr lang="en-US" sz="1200" dirty="0"/>
           </a:p>
@@ -25505,7 +28805,7 @@
 </file>
 
 <file path=ppt/slides/slide40.xml><?xml version="1.0" encoding="utf-8"?>
-<p:sld xmlns:a="http://schemas.openxmlformats.org/drawingml/2006/main" xmlns:r="http://schemas.openxmlformats.org/officeDocument/2006/relationships" xmlns:p="http://schemas.openxmlformats.org/presentationml/2006/main">
+<p:sld xmlns:a="http://schemas.openxmlformats.org/drawingml/2006/main" xmlns:r="http://schemas.openxmlformats.org/officeDocument/2006/relationships" xmlns:p="http://schemas.openxmlformats.org/presentationml/2006/main" show="0">
   <p:cSld name="Slide 39">
     <p:bg>
       <p:bgPr>
@@ -26523,7 +29823,7 @@
 </file>
 
 <file path=ppt/slides/slide41.xml><?xml version="1.0" encoding="utf-8"?>
-<p:sld xmlns:a="http://schemas.openxmlformats.org/drawingml/2006/main" xmlns:r="http://schemas.openxmlformats.org/officeDocument/2006/relationships" xmlns:p="http://schemas.openxmlformats.org/presentationml/2006/main" show="0">
+<p:sld xmlns:a="http://schemas.openxmlformats.org/drawingml/2006/main" xmlns:r="http://schemas.openxmlformats.org/officeDocument/2006/relationships" xmlns:p="http://schemas.openxmlformats.org/presentationml/2006/main">
   <p:cSld name="Slide 40">
     <p:bg>
       <p:bgPr>
@@ -27240,772 +30540,793 @@
           </a:p>
         </p:txBody>
       </p:sp>
-      <p:sp>
-        <p:nvSpPr>
-          <p:cNvPr id="5" name="Shape 3"/>
-          <p:cNvSpPr/>
-          <p:nvPr/>
-        </p:nvSpPr>
-        <p:spPr>
+      <p:grpSp>
+        <p:nvGrpSpPr>
+          <p:cNvPr id="26" name="Group 25">
+            <a:extLst>
+              <a:ext uri="{FF2B5EF4-FFF2-40B4-BE49-F238E27FC236}">
+                <a16:creationId xmlns:a16="http://schemas.microsoft.com/office/drawing/2014/main" id="{0659CF07-B778-48FD-B216-DCE0EAB212BF}"/>
+              </a:ext>
+            </a:extLst>
+          </p:cNvPr>
+          <p:cNvGrpSpPr/>
+          <p:nvPr/>
+        </p:nvGrpSpPr>
+        <p:grpSpPr>
           <a:xfrm>
             <a:off x="228600" y="822960"/>
-            <a:ext cx="1600200" cy="1463040"/>
-          </a:xfrm>
-          <a:prstGeom prst="rect">
-            <a:avLst/>
-          </a:prstGeom>
-          <a:solidFill>
-            <a:srgbClr val="3B82F6"/>
-          </a:solidFill>
-          <a:ln/>
-          <a:effectLst>
-            <a:outerShdw blurRad="50800" dist="25400" dir="8100000" algn="bl" rotWithShape="0">
-              <a:srgbClr val="000000">
-                <a:alpha val="12000"/>
-              </a:srgbClr>
-            </a:outerShdw>
-          </a:effectLst>
-        </p:spPr>
-      </p:sp>
-      <p:sp>
-        <p:nvSpPr>
-          <p:cNvPr id="6" name="Text 4"/>
-          <p:cNvSpPr/>
-          <p:nvPr/>
-        </p:nvSpPr>
-        <p:spPr>
-          <a:xfrm>
-            <a:off x="228600" y="868680"/>
-            <a:ext cx="1600200" cy="457200"/>
-          </a:xfrm>
-          <a:prstGeom prst="rect">
-            <a:avLst/>
-          </a:prstGeom>
-          <a:noFill/>
-          <a:ln/>
-        </p:spPr>
-        <p:txBody>
-          <a:bodyPr wrap="square" rtlCol="0" anchor="ctr"/>
-          <a:lstStyle/>
-          <a:p>
-            <a:pPr marL="0" indent="0" algn="ctr">
-              <a:buNone/>
-            </a:pPr>
-            <a:r>
-              <a:rPr lang="en-US" sz="1400" b="1" dirty="0">
-                <a:solidFill>
-                  <a:srgbClr val="FFFFFF"/>
-                </a:solidFill>
-                <a:latin typeface="Arial" pitchFamily="34" charset="0"/>
-                <a:ea typeface="Arial" pitchFamily="34" charset="-122"/>
-                <a:cs typeface="Arial" pitchFamily="34" charset="-120"/>
-              </a:rPr>
-              <a:t>SENSE</a:t>
-            </a:r>
-            <a:endParaRPr lang="en-US" sz="1400" dirty="0"/>
-          </a:p>
-        </p:txBody>
-      </p:sp>
-      <p:sp>
-        <p:nvSpPr>
-          <p:cNvPr id="7" name="Text 5"/>
-          <p:cNvSpPr/>
-          <p:nvPr/>
-        </p:nvSpPr>
-        <p:spPr>
-          <a:xfrm>
-            <a:off x="228600" y="1371600"/>
-            <a:ext cx="1600200" cy="822960"/>
-          </a:xfrm>
-          <a:prstGeom prst="rect">
-            <a:avLst/>
-          </a:prstGeom>
-          <a:noFill/>
-          <a:ln/>
-        </p:spPr>
-        <p:txBody>
-          <a:bodyPr wrap="square" rtlCol="0" anchor="ctr"/>
-          <a:lstStyle/>
-          <a:p>
-            <a:pPr marL="0" indent="0" algn="ctr">
-              <a:buNone/>
-            </a:pPr>
-            <a:r>
-              <a:rPr lang="en-US" sz="1200" dirty="0">
-                <a:solidFill>
-                  <a:srgbClr val="FFFFFF"/>
-                </a:solidFill>
-                <a:latin typeface="Arial" pitchFamily="34" charset="0"/>
-                <a:ea typeface="Arial" pitchFamily="34" charset="-122"/>
-                <a:cs typeface="Arial" pitchFamily="34" charset="-120"/>
-              </a:rPr>
-              <a:t>Raw data from</a:t>
-            </a:r>
-            <a:endParaRPr lang="en-US" sz="1200" dirty="0"/>
-          </a:p>
-          <a:p>
-            <a:pPr marL="0" indent="0" algn="ctr">
-              <a:buNone/>
-            </a:pPr>
-            <a:r>
-              <a:rPr lang="en-US" sz="1200" dirty="0">
-                <a:solidFill>
-                  <a:srgbClr val="FFFFFF"/>
-                </a:solidFill>
-                <a:latin typeface="Arial" pitchFamily="34" charset="0"/>
-                <a:ea typeface="Arial" pitchFamily="34" charset="-122"/>
-                <a:cs typeface="Arial" pitchFamily="34" charset="-120"/>
-              </a:rPr>
-              <a:t>camera, LiDAR</a:t>
-            </a:r>
-            <a:endParaRPr lang="en-US" sz="1200" dirty="0"/>
-          </a:p>
-        </p:txBody>
-      </p:sp>
-      <p:sp>
-        <p:nvSpPr>
-          <p:cNvPr id="8" name="Text 6"/>
-          <p:cNvSpPr/>
-          <p:nvPr/>
-        </p:nvSpPr>
-        <p:spPr>
-          <a:xfrm>
-            <a:off x="1828800" y="1188720"/>
-            <a:ext cx="182880" cy="457200"/>
-          </a:xfrm>
-          <a:prstGeom prst="rect">
-            <a:avLst/>
-          </a:prstGeom>
-          <a:noFill/>
-          <a:ln/>
-        </p:spPr>
-        <p:txBody>
-          <a:bodyPr wrap="square" rtlCol="0" anchor="ctr"/>
-          <a:lstStyle/>
-          <a:p>
-            <a:pPr marL="0" indent="0">
-              <a:buNone/>
-            </a:pPr>
-            <a:r>
-              <a:rPr lang="en-US" sz="1600" dirty="0">
-                <a:solidFill>
-                  <a:srgbClr val="6B7280"/>
-                </a:solidFill>
-                <a:latin typeface="Arial" pitchFamily="34" charset="0"/>
-                <a:ea typeface="Arial" pitchFamily="34" charset="-122"/>
-                <a:cs typeface="Arial" pitchFamily="34" charset="-120"/>
-              </a:rPr>
-              <a:t>→</a:t>
-            </a:r>
-            <a:endParaRPr lang="en-US" sz="1600" dirty="0"/>
-          </a:p>
-        </p:txBody>
-      </p:sp>
-      <p:sp>
-        <p:nvSpPr>
-          <p:cNvPr id="9" name="Shape 7"/>
-          <p:cNvSpPr/>
-          <p:nvPr/>
-        </p:nvSpPr>
-        <p:spPr>
-          <a:xfrm>
-            <a:off x="2011680" y="822960"/>
-            <a:ext cx="1600200" cy="1463040"/>
-          </a:xfrm>
-          <a:prstGeom prst="rect">
-            <a:avLst/>
-          </a:prstGeom>
-          <a:solidFill>
-            <a:srgbClr val="0D9488"/>
-          </a:solidFill>
-          <a:ln/>
-          <a:effectLst>
-            <a:outerShdw blurRad="50800" dist="25400" dir="8100000" algn="bl" rotWithShape="0">
-              <a:srgbClr val="000000">
-                <a:alpha val="12000"/>
-              </a:srgbClr>
-            </a:outerShdw>
-          </a:effectLst>
-        </p:spPr>
-      </p:sp>
-      <p:sp>
-        <p:nvSpPr>
-          <p:cNvPr id="10" name="Text 8"/>
-          <p:cNvSpPr/>
-          <p:nvPr/>
-        </p:nvSpPr>
-        <p:spPr>
-          <a:xfrm>
-            <a:off x="2011680" y="868680"/>
-            <a:ext cx="1600200" cy="457200"/>
-          </a:xfrm>
-          <a:prstGeom prst="rect">
-            <a:avLst/>
-          </a:prstGeom>
-          <a:noFill/>
-          <a:ln/>
-        </p:spPr>
-        <p:txBody>
-          <a:bodyPr wrap="square" rtlCol="0" anchor="ctr"/>
-          <a:lstStyle/>
-          <a:p>
-            <a:pPr marL="0" indent="0" algn="ctr">
-              <a:buNone/>
-            </a:pPr>
-            <a:r>
-              <a:rPr lang="en-US" sz="1400" b="1" dirty="0">
-                <a:solidFill>
-                  <a:srgbClr val="FFFFFF"/>
-                </a:solidFill>
-                <a:latin typeface="Arial" pitchFamily="34" charset="0"/>
-                <a:ea typeface="Arial" pitchFamily="34" charset="-122"/>
-                <a:cs typeface="Arial" pitchFamily="34" charset="-120"/>
-              </a:rPr>
-              <a:t>PREPROCESS</a:t>
-            </a:r>
-            <a:endParaRPr lang="en-US" sz="1400" dirty="0"/>
-          </a:p>
-        </p:txBody>
-      </p:sp>
-      <p:sp>
-        <p:nvSpPr>
-          <p:cNvPr id="11" name="Text 9"/>
-          <p:cNvSpPr/>
-          <p:nvPr/>
-        </p:nvSpPr>
-        <p:spPr>
-          <a:xfrm>
-            <a:off x="2011680" y="1371600"/>
-            <a:ext cx="1600200" cy="822960"/>
-          </a:xfrm>
-          <a:prstGeom prst="rect">
-            <a:avLst/>
-          </a:prstGeom>
-          <a:noFill/>
-          <a:ln/>
-        </p:spPr>
-        <p:txBody>
-          <a:bodyPr wrap="square" rtlCol="0" anchor="ctr"/>
-          <a:lstStyle/>
-          <a:p>
-            <a:pPr marL="0" indent="0" algn="ctr">
-              <a:buNone/>
-            </a:pPr>
-            <a:r>
-              <a:rPr lang="en-US" sz="1200" dirty="0">
-                <a:solidFill>
-                  <a:srgbClr val="FFFFFF"/>
-                </a:solidFill>
-                <a:latin typeface="Arial" pitchFamily="34" charset="0"/>
-                <a:ea typeface="Arial" pitchFamily="34" charset="-122"/>
-                <a:cs typeface="Arial" pitchFamily="34" charset="-120"/>
-              </a:rPr>
-              <a:t>Filter noise,</a:t>
-            </a:r>
-            <a:endParaRPr lang="en-US" sz="1200" dirty="0"/>
-          </a:p>
-          <a:p>
-            <a:pPr marL="0" indent="0" algn="ctr">
-              <a:buNone/>
-            </a:pPr>
-            <a:r>
-              <a:rPr lang="en-US" sz="1200" dirty="0">
-                <a:solidFill>
-                  <a:srgbClr val="FFFFFF"/>
-                </a:solidFill>
-                <a:latin typeface="Arial" pitchFamily="34" charset="0"/>
-                <a:ea typeface="Arial" pitchFamily="34" charset="-122"/>
-                <a:cs typeface="Arial" pitchFamily="34" charset="-120"/>
-              </a:rPr>
-              <a:t>enhance features</a:t>
-            </a:r>
-            <a:endParaRPr lang="en-US" sz="1200" dirty="0"/>
-          </a:p>
-        </p:txBody>
-      </p:sp>
-      <p:sp>
-        <p:nvSpPr>
-          <p:cNvPr id="12" name="Text 10"/>
-          <p:cNvSpPr/>
-          <p:nvPr/>
-        </p:nvSpPr>
-        <p:spPr>
-          <a:xfrm>
-            <a:off x="3611880" y="1188720"/>
-            <a:ext cx="182880" cy="457200"/>
-          </a:xfrm>
-          <a:prstGeom prst="rect">
-            <a:avLst/>
-          </a:prstGeom>
-          <a:noFill/>
-          <a:ln/>
-        </p:spPr>
-        <p:txBody>
-          <a:bodyPr wrap="square" rtlCol="0" anchor="ctr"/>
-          <a:lstStyle/>
-          <a:p>
-            <a:pPr marL="0" indent="0">
-              <a:buNone/>
-            </a:pPr>
-            <a:r>
-              <a:rPr lang="en-US" sz="1600" dirty="0">
-                <a:solidFill>
-                  <a:srgbClr val="6B7280"/>
-                </a:solidFill>
-                <a:latin typeface="Arial" pitchFamily="34" charset="0"/>
-                <a:ea typeface="Arial" pitchFamily="34" charset="-122"/>
-                <a:cs typeface="Arial" pitchFamily="34" charset="-120"/>
-              </a:rPr>
-              <a:t>→</a:t>
-            </a:r>
-            <a:endParaRPr lang="en-US" sz="1600" dirty="0"/>
-          </a:p>
-        </p:txBody>
-      </p:sp>
-      <p:sp>
-        <p:nvSpPr>
-          <p:cNvPr id="13" name="Shape 11"/>
-          <p:cNvSpPr/>
-          <p:nvPr/>
-        </p:nvSpPr>
-        <p:spPr>
-          <a:xfrm>
-            <a:off x="3794760" y="822960"/>
-            <a:ext cx="1600200" cy="1463040"/>
-          </a:xfrm>
-          <a:prstGeom prst="rect">
-            <a:avLst/>
-          </a:prstGeom>
-          <a:solidFill>
-            <a:srgbClr val="F59E0B"/>
-          </a:solidFill>
-          <a:ln/>
-          <a:effectLst>
-            <a:outerShdw blurRad="50800" dist="25400" dir="8100000" algn="bl" rotWithShape="0">
-              <a:srgbClr val="000000">
-                <a:alpha val="12000"/>
-              </a:srgbClr>
-            </a:outerShdw>
-          </a:effectLst>
-        </p:spPr>
-      </p:sp>
-      <p:sp>
-        <p:nvSpPr>
-          <p:cNvPr id="14" name="Text 12"/>
-          <p:cNvSpPr/>
-          <p:nvPr/>
-        </p:nvSpPr>
-        <p:spPr>
-          <a:xfrm>
-            <a:off x="3794760" y="868680"/>
-            <a:ext cx="1600200" cy="457200"/>
-          </a:xfrm>
-          <a:prstGeom prst="rect">
-            <a:avLst/>
-          </a:prstGeom>
-          <a:noFill/>
-          <a:ln/>
-        </p:spPr>
-        <p:txBody>
-          <a:bodyPr wrap="square" rtlCol="0" anchor="ctr"/>
-          <a:lstStyle/>
-          <a:p>
-            <a:pPr marL="0" indent="0" algn="ctr">
-              <a:buNone/>
-            </a:pPr>
-            <a:r>
-              <a:rPr lang="en-US" sz="1400" b="1" dirty="0">
-                <a:solidFill>
-                  <a:srgbClr val="FFFFFF"/>
-                </a:solidFill>
-                <a:latin typeface="Arial" pitchFamily="34" charset="0"/>
-                <a:ea typeface="Arial" pitchFamily="34" charset="-122"/>
-                <a:cs typeface="Arial" pitchFamily="34" charset="-120"/>
-              </a:rPr>
-              <a:t>DETECT</a:t>
-            </a:r>
-            <a:endParaRPr lang="en-US" sz="1400" dirty="0"/>
-          </a:p>
-        </p:txBody>
-      </p:sp>
-      <p:sp>
-        <p:nvSpPr>
-          <p:cNvPr id="15" name="Text 13"/>
-          <p:cNvSpPr/>
-          <p:nvPr/>
-        </p:nvSpPr>
-        <p:spPr>
-          <a:xfrm>
-            <a:off x="3794760" y="1371600"/>
-            <a:ext cx="1600200" cy="822960"/>
-          </a:xfrm>
-          <a:prstGeom prst="rect">
-            <a:avLst/>
-          </a:prstGeom>
-          <a:noFill/>
-          <a:ln/>
-        </p:spPr>
-        <p:txBody>
-          <a:bodyPr wrap="square" rtlCol="0" anchor="ctr"/>
-          <a:lstStyle/>
-          <a:p>
-            <a:pPr marL="0" indent="0" algn="ctr">
-              <a:buNone/>
-            </a:pPr>
-            <a:r>
-              <a:rPr lang="en-US" sz="1200" dirty="0">
-                <a:solidFill>
-                  <a:srgbClr val="FFFFFF"/>
-                </a:solidFill>
-                <a:latin typeface="Arial" pitchFamily="34" charset="0"/>
-                <a:ea typeface="Arial" pitchFamily="34" charset="-122"/>
-                <a:cs typeface="Arial" pitchFamily="34" charset="-120"/>
-              </a:rPr>
-              <a:t>Find objects,</a:t>
-            </a:r>
-            <a:endParaRPr lang="en-US" sz="1200" dirty="0"/>
-          </a:p>
-          <a:p>
-            <a:pPr marL="0" indent="0" algn="ctr">
-              <a:buNone/>
-            </a:pPr>
-            <a:r>
-              <a:rPr lang="en-US" sz="1200" dirty="0">
-                <a:solidFill>
-                  <a:srgbClr val="FFFFFF"/>
-                </a:solidFill>
-                <a:latin typeface="Arial" pitchFamily="34" charset="0"/>
-                <a:ea typeface="Arial" pitchFamily="34" charset="-122"/>
-                <a:cs typeface="Arial" pitchFamily="34" charset="-120"/>
-              </a:rPr>
-              <a:t>edges, features</a:t>
-            </a:r>
-            <a:endParaRPr lang="en-US" sz="1200" dirty="0"/>
-          </a:p>
-        </p:txBody>
-      </p:sp>
-      <p:sp>
-        <p:nvSpPr>
-          <p:cNvPr id="16" name="Text 14"/>
-          <p:cNvSpPr/>
-          <p:nvPr/>
-        </p:nvSpPr>
-        <p:spPr>
-          <a:xfrm>
-            <a:off x="5394960" y="1188720"/>
-            <a:ext cx="182880" cy="457200"/>
-          </a:xfrm>
-          <a:prstGeom prst="rect">
-            <a:avLst/>
-          </a:prstGeom>
-          <a:noFill/>
-          <a:ln/>
-        </p:spPr>
-        <p:txBody>
-          <a:bodyPr wrap="square" rtlCol="0" anchor="ctr"/>
-          <a:lstStyle/>
-          <a:p>
-            <a:pPr marL="0" indent="0">
-              <a:buNone/>
-            </a:pPr>
-            <a:r>
-              <a:rPr lang="en-US" sz="1600" dirty="0">
-                <a:solidFill>
-                  <a:srgbClr val="6B7280"/>
-                </a:solidFill>
-                <a:latin typeface="Arial" pitchFamily="34" charset="0"/>
-                <a:ea typeface="Arial" pitchFamily="34" charset="-122"/>
-                <a:cs typeface="Arial" pitchFamily="34" charset="-120"/>
-              </a:rPr>
-              <a:t>→</a:t>
-            </a:r>
-            <a:endParaRPr lang="en-US" sz="1600" dirty="0"/>
-          </a:p>
-        </p:txBody>
-      </p:sp>
-      <p:sp>
-        <p:nvSpPr>
-          <p:cNvPr id="17" name="Shape 15"/>
-          <p:cNvSpPr/>
-          <p:nvPr/>
-        </p:nvSpPr>
-        <p:spPr>
-          <a:xfrm>
-            <a:off x="5577840" y="822960"/>
-            <a:ext cx="1600200" cy="1463040"/>
-          </a:xfrm>
-          <a:prstGeom prst="rect">
-            <a:avLst/>
-          </a:prstGeom>
-          <a:solidFill>
-            <a:srgbClr val="8B5CF6"/>
-          </a:solidFill>
-          <a:ln/>
-          <a:effectLst>
-            <a:outerShdw blurRad="50800" dist="25400" dir="8100000" algn="bl" rotWithShape="0">
-              <a:srgbClr val="000000">
-                <a:alpha val="12000"/>
-              </a:srgbClr>
-            </a:outerShdw>
-          </a:effectLst>
-        </p:spPr>
-      </p:sp>
-      <p:sp>
-        <p:nvSpPr>
-          <p:cNvPr id="18" name="Text 16"/>
-          <p:cNvSpPr/>
-          <p:nvPr/>
-        </p:nvSpPr>
-        <p:spPr>
-          <a:xfrm>
-            <a:off x="5577840" y="868680"/>
-            <a:ext cx="1600200" cy="457200"/>
-          </a:xfrm>
-          <a:prstGeom prst="rect">
-            <a:avLst/>
-          </a:prstGeom>
-          <a:noFill/>
-          <a:ln/>
-        </p:spPr>
-        <p:txBody>
-          <a:bodyPr wrap="square" rtlCol="0" anchor="ctr"/>
-          <a:lstStyle/>
-          <a:p>
-            <a:pPr marL="0" indent="0" algn="ctr">
-              <a:buNone/>
-            </a:pPr>
-            <a:r>
-              <a:rPr lang="en-US" sz="1400" b="1" dirty="0">
-                <a:solidFill>
-                  <a:srgbClr val="FFFFFF"/>
-                </a:solidFill>
-                <a:latin typeface="Arial" pitchFamily="34" charset="0"/>
-                <a:ea typeface="Arial" pitchFamily="34" charset="-122"/>
-                <a:cs typeface="Arial" pitchFamily="34" charset="-120"/>
-              </a:rPr>
-              <a:t>CLASSIFY</a:t>
-            </a:r>
-            <a:endParaRPr lang="en-US" sz="1400" dirty="0"/>
-          </a:p>
-        </p:txBody>
-      </p:sp>
-      <p:sp>
-        <p:nvSpPr>
-          <p:cNvPr id="19" name="Text 17"/>
-          <p:cNvSpPr/>
-          <p:nvPr/>
-        </p:nvSpPr>
-        <p:spPr>
-          <a:xfrm>
-            <a:off x="5577840" y="1371600"/>
-            <a:ext cx="1600200" cy="822960"/>
-          </a:xfrm>
-          <a:prstGeom prst="rect">
-            <a:avLst/>
-          </a:prstGeom>
-          <a:noFill/>
-          <a:ln/>
-        </p:spPr>
-        <p:txBody>
-          <a:bodyPr wrap="square" rtlCol="0" anchor="ctr"/>
-          <a:lstStyle/>
-          <a:p>
-            <a:pPr marL="0" indent="0" algn="ctr">
-              <a:buNone/>
-            </a:pPr>
-            <a:r>
-              <a:rPr lang="en-US" sz="1200" dirty="0">
-                <a:solidFill>
-                  <a:srgbClr val="FFFFFF"/>
-                </a:solidFill>
-                <a:latin typeface="Arial" pitchFamily="34" charset="0"/>
-                <a:ea typeface="Arial" pitchFamily="34" charset="-122"/>
-                <a:cs typeface="Arial" pitchFamily="34" charset="-120"/>
-              </a:rPr>
-              <a:t>What IS it?</a:t>
-            </a:r>
-            <a:endParaRPr lang="en-US" sz="1200" dirty="0"/>
-          </a:p>
-          <a:p>
-            <a:pPr marL="0" indent="0" algn="ctr">
-              <a:buNone/>
-            </a:pPr>
-            <a:r>
-              <a:rPr lang="en-US" sz="1200" dirty="0">
-                <a:solidFill>
-                  <a:srgbClr val="FFFFFF"/>
-                </a:solidFill>
-                <a:latin typeface="Arial" pitchFamily="34" charset="0"/>
-                <a:ea typeface="Arial" pitchFamily="34" charset="-122"/>
-                <a:cs typeface="Arial" pitchFamily="34" charset="-120"/>
-              </a:rPr>
-              <a:t>chair, door, wall</a:t>
-            </a:r>
-            <a:endParaRPr lang="en-US" sz="1200" dirty="0"/>
-          </a:p>
-        </p:txBody>
-      </p:sp>
-      <p:sp>
-        <p:nvSpPr>
-          <p:cNvPr id="20" name="Text 18"/>
-          <p:cNvSpPr/>
-          <p:nvPr/>
-        </p:nvSpPr>
-        <p:spPr>
-          <a:xfrm>
-            <a:off x="7178040" y="1188720"/>
-            <a:ext cx="182880" cy="457200"/>
-          </a:xfrm>
-          <a:prstGeom prst="rect">
-            <a:avLst/>
-          </a:prstGeom>
-          <a:noFill/>
-          <a:ln/>
-        </p:spPr>
-        <p:txBody>
-          <a:bodyPr wrap="square" rtlCol="0" anchor="ctr"/>
-          <a:lstStyle/>
-          <a:p>
-            <a:pPr marL="0" indent="0">
-              <a:buNone/>
-            </a:pPr>
-            <a:r>
-              <a:rPr lang="en-US" sz="1600" dirty="0">
-                <a:solidFill>
-                  <a:srgbClr val="6B7280"/>
-                </a:solidFill>
-                <a:latin typeface="Arial" pitchFamily="34" charset="0"/>
-                <a:ea typeface="Arial" pitchFamily="34" charset="-122"/>
-                <a:cs typeface="Arial" pitchFamily="34" charset="-120"/>
-              </a:rPr>
-              <a:t>→</a:t>
-            </a:r>
-            <a:endParaRPr lang="en-US" sz="1600" dirty="0"/>
-          </a:p>
-        </p:txBody>
-      </p:sp>
-      <p:sp>
-        <p:nvSpPr>
-          <p:cNvPr id="21" name="Shape 19"/>
-          <p:cNvSpPr/>
-          <p:nvPr/>
-        </p:nvSpPr>
-        <p:spPr>
-          <a:xfrm>
-            <a:off x="7360920" y="822960"/>
-            <a:ext cx="1600200" cy="1463040"/>
-          </a:xfrm>
-          <a:prstGeom prst="rect">
-            <a:avLst/>
-          </a:prstGeom>
-          <a:solidFill>
-            <a:srgbClr val="10B981"/>
-          </a:solidFill>
-          <a:ln/>
-          <a:effectLst>
-            <a:outerShdw blurRad="50800" dist="25400" dir="8100000" algn="bl" rotWithShape="0">
-              <a:srgbClr val="000000">
-                <a:alpha val="12000"/>
-              </a:srgbClr>
-            </a:outerShdw>
-          </a:effectLst>
-        </p:spPr>
-      </p:sp>
-      <p:sp>
-        <p:nvSpPr>
-          <p:cNvPr id="22" name="Text 20"/>
-          <p:cNvSpPr/>
-          <p:nvPr/>
-        </p:nvSpPr>
-        <p:spPr>
-          <a:xfrm>
-            <a:off x="7360920" y="868680"/>
-            <a:ext cx="1600200" cy="457200"/>
-          </a:xfrm>
-          <a:prstGeom prst="rect">
-            <a:avLst/>
-          </a:prstGeom>
-          <a:noFill/>
-          <a:ln/>
-        </p:spPr>
-        <p:txBody>
-          <a:bodyPr wrap="square" rtlCol="0" anchor="ctr"/>
-          <a:lstStyle/>
-          <a:p>
-            <a:pPr marL="0" indent="0" algn="ctr">
-              <a:buNone/>
-            </a:pPr>
-            <a:r>
-              <a:rPr lang="en-US" sz="1400" b="1" dirty="0">
-                <a:solidFill>
-                  <a:srgbClr val="FFFFFF"/>
-                </a:solidFill>
-                <a:latin typeface="Arial" pitchFamily="34" charset="0"/>
-                <a:ea typeface="Arial" pitchFamily="34" charset="-122"/>
-                <a:cs typeface="Arial" pitchFamily="34" charset="-120"/>
-              </a:rPr>
-              <a:t>INTERPRET</a:t>
-            </a:r>
-            <a:endParaRPr lang="en-US" sz="1400" dirty="0"/>
-          </a:p>
-        </p:txBody>
-      </p:sp>
-      <p:sp>
-        <p:nvSpPr>
-          <p:cNvPr id="23" name="Text 21"/>
-          <p:cNvSpPr/>
-          <p:nvPr/>
-        </p:nvSpPr>
-        <p:spPr>
-          <a:xfrm>
-            <a:off x="7360920" y="1371600"/>
-            <a:ext cx="1600200" cy="822960"/>
-          </a:xfrm>
-          <a:prstGeom prst="rect">
-            <a:avLst/>
-          </a:prstGeom>
-          <a:noFill/>
-          <a:ln/>
-        </p:spPr>
-        <p:txBody>
-          <a:bodyPr wrap="square" rtlCol="0" anchor="ctr"/>
-          <a:lstStyle/>
-          <a:p>
-            <a:pPr marL="0" indent="0" algn="ctr">
-              <a:buNone/>
-            </a:pPr>
-            <a:r>
-              <a:rPr lang="en-US" sz="1200" dirty="0">
-                <a:solidFill>
-                  <a:srgbClr val="FFFFFF"/>
-                </a:solidFill>
-                <a:latin typeface="Arial" pitchFamily="34" charset="0"/>
-                <a:ea typeface="Arial" pitchFamily="34" charset="-122"/>
-                <a:cs typeface="Arial" pitchFamily="34" charset="-120"/>
-              </a:rPr>
-              <a:t>What does it</a:t>
-            </a:r>
-            <a:endParaRPr lang="en-US" sz="1200" dirty="0"/>
-          </a:p>
-          <a:p>
-            <a:pPr marL="0" indent="0" algn="ctr">
-              <a:buNone/>
-            </a:pPr>
-            <a:r>
-              <a:rPr lang="en-US" sz="1200" dirty="0">
-                <a:solidFill>
-                  <a:srgbClr val="FFFFFF"/>
-                </a:solidFill>
-                <a:latin typeface="Arial" pitchFamily="34" charset="0"/>
-                <a:ea typeface="Arial" pitchFamily="34" charset="-122"/>
-                <a:cs typeface="Arial" pitchFamily="34" charset="-120"/>
-              </a:rPr>
-              <a:t>MEAN for the robot?</a:t>
-            </a:r>
-            <a:endParaRPr lang="en-US" sz="1200" dirty="0"/>
-          </a:p>
-        </p:txBody>
-      </p:sp>
+            <a:ext cx="8732520" cy="1463040"/>
+            <a:chOff x="228600" y="822960"/>
+            <a:chExt cx="8732520" cy="1463040"/>
+          </a:xfrm>
+        </p:grpSpPr>
+        <p:sp>
+          <p:nvSpPr>
+            <p:cNvPr id="5" name="Shape 3"/>
+            <p:cNvSpPr/>
+            <p:nvPr/>
+          </p:nvSpPr>
+          <p:spPr>
+            <a:xfrm>
+              <a:off x="228600" y="822960"/>
+              <a:ext cx="1600200" cy="1463040"/>
+            </a:xfrm>
+            <a:prstGeom prst="rect">
+              <a:avLst/>
+            </a:prstGeom>
+            <a:solidFill>
+              <a:srgbClr val="3B82F6"/>
+            </a:solidFill>
+            <a:ln/>
+            <a:effectLst>
+              <a:outerShdw blurRad="50800" dist="25400" dir="8100000" algn="bl" rotWithShape="0">
+                <a:srgbClr val="000000">
+                  <a:alpha val="12000"/>
+                </a:srgbClr>
+              </a:outerShdw>
+            </a:effectLst>
+          </p:spPr>
+        </p:sp>
+        <p:sp>
+          <p:nvSpPr>
+            <p:cNvPr id="6" name="Text 4"/>
+            <p:cNvSpPr/>
+            <p:nvPr/>
+          </p:nvSpPr>
+          <p:spPr>
+            <a:xfrm>
+              <a:off x="228600" y="868680"/>
+              <a:ext cx="1600200" cy="457200"/>
+            </a:xfrm>
+            <a:prstGeom prst="rect">
+              <a:avLst/>
+            </a:prstGeom>
+            <a:noFill/>
+            <a:ln/>
+          </p:spPr>
+          <p:txBody>
+            <a:bodyPr wrap="square" rtlCol="0" anchor="ctr"/>
+            <a:lstStyle/>
+            <a:p>
+              <a:pPr marL="0" indent="0" algn="ctr">
+                <a:buNone/>
+              </a:pPr>
+              <a:r>
+                <a:rPr lang="en-US" sz="1400" b="1" dirty="0">
+                  <a:solidFill>
+                    <a:srgbClr val="FFFFFF"/>
+                  </a:solidFill>
+                  <a:latin typeface="Arial" pitchFamily="34" charset="0"/>
+                  <a:ea typeface="Arial" pitchFamily="34" charset="-122"/>
+                  <a:cs typeface="Arial" pitchFamily="34" charset="-120"/>
+                </a:rPr>
+                <a:t>SENSE</a:t>
+              </a:r>
+              <a:endParaRPr lang="en-US" sz="1400" dirty="0"/>
+            </a:p>
+          </p:txBody>
+        </p:sp>
+        <p:sp>
+          <p:nvSpPr>
+            <p:cNvPr id="7" name="Text 5"/>
+            <p:cNvSpPr/>
+            <p:nvPr/>
+          </p:nvSpPr>
+          <p:spPr>
+            <a:xfrm>
+              <a:off x="228600" y="1371600"/>
+              <a:ext cx="1600200" cy="822960"/>
+            </a:xfrm>
+            <a:prstGeom prst="rect">
+              <a:avLst/>
+            </a:prstGeom>
+            <a:noFill/>
+            <a:ln/>
+          </p:spPr>
+          <p:txBody>
+            <a:bodyPr wrap="square" rtlCol="0" anchor="ctr"/>
+            <a:lstStyle/>
+            <a:p>
+              <a:pPr marL="0" indent="0" algn="ctr">
+                <a:buNone/>
+              </a:pPr>
+              <a:r>
+                <a:rPr lang="en-US" sz="1200" dirty="0">
+                  <a:solidFill>
+                    <a:srgbClr val="FFFFFF"/>
+                  </a:solidFill>
+                  <a:latin typeface="Arial" pitchFamily="34" charset="0"/>
+                  <a:ea typeface="Arial" pitchFamily="34" charset="-122"/>
+                  <a:cs typeface="Arial" pitchFamily="34" charset="-120"/>
+                </a:rPr>
+                <a:t>Raw data from</a:t>
+              </a:r>
+              <a:endParaRPr lang="en-US" sz="1200" dirty="0"/>
+            </a:p>
+            <a:p>
+              <a:pPr marL="0" indent="0" algn="ctr">
+                <a:buNone/>
+              </a:pPr>
+              <a:r>
+                <a:rPr lang="en-US" sz="1200" dirty="0">
+                  <a:solidFill>
+                    <a:srgbClr val="FFFFFF"/>
+                  </a:solidFill>
+                  <a:latin typeface="Arial" pitchFamily="34" charset="0"/>
+                  <a:ea typeface="Arial" pitchFamily="34" charset="-122"/>
+                  <a:cs typeface="Arial" pitchFamily="34" charset="-120"/>
+                </a:rPr>
+                <a:t>camera, LiDAR</a:t>
+              </a:r>
+              <a:endParaRPr lang="en-US" sz="1200" dirty="0"/>
+            </a:p>
+          </p:txBody>
+        </p:sp>
+        <p:sp>
+          <p:nvSpPr>
+            <p:cNvPr id="8" name="Text 6"/>
+            <p:cNvSpPr/>
+            <p:nvPr/>
+          </p:nvSpPr>
+          <p:spPr>
+            <a:xfrm>
+              <a:off x="1828800" y="1188720"/>
+              <a:ext cx="182880" cy="457200"/>
+            </a:xfrm>
+            <a:prstGeom prst="rect">
+              <a:avLst/>
+            </a:prstGeom>
+            <a:noFill/>
+            <a:ln/>
+          </p:spPr>
+          <p:txBody>
+            <a:bodyPr wrap="square" rtlCol="0" anchor="ctr"/>
+            <a:lstStyle/>
+            <a:p>
+              <a:pPr marL="0" indent="0">
+                <a:buNone/>
+              </a:pPr>
+              <a:r>
+                <a:rPr lang="en-US" sz="1600" dirty="0">
+                  <a:solidFill>
+                    <a:srgbClr val="6B7280"/>
+                  </a:solidFill>
+                  <a:latin typeface="Arial" pitchFamily="34" charset="0"/>
+                  <a:ea typeface="Arial" pitchFamily="34" charset="-122"/>
+                  <a:cs typeface="Arial" pitchFamily="34" charset="-120"/>
+                </a:rPr>
+                <a:t>→</a:t>
+              </a:r>
+              <a:endParaRPr lang="en-US" sz="1600" dirty="0"/>
+            </a:p>
+          </p:txBody>
+        </p:sp>
+        <p:sp>
+          <p:nvSpPr>
+            <p:cNvPr id="9" name="Shape 7"/>
+            <p:cNvSpPr/>
+            <p:nvPr/>
+          </p:nvSpPr>
+          <p:spPr>
+            <a:xfrm>
+              <a:off x="2011680" y="822960"/>
+              <a:ext cx="1600200" cy="1463040"/>
+            </a:xfrm>
+            <a:prstGeom prst="rect">
+              <a:avLst/>
+            </a:prstGeom>
+            <a:solidFill>
+              <a:srgbClr val="0D9488"/>
+            </a:solidFill>
+            <a:ln/>
+            <a:effectLst>
+              <a:outerShdw blurRad="50800" dist="25400" dir="8100000" algn="bl" rotWithShape="0">
+                <a:srgbClr val="000000">
+                  <a:alpha val="12000"/>
+                </a:srgbClr>
+              </a:outerShdw>
+            </a:effectLst>
+          </p:spPr>
+        </p:sp>
+        <p:sp>
+          <p:nvSpPr>
+            <p:cNvPr id="10" name="Text 8"/>
+            <p:cNvSpPr/>
+            <p:nvPr/>
+          </p:nvSpPr>
+          <p:spPr>
+            <a:xfrm>
+              <a:off x="2011680" y="868680"/>
+              <a:ext cx="1600200" cy="457200"/>
+            </a:xfrm>
+            <a:prstGeom prst="rect">
+              <a:avLst/>
+            </a:prstGeom>
+            <a:noFill/>
+            <a:ln/>
+          </p:spPr>
+          <p:txBody>
+            <a:bodyPr wrap="square" rtlCol="0" anchor="ctr"/>
+            <a:lstStyle/>
+            <a:p>
+              <a:pPr marL="0" indent="0" algn="ctr">
+                <a:buNone/>
+              </a:pPr>
+              <a:r>
+                <a:rPr lang="en-US" sz="1400" b="1" dirty="0">
+                  <a:solidFill>
+                    <a:srgbClr val="FFFFFF"/>
+                  </a:solidFill>
+                  <a:latin typeface="Arial" pitchFamily="34" charset="0"/>
+                  <a:ea typeface="Arial" pitchFamily="34" charset="-122"/>
+                  <a:cs typeface="Arial" pitchFamily="34" charset="-120"/>
+                </a:rPr>
+                <a:t>PREPROCESS</a:t>
+              </a:r>
+              <a:endParaRPr lang="en-US" sz="1400" dirty="0"/>
+            </a:p>
+          </p:txBody>
+        </p:sp>
+        <p:sp>
+          <p:nvSpPr>
+            <p:cNvPr id="11" name="Text 9"/>
+            <p:cNvSpPr/>
+            <p:nvPr/>
+          </p:nvSpPr>
+          <p:spPr>
+            <a:xfrm>
+              <a:off x="2011680" y="1371600"/>
+              <a:ext cx="1600200" cy="822960"/>
+            </a:xfrm>
+            <a:prstGeom prst="rect">
+              <a:avLst/>
+            </a:prstGeom>
+            <a:noFill/>
+            <a:ln/>
+          </p:spPr>
+          <p:txBody>
+            <a:bodyPr wrap="square" rtlCol="0" anchor="ctr"/>
+            <a:lstStyle/>
+            <a:p>
+              <a:pPr marL="0" indent="0" algn="ctr">
+                <a:buNone/>
+              </a:pPr>
+              <a:r>
+                <a:rPr lang="en-US" sz="1200" dirty="0">
+                  <a:solidFill>
+                    <a:srgbClr val="FFFFFF"/>
+                  </a:solidFill>
+                  <a:latin typeface="Arial" pitchFamily="34" charset="0"/>
+                  <a:ea typeface="Arial" pitchFamily="34" charset="-122"/>
+                  <a:cs typeface="Arial" pitchFamily="34" charset="-120"/>
+                </a:rPr>
+                <a:t>Filter noise,</a:t>
+              </a:r>
+              <a:endParaRPr lang="en-US" sz="1200" dirty="0"/>
+            </a:p>
+            <a:p>
+              <a:pPr marL="0" indent="0" algn="ctr">
+                <a:buNone/>
+              </a:pPr>
+              <a:r>
+                <a:rPr lang="en-US" sz="1200" dirty="0">
+                  <a:solidFill>
+                    <a:srgbClr val="FFFFFF"/>
+                  </a:solidFill>
+                  <a:latin typeface="Arial" pitchFamily="34" charset="0"/>
+                  <a:ea typeface="Arial" pitchFamily="34" charset="-122"/>
+                  <a:cs typeface="Arial" pitchFamily="34" charset="-120"/>
+                </a:rPr>
+                <a:t>enhance features</a:t>
+              </a:r>
+              <a:endParaRPr lang="en-US" sz="1200" dirty="0"/>
+            </a:p>
+          </p:txBody>
+        </p:sp>
+        <p:sp>
+          <p:nvSpPr>
+            <p:cNvPr id="12" name="Text 10"/>
+            <p:cNvSpPr/>
+            <p:nvPr/>
+          </p:nvSpPr>
+          <p:spPr>
+            <a:xfrm>
+              <a:off x="3611880" y="1188720"/>
+              <a:ext cx="182880" cy="457200"/>
+            </a:xfrm>
+            <a:prstGeom prst="rect">
+              <a:avLst/>
+            </a:prstGeom>
+            <a:noFill/>
+            <a:ln/>
+          </p:spPr>
+          <p:txBody>
+            <a:bodyPr wrap="square" rtlCol="0" anchor="ctr"/>
+            <a:lstStyle/>
+            <a:p>
+              <a:pPr marL="0" indent="0">
+                <a:buNone/>
+              </a:pPr>
+              <a:r>
+                <a:rPr lang="en-US" sz="1600" dirty="0">
+                  <a:solidFill>
+                    <a:srgbClr val="6B7280"/>
+                  </a:solidFill>
+                  <a:latin typeface="Arial" pitchFamily="34" charset="0"/>
+                  <a:ea typeface="Arial" pitchFamily="34" charset="-122"/>
+                  <a:cs typeface="Arial" pitchFamily="34" charset="-120"/>
+                </a:rPr>
+                <a:t>→</a:t>
+              </a:r>
+              <a:endParaRPr lang="en-US" sz="1600" dirty="0"/>
+            </a:p>
+          </p:txBody>
+        </p:sp>
+        <p:sp>
+          <p:nvSpPr>
+            <p:cNvPr id="13" name="Shape 11"/>
+            <p:cNvSpPr/>
+            <p:nvPr/>
+          </p:nvSpPr>
+          <p:spPr>
+            <a:xfrm>
+              <a:off x="3794760" y="822960"/>
+              <a:ext cx="1600200" cy="1463040"/>
+            </a:xfrm>
+            <a:prstGeom prst="rect">
+              <a:avLst/>
+            </a:prstGeom>
+            <a:solidFill>
+              <a:srgbClr val="F59E0B"/>
+            </a:solidFill>
+            <a:ln/>
+            <a:effectLst>
+              <a:outerShdw blurRad="50800" dist="25400" dir="8100000" algn="bl" rotWithShape="0">
+                <a:srgbClr val="000000">
+                  <a:alpha val="12000"/>
+                </a:srgbClr>
+              </a:outerShdw>
+            </a:effectLst>
+          </p:spPr>
+        </p:sp>
+        <p:sp>
+          <p:nvSpPr>
+            <p:cNvPr id="14" name="Text 12"/>
+            <p:cNvSpPr/>
+            <p:nvPr/>
+          </p:nvSpPr>
+          <p:spPr>
+            <a:xfrm>
+              <a:off x="3794760" y="868680"/>
+              <a:ext cx="1600200" cy="457200"/>
+            </a:xfrm>
+            <a:prstGeom prst="rect">
+              <a:avLst/>
+            </a:prstGeom>
+            <a:noFill/>
+            <a:ln/>
+          </p:spPr>
+          <p:txBody>
+            <a:bodyPr wrap="square" rtlCol="0" anchor="ctr"/>
+            <a:lstStyle/>
+            <a:p>
+              <a:pPr marL="0" indent="0" algn="ctr">
+                <a:buNone/>
+              </a:pPr>
+              <a:r>
+                <a:rPr lang="en-US" sz="1400" b="1" dirty="0">
+                  <a:solidFill>
+                    <a:srgbClr val="FFFFFF"/>
+                  </a:solidFill>
+                  <a:latin typeface="Arial" pitchFamily="34" charset="0"/>
+                  <a:ea typeface="Arial" pitchFamily="34" charset="-122"/>
+                  <a:cs typeface="Arial" pitchFamily="34" charset="-120"/>
+                </a:rPr>
+                <a:t>DETECT</a:t>
+              </a:r>
+              <a:endParaRPr lang="en-US" sz="1400" dirty="0"/>
+            </a:p>
+          </p:txBody>
+        </p:sp>
+        <p:sp>
+          <p:nvSpPr>
+            <p:cNvPr id="15" name="Text 13"/>
+            <p:cNvSpPr/>
+            <p:nvPr/>
+          </p:nvSpPr>
+          <p:spPr>
+            <a:xfrm>
+              <a:off x="3794760" y="1371600"/>
+              <a:ext cx="1600200" cy="822960"/>
+            </a:xfrm>
+            <a:prstGeom prst="rect">
+              <a:avLst/>
+            </a:prstGeom>
+            <a:noFill/>
+            <a:ln/>
+          </p:spPr>
+          <p:txBody>
+            <a:bodyPr wrap="square" rtlCol="0" anchor="ctr"/>
+            <a:lstStyle/>
+            <a:p>
+              <a:pPr marL="0" indent="0" algn="ctr">
+                <a:buNone/>
+              </a:pPr>
+              <a:r>
+                <a:rPr lang="en-US" sz="1200" dirty="0">
+                  <a:solidFill>
+                    <a:srgbClr val="FFFFFF"/>
+                  </a:solidFill>
+                  <a:latin typeface="Arial" pitchFamily="34" charset="0"/>
+                  <a:ea typeface="Arial" pitchFamily="34" charset="-122"/>
+                  <a:cs typeface="Arial" pitchFamily="34" charset="-120"/>
+                </a:rPr>
+                <a:t>Find objects,</a:t>
+              </a:r>
+              <a:endParaRPr lang="en-US" sz="1200" dirty="0"/>
+            </a:p>
+            <a:p>
+              <a:pPr marL="0" indent="0" algn="ctr">
+                <a:buNone/>
+              </a:pPr>
+              <a:r>
+                <a:rPr lang="en-US" sz="1200" dirty="0">
+                  <a:solidFill>
+                    <a:srgbClr val="FFFFFF"/>
+                  </a:solidFill>
+                  <a:latin typeface="Arial" pitchFamily="34" charset="0"/>
+                  <a:ea typeface="Arial" pitchFamily="34" charset="-122"/>
+                  <a:cs typeface="Arial" pitchFamily="34" charset="-120"/>
+                </a:rPr>
+                <a:t>edges, features</a:t>
+              </a:r>
+              <a:endParaRPr lang="en-US" sz="1200" dirty="0"/>
+            </a:p>
+          </p:txBody>
+        </p:sp>
+        <p:sp>
+          <p:nvSpPr>
+            <p:cNvPr id="16" name="Text 14"/>
+            <p:cNvSpPr/>
+            <p:nvPr/>
+          </p:nvSpPr>
+          <p:spPr>
+            <a:xfrm>
+              <a:off x="5394960" y="1188720"/>
+              <a:ext cx="182880" cy="457200"/>
+            </a:xfrm>
+            <a:prstGeom prst="rect">
+              <a:avLst/>
+            </a:prstGeom>
+            <a:noFill/>
+            <a:ln/>
+          </p:spPr>
+          <p:txBody>
+            <a:bodyPr wrap="square" rtlCol="0" anchor="ctr"/>
+            <a:lstStyle/>
+            <a:p>
+              <a:pPr marL="0" indent="0">
+                <a:buNone/>
+              </a:pPr>
+              <a:r>
+                <a:rPr lang="en-US" sz="1600" dirty="0">
+                  <a:solidFill>
+                    <a:srgbClr val="6B7280"/>
+                  </a:solidFill>
+                  <a:latin typeface="Arial" pitchFamily="34" charset="0"/>
+                  <a:ea typeface="Arial" pitchFamily="34" charset="-122"/>
+                  <a:cs typeface="Arial" pitchFamily="34" charset="-120"/>
+                </a:rPr>
+                <a:t>→</a:t>
+              </a:r>
+              <a:endParaRPr lang="en-US" sz="1600" dirty="0"/>
+            </a:p>
+          </p:txBody>
+        </p:sp>
+        <p:sp>
+          <p:nvSpPr>
+            <p:cNvPr id="17" name="Shape 15"/>
+            <p:cNvSpPr/>
+            <p:nvPr/>
+          </p:nvSpPr>
+          <p:spPr>
+            <a:xfrm>
+              <a:off x="5577840" y="822960"/>
+              <a:ext cx="1600200" cy="1463040"/>
+            </a:xfrm>
+            <a:prstGeom prst="rect">
+              <a:avLst/>
+            </a:prstGeom>
+            <a:solidFill>
+              <a:srgbClr val="8B5CF6"/>
+            </a:solidFill>
+            <a:ln/>
+            <a:effectLst>
+              <a:outerShdw blurRad="50800" dist="25400" dir="8100000" algn="bl" rotWithShape="0">
+                <a:srgbClr val="000000">
+                  <a:alpha val="12000"/>
+                </a:srgbClr>
+              </a:outerShdw>
+            </a:effectLst>
+          </p:spPr>
+        </p:sp>
+        <p:sp>
+          <p:nvSpPr>
+            <p:cNvPr id="18" name="Text 16"/>
+            <p:cNvSpPr/>
+            <p:nvPr/>
+          </p:nvSpPr>
+          <p:spPr>
+            <a:xfrm>
+              <a:off x="5577840" y="868680"/>
+              <a:ext cx="1600200" cy="457200"/>
+            </a:xfrm>
+            <a:prstGeom prst="rect">
+              <a:avLst/>
+            </a:prstGeom>
+            <a:noFill/>
+            <a:ln/>
+          </p:spPr>
+          <p:txBody>
+            <a:bodyPr wrap="square" rtlCol="0" anchor="ctr"/>
+            <a:lstStyle/>
+            <a:p>
+              <a:pPr marL="0" indent="0" algn="ctr">
+                <a:buNone/>
+              </a:pPr>
+              <a:r>
+                <a:rPr lang="en-US" sz="1400" b="1" dirty="0">
+                  <a:solidFill>
+                    <a:srgbClr val="FFFFFF"/>
+                  </a:solidFill>
+                  <a:latin typeface="Arial" pitchFamily="34" charset="0"/>
+                  <a:ea typeface="Arial" pitchFamily="34" charset="-122"/>
+                  <a:cs typeface="Arial" pitchFamily="34" charset="-120"/>
+                </a:rPr>
+                <a:t>CLASSIFY</a:t>
+              </a:r>
+              <a:endParaRPr lang="en-US" sz="1400" dirty="0"/>
+            </a:p>
+          </p:txBody>
+        </p:sp>
+        <p:sp>
+          <p:nvSpPr>
+            <p:cNvPr id="19" name="Text 17"/>
+            <p:cNvSpPr/>
+            <p:nvPr/>
+          </p:nvSpPr>
+          <p:spPr>
+            <a:xfrm>
+              <a:off x="5577840" y="1371600"/>
+              <a:ext cx="1600200" cy="822960"/>
+            </a:xfrm>
+            <a:prstGeom prst="rect">
+              <a:avLst/>
+            </a:prstGeom>
+            <a:noFill/>
+            <a:ln/>
+          </p:spPr>
+          <p:txBody>
+            <a:bodyPr wrap="square" rtlCol="0" anchor="ctr"/>
+            <a:lstStyle/>
+            <a:p>
+              <a:pPr marL="0" indent="0" algn="ctr">
+                <a:buNone/>
+              </a:pPr>
+              <a:r>
+                <a:rPr lang="en-US" sz="1200" dirty="0">
+                  <a:solidFill>
+                    <a:srgbClr val="FFFFFF"/>
+                  </a:solidFill>
+                  <a:latin typeface="Arial" pitchFamily="34" charset="0"/>
+                  <a:ea typeface="Arial" pitchFamily="34" charset="-122"/>
+                  <a:cs typeface="Arial" pitchFamily="34" charset="-120"/>
+                </a:rPr>
+                <a:t>What IS it?</a:t>
+              </a:r>
+              <a:endParaRPr lang="en-US" sz="1200" dirty="0"/>
+            </a:p>
+            <a:p>
+              <a:pPr marL="0" indent="0" algn="ctr">
+                <a:buNone/>
+              </a:pPr>
+              <a:r>
+                <a:rPr lang="en-US" sz="1200" dirty="0">
+                  <a:solidFill>
+                    <a:srgbClr val="FFFFFF"/>
+                  </a:solidFill>
+                  <a:latin typeface="Arial" pitchFamily="34" charset="0"/>
+                  <a:ea typeface="Arial" pitchFamily="34" charset="-122"/>
+                  <a:cs typeface="Arial" pitchFamily="34" charset="-120"/>
+                </a:rPr>
+                <a:t>chair, door, wall</a:t>
+              </a:r>
+              <a:endParaRPr lang="en-US" sz="1200" dirty="0"/>
+            </a:p>
+          </p:txBody>
+        </p:sp>
+        <p:sp>
+          <p:nvSpPr>
+            <p:cNvPr id="20" name="Text 18"/>
+            <p:cNvSpPr/>
+            <p:nvPr/>
+          </p:nvSpPr>
+          <p:spPr>
+            <a:xfrm>
+              <a:off x="7178040" y="1188720"/>
+              <a:ext cx="182880" cy="457200"/>
+            </a:xfrm>
+            <a:prstGeom prst="rect">
+              <a:avLst/>
+            </a:prstGeom>
+            <a:noFill/>
+            <a:ln/>
+          </p:spPr>
+          <p:txBody>
+            <a:bodyPr wrap="square" rtlCol="0" anchor="ctr"/>
+            <a:lstStyle/>
+            <a:p>
+              <a:pPr marL="0" indent="0">
+                <a:buNone/>
+              </a:pPr>
+              <a:r>
+                <a:rPr lang="en-US" sz="1600" dirty="0">
+                  <a:solidFill>
+                    <a:srgbClr val="6B7280"/>
+                  </a:solidFill>
+                  <a:latin typeface="Arial" pitchFamily="34" charset="0"/>
+                  <a:ea typeface="Arial" pitchFamily="34" charset="-122"/>
+                  <a:cs typeface="Arial" pitchFamily="34" charset="-120"/>
+                </a:rPr>
+                <a:t>→</a:t>
+              </a:r>
+              <a:endParaRPr lang="en-US" sz="1600" dirty="0"/>
+            </a:p>
+          </p:txBody>
+        </p:sp>
+        <p:sp>
+          <p:nvSpPr>
+            <p:cNvPr id="21" name="Shape 19"/>
+            <p:cNvSpPr/>
+            <p:nvPr/>
+          </p:nvSpPr>
+          <p:spPr>
+            <a:xfrm>
+              <a:off x="7360920" y="822960"/>
+              <a:ext cx="1600200" cy="1463040"/>
+            </a:xfrm>
+            <a:prstGeom prst="rect">
+              <a:avLst/>
+            </a:prstGeom>
+            <a:solidFill>
+              <a:srgbClr val="10B981"/>
+            </a:solidFill>
+            <a:ln/>
+            <a:effectLst>
+              <a:outerShdw blurRad="50800" dist="25400" dir="8100000" algn="bl" rotWithShape="0">
+                <a:srgbClr val="000000">
+                  <a:alpha val="12000"/>
+                </a:srgbClr>
+              </a:outerShdw>
+            </a:effectLst>
+          </p:spPr>
+        </p:sp>
+        <p:sp>
+          <p:nvSpPr>
+            <p:cNvPr id="22" name="Text 20"/>
+            <p:cNvSpPr/>
+            <p:nvPr/>
+          </p:nvSpPr>
+          <p:spPr>
+            <a:xfrm>
+              <a:off x="7360920" y="868680"/>
+              <a:ext cx="1600200" cy="457200"/>
+            </a:xfrm>
+            <a:prstGeom prst="rect">
+              <a:avLst/>
+            </a:prstGeom>
+            <a:noFill/>
+            <a:ln/>
+          </p:spPr>
+          <p:txBody>
+            <a:bodyPr wrap="square" rtlCol="0" anchor="ctr"/>
+            <a:lstStyle/>
+            <a:p>
+              <a:pPr marL="0" indent="0" algn="ctr">
+                <a:buNone/>
+              </a:pPr>
+              <a:r>
+                <a:rPr lang="en-US" sz="1400" b="1" dirty="0">
+                  <a:solidFill>
+                    <a:srgbClr val="FFFFFF"/>
+                  </a:solidFill>
+                  <a:latin typeface="Arial" pitchFamily="34" charset="0"/>
+                  <a:ea typeface="Arial" pitchFamily="34" charset="-122"/>
+                  <a:cs typeface="Arial" pitchFamily="34" charset="-120"/>
+                </a:rPr>
+                <a:t>INTERPRET</a:t>
+              </a:r>
+              <a:endParaRPr lang="en-US" sz="1400" dirty="0"/>
+            </a:p>
+          </p:txBody>
+        </p:sp>
+        <p:sp>
+          <p:nvSpPr>
+            <p:cNvPr id="23" name="Text 21"/>
+            <p:cNvSpPr/>
+            <p:nvPr/>
+          </p:nvSpPr>
+          <p:spPr>
+            <a:xfrm>
+              <a:off x="7360920" y="1371600"/>
+              <a:ext cx="1600200" cy="822960"/>
+            </a:xfrm>
+            <a:prstGeom prst="rect">
+              <a:avLst/>
+            </a:prstGeom>
+            <a:noFill/>
+            <a:ln/>
+          </p:spPr>
+          <p:txBody>
+            <a:bodyPr wrap="square" rtlCol="0" anchor="ctr"/>
+            <a:lstStyle/>
+            <a:p>
+              <a:pPr marL="0" indent="0" algn="ctr">
+                <a:buNone/>
+              </a:pPr>
+              <a:r>
+                <a:rPr lang="en-US" sz="1200" dirty="0">
+                  <a:solidFill>
+                    <a:srgbClr val="FFFFFF"/>
+                  </a:solidFill>
+                  <a:latin typeface="Arial" pitchFamily="34" charset="0"/>
+                  <a:ea typeface="Arial" pitchFamily="34" charset="-122"/>
+                  <a:cs typeface="Arial" pitchFamily="34" charset="-120"/>
+                </a:rPr>
+                <a:t>What does it</a:t>
+              </a:r>
+              <a:endParaRPr lang="en-US" sz="1200" dirty="0"/>
+            </a:p>
+            <a:p>
+              <a:pPr marL="0" indent="0" algn="ctr">
+                <a:buNone/>
+              </a:pPr>
+              <a:r>
+                <a:rPr lang="en-US" sz="1200" dirty="0">
+                  <a:solidFill>
+                    <a:srgbClr val="FFFFFF"/>
+                  </a:solidFill>
+                  <a:latin typeface="Arial" pitchFamily="34" charset="0"/>
+                  <a:ea typeface="Arial" pitchFamily="34" charset="-122"/>
+                  <a:cs typeface="Arial" pitchFamily="34" charset="-120"/>
+                </a:rPr>
+                <a:t>MEAN for the robot?</a:t>
+              </a:r>
+              <a:endParaRPr lang="en-US" sz="1200" dirty="0"/>
+            </a:p>
+          </p:txBody>
+        </p:sp>
+      </p:grpSp>
       <p:sp>
         <p:nvSpPr>
           <p:cNvPr id="24" name="Text 22"/>
